--- a/Razonamiento lógico/PPTXs/razonamiento-logico.pptx
+++ b/Razonamiento lógico/PPTXs/razonamiento-logico.pptx
@@ -5,25 +5,24 @@
     <p:sldMasterId id="2147483648" r:id="rId1"/>
   </p:sldMasterIdLst>
   <p:sldIdLst>
-    <p:sldId id="256" r:id="rId7"/>
-    <p:sldId id="257" r:id="rId8"/>
-    <p:sldId id="258" r:id="rId9"/>
-    <p:sldId id="259" r:id="rId10"/>
-    <p:sldId id="260" r:id="rId11"/>
-    <p:sldId id="261" r:id="rId12"/>
-    <p:sldId id="262" r:id="rId13"/>
-    <p:sldId id="263" r:id="rId14"/>
-    <p:sldId id="264" r:id="rId15"/>
-    <p:sldId id="265" r:id="rId16"/>
-    <p:sldId id="266" r:id="rId17"/>
-    <p:sldId id="267" r:id="rId18"/>
-    <p:sldId id="268" r:id="rId19"/>
-    <p:sldId id="269" r:id="rId20"/>
-    <p:sldId id="270" r:id="rId21"/>
-    <p:sldId id="271" r:id="rId22"/>
-    <p:sldId id="272" r:id="rId23"/>
+    <p:sldId id="256" r:id="rId2"/>
+    <p:sldId id="257" r:id="rId3"/>
+    <p:sldId id="258" r:id="rId4"/>
+    <p:sldId id="259" r:id="rId5"/>
+    <p:sldId id="260" r:id="rId6"/>
+    <p:sldId id="261" r:id="rId7"/>
+    <p:sldId id="262" r:id="rId8"/>
+    <p:sldId id="263" r:id="rId9"/>
+    <p:sldId id="264" r:id="rId10"/>
+    <p:sldId id="265" r:id="rId11"/>
+    <p:sldId id="266" r:id="rId12"/>
+    <p:sldId id="267" r:id="rId13"/>
+    <p:sldId id="268" r:id="rId14"/>
+    <p:sldId id="269" r:id="rId15"/>
+    <p:sldId id="270" r:id="rId16"/>
+    <p:sldId id="271" r:id="rId17"/>
   </p:sldIdLst>
-  <p:sldSz cx="12191999" cy="6858000" type="screen4x3"/>
+  <p:sldSz cx="12192000" cy="6858000"/>
   <p:notesSz cx="6858000" cy="9144000"/>
   <p:defaultTextStyle>
     <a:defPPr>
@@ -120,6 +119,22 @@
       </a:defRPr>
     </a:lvl9pPr>
   </p:defaultTextStyle>
+  <p:extLst>
+    <p:ext uri="{EFAFB233-063F-42B5-8137-9DF3F51BA10A}">
+      <p15:sldGuideLst xmlns:p15="http://schemas.microsoft.com/office/powerpoint/2012/main">
+        <p15:guide id="1" orient="horz" pos="2160">
+          <p15:clr>
+            <a:srgbClr val="A4A3A4"/>
+          </p15:clr>
+        </p15:guide>
+        <p15:guide id="2" pos="2880">
+          <p15:clr>
+            <a:srgbClr val="A4A3A4"/>
+          </p15:clr>
+        </p15:guide>
+      </p15:sldGuideLst>
+    </p:ext>
+  </p:extLst>
 </p:presentation>
 </file>
 
@@ -161,10 +176,9 @@
           <a:lstStyle/>
           <a:p>
             <a:r>
-              <a:rPr lang="en-US" smtClean="0"/>
+              <a:rPr lang="en-US"/>
               <a:t>Click to edit Master title style</a:t>
             </a:r>
-            <a:endParaRPr lang="en-US"/>
           </a:p>
         </p:txBody>
       </p:sp>
@@ -280,10 +294,9 @@
           </a:lstStyle>
           <a:p>
             <a:r>
-              <a:rPr lang="en-US" smtClean="0"/>
+              <a:rPr lang="en-US"/>
               <a:t>Click to edit Master subtitle style</a:t>
             </a:r>
-            <a:endParaRPr lang="en-US"/>
           </a:p>
         </p:txBody>
       </p:sp>
@@ -304,7 +317,7 @@
           <a:p>
             <a:fld id="{5BCAD085-E8A6-8845-BD4E-CB4CCA059FC4}" type="datetimeFigureOut">
               <a:rPr lang="en-US" smtClean="0"/>
-              <a:t>1/27/13</a:t>
+              <a:t>10/26/26</a:t>
             </a:fld>
             <a:endParaRPr lang="en-US"/>
           </a:p>
@@ -346,7 +359,7 @@
           <a:p>
             <a:fld id="{C1FF6DA9-008F-8B48-92A6-B652298478BF}" type="slidenum">
               <a:rPr lang="en-US" smtClean="0"/>
-              <a:t>‹#›</a:t>
+              <a:t>‹Nº›</a:t>
             </a:fld>
             <a:endParaRPr lang="en-US"/>
           </a:p>
@@ -398,10 +411,9 @@
           <a:lstStyle/>
           <a:p>
             <a:r>
-              <a:rPr lang="en-US" smtClean="0"/>
+              <a:rPr lang="en-US"/>
               <a:t>Click to edit Master title style</a:t>
             </a:r>
-            <a:endParaRPr lang="en-US"/>
           </a:p>
         </p:txBody>
       </p:sp>
@@ -422,38 +434,37 @@
           <a:p>
             <a:pPr lvl="0"/>
             <a:r>
-              <a:rPr lang="en-US" smtClean="0"/>
+              <a:rPr lang="en-US"/>
               <a:t>Click to edit Master text styles</a:t>
             </a:r>
           </a:p>
           <a:p>
             <a:pPr lvl="1"/>
             <a:r>
-              <a:rPr lang="en-US" smtClean="0"/>
+              <a:rPr lang="en-US"/>
               <a:t>Second level</a:t>
             </a:r>
           </a:p>
           <a:p>
             <a:pPr lvl="2"/>
             <a:r>
-              <a:rPr lang="en-US" smtClean="0"/>
+              <a:rPr lang="en-US"/>
               <a:t>Third level</a:t>
             </a:r>
           </a:p>
           <a:p>
             <a:pPr lvl="3"/>
             <a:r>
-              <a:rPr lang="en-US" smtClean="0"/>
+              <a:rPr lang="en-US"/>
               <a:t>Fourth level</a:t>
             </a:r>
           </a:p>
           <a:p>
             <a:pPr lvl="4"/>
             <a:r>
-              <a:rPr lang="en-US" smtClean="0"/>
+              <a:rPr lang="en-US"/>
               <a:t>Fifth level</a:t>
             </a:r>
-            <a:endParaRPr lang="en-US"/>
           </a:p>
         </p:txBody>
       </p:sp>
@@ -474,7 +485,7 @@
           <a:p>
             <a:fld id="{5BCAD085-E8A6-8845-BD4E-CB4CCA059FC4}" type="datetimeFigureOut">
               <a:rPr lang="en-US" smtClean="0"/>
-              <a:t>1/27/13</a:t>
+              <a:t>10/26/26</a:t>
             </a:fld>
             <a:endParaRPr lang="en-US"/>
           </a:p>
@@ -516,7 +527,7 @@
           <a:p>
             <a:fld id="{C1FF6DA9-008F-8B48-92A6-B652298478BF}" type="slidenum">
               <a:rPr lang="en-US" smtClean="0"/>
-              <a:t>‹#›</a:t>
+              <a:t>‹Nº›</a:t>
             </a:fld>
             <a:endParaRPr lang="en-US"/>
           </a:p>
@@ -573,10 +584,9 @@
           <a:lstStyle/>
           <a:p>
             <a:r>
-              <a:rPr lang="en-US" smtClean="0"/>
+              <a:rPr lang="en-US"/>
               <a:t>Click to edit Master title style</a:t>
             </a:r>
-            <a:endParaRPr lang="en-US"/>
           </a:p>
         </p:txBody>
       </p:sp>
@@ -602,38 +612,37 @@
           <a:p>
             <a:pPr lvl="0"/>
             <a:r>
-              <a:rPr lang="en-US" smtClean="0"/>
+              <a:rPr lang="en-US"/>
               <a:t>Click to edit Master text styles</a:t>
             </a:r>
           </a:p>
           <a:p>
             <a:pPr lvl="1"/>
             <a:r>
-              <a:rPr lang="en-US" smtClean="0"/>
+              <a:rPr lang="en-US"/>
               <a:t>Second level</a:t>
             </a:r>
           </a:p>
           <a:p>
             <a:pPr lvl="2"/>
             <a:r>
-              <a:rPr lang="en-US" smtClean="0"/>
+              <a:rPr lang="en-US"/>
               <a:t>Third level</a:t>
             </a:r>
           </a:p>
           <a:p>
             <a:pPr lvl="3"/>
             <a:r>
-              <a:rPr lang="en-US" smtClean="0"/>
+              <a:rPr lang="en-US"/>
               <a:t>Fourth level</a:t>
             </a:r>
           </a:p>
           <a:p>
             <a:pPr lvl="4"/>
             <a:r>
-              <a:rPr lang="en-US" smtClean="0"/>
+              <a:rPr lang="en-US"/>
               <a:t>Fifth level</a:t>
             </a:r>
-            <a:endParaRPr lang="en-US"/>
           </a:p>
         </p:txBody>
       </p:sp>
@@ -654,7 +663,7 @@
           <a:p>
             <a:fld id="{5BCAD085-E8A6-8845-BD4E-CB4CCA059FC4}" type="datetimeFigureOut">
               <a:rPr lang="en-US" smtClean="0"/>
-              <a:t>1/27/13</a:t>
+              <a:t>10/26/26</a:t>
             </a:fld>
             <a:endParaRPr lang="en-US"/>
           </a:p>
@@ -696,7 +705,7 @@
           <a:p>
             <a:fld id="{C1FF6DA9-008F-8B48-92A6-B652298478BF}" type="slidenum">
               <a:rPr lang="en-US" smtClean="0"/>
-              <a:t>‹#›</a:t>
+              <a:t>‹Nº›</a:t>
             </a:fld>
             <a:endParaRPr lang="en-US"/>
           </a:p>
@@ -748,10 +757,9 @@
           <a:lstStyle/>
           <a:p>
             <a:r>
-              <a:rPr lang="en-US" smtClean="0"/>
+              <a:rPr lang="en-US"/>
               <a:t>Click to edit Master title style</a:t>
             </a:r>
-            <a:endParaRPr lang="en-US"/>
           </a:p>
         </p:txBody>
       </p:sp>
@@ -772,38 +780,37 @@
           <a:p>
             <a:pPr lvl="0"/>
             <a:r>
-              <a:rPr lang="en-US" smtClean="0"/>
+              <a:rPr lang="en-US"/>
               <a:t>Click to edit Master text styles</a:t>
             </a:r>
           </a:p>
           <a:p>
             <a:pPr lvl="1"/>
             <a:r>
-              <a:rPr lang="en-US" smtClean="0"/>
+              <a:rPr lang="en-US"/>
               <a:t>Second level</a:t>
             </a:r>
           </a:p>
           <a:p>
             <a:pPr lvl="2"/>
             <a:r>
-              <a:rPr lang="en-US" smtClean="0"/>
+              <a:rPr lang="en-US"/>
               <a:t>Third level</a:t>
             </a:r>
           </a:p>
           <a:p>
             <a:pPr lvl="3"/>
             <a:r>
-              <a:rPr lang="en-US" smtClean="0"/>
+              <a:rPr lang="en-US"/>
               <a:t>Fourth level</a:t>
             </a:r>
           </a:p>
           <a:p>
             <a:pPr lvl="4"/>
             <a:r>
-              <a:rPr lang="en-US" smtClean="0"/>
+              <a:rPr lang="en-US"/>
               <a:t>Fifth level</a:t>
             </a:r>
-            <a:endParaRPr lang="en-US"/>
           </a:p>
         </p:txBody>
       </p:sp>
@@ -824,7 +831,7 @@
           <a:p>
             <a:fld id="{5BCAD085-E8A6-8845-BD4E-CB4CCA059FC4}" type="datetimeFigureOut">
               <a:rPr lang="en-US" smtClean="0"/>
-              <a:t>1/27/13</a:t>
+              <a:t>10/26/26</a:t>
             </a:fld>
             <a:endParaRPr lang="en-US"/>
           </a:p>
@@ -866,7 +873,7 @@
           <a:p>
             <a:fld id="{C1FF6DA9-008F-8B48-92A6-B652298478BF}" type="slidenum">
               <a:rPr lang="en-US" smtClean="0"/>
-              <a:t>‹#›</a:t>
+              <a:t>‹Nº›</a:t>
             </a:fld>
             <a:endParaRPr lang="en-US"/>
           </a:p>
@@ -927,10 +934,9 @@
           </a:lstStyle>
           <a:p>
             <a:r>
-              <a:rPr lang="en-US" smtClean="0"/>
+              <a:rPr lang="en-US"/>
               <a:t>Click to edit Master title style</a:t>
             </a:r>
-            <a:endParaRPr lang="en-US"/>
           </a:p>
         </p:txBody>
       </p:sp>
@@ -1047,7 +1053,7 @@
           <a:p>
             <a:pPr lvl="0"/>
             <a:r>
-              <a:rPr lang="en-US" smtClean="0"/>
+              <a:rPr lang="en-US"/>
               <a:t>Click to edit Master text styles</a:t>
             </a:r>
           </a:p>
@@ -1070,7 +1076,7 @@
           <a:p>
             <a:fld id="{5BCAD085-E8A6-8845-BD4E-CB4CCA059FC4}" type="datetimeFigureOut">
               <a:rPr lang="en-US" smtClean="0"/>
-              <a:t>1/27/13</a:t>
+              <a:t>10/26/26</a:t>
             </a:fld>
             <a:endParaRPr lang="en-US"/>
           </a:p>
@@ -1112,7 +1118,7 @@
           <a:p>
             <a:fld id="{C1FF6DA9-008F-8B48-92A6-B652298478BF}" type="slidenum">
               <a:rPr lang="en-US" smtClean="0"/>
-              <a:t>‹#›</a:t>
+              <a:t>‹Nº›</a:t>
             </a:fld>
             <a:endParaRPr lang="en-US"/>
           </a:p>
@@ -1164,10 +1170,9 @@
           <a:lstStyle/>
           <a:p>
             <a:r>
-              <a:rPr lang="en-US" smtClean="0"/>
+              <a:rPr lang="en-US"/>
               <a:t>Click to edit Master title style</a:t>
             </a:r>
-            <a:endParaRPr lang="en-US"/>
           </a:p>
         </p:txBody>
       </p:sp>
@@ -1221,38 +1226,37 @@
           <a:p>
             <a:pPr lvl="0"/>
             <a:r>
-              <a:rPr lang="en-US" smtClean="0"/>
+              <a:rPr lang="en-US"/>
               <a:t>Click to edit Master text styles</a:t>
             </a:r>
           </a:p>
           <a:p>
             <a:pPr lvl="1"/>
             <a:r>
-              <a:rPr lang="en-US" smtClean="0"/>
+              <a:rPr lang="en-US"/>
               <a:t>Second level</a:t>
             </a:r>
           </a:p>
           <a:p>
             <a:pPr lvl="2"/>
             <a:r>
-              <a:rPr lang="en-US" smtClean="0"/>
+              <a:rPr lang="en-US"/>
               <a:t>Third level</a:t>
             </a:r>
           </a:p>
           <a:p>
             <a:pPr lvl="3"/>
             <a:r>
-              <a:rPr lang="en-US" smtClean="0"/>
+              <a:rPr lang="en-US"/>
               <a:t>Fourth level</a:t>
             </a:r>
           </a:p>
           <a:p>
             <a:pPr lvl="4"/>
             <a:r>
-              <a:rPr lang="en-US" smtClean="0"/>
+              <a:rPr lang="en-US"/>
               <a:t>Fifth level</a:t>
             </a:r>
-            <a:endParaRPr lang="en-US"/>
           </a:p>
         </p:txBody>
       </p:sp>
@@ -1306,38 +1310,37 @@
           <a:p>
             <a:pPr lvl="0"/>
             <a:r>
-              <a:rPr lang="en-US" smtClean="0"/>
+              <a:rPr lang="en-US"/>
               <a:t>Click to edit Master text styles</a:t>
             </a:r>
           </a:p>
           <a:p>
             <a:pPr lvl="1"/>
             <a:r>
-              <a:rPr lang="en-US" smtClean="0"/>
+              <a:rPr lang="en-US"/>
               <a:t>Second level</a:t>
             </a:r>
           </a:p>
           <a:p>
             <a:pPr lvl="2"/>
             <a:r>
-              <a:rPr lang="en-US" smtClean="0"/>
+              <a:rPr lang="en-US"/>
               <a:t>Third level</a:t>
             </a:r>
           </a:p>
           <a:p>
             <a:pPr lvl="3"/>
             <a:r>
-              <a:rPr lang="en-US" smtClean="0"/>
+              <a:rPr lang="en-US"/>
               <a:t>Fourth level</a:t>
             </a:r>
           </a:p>
           <a:p>
             <a:pPr lvl="4"/>
             <a:r>
-              <a:rPr lang="en-US" smtClean="0"/>
+              <a:rPr lang="en-US"/>
               <a:t>Fifth level</a:t>
             </a:r>
-            <a:endParaRPr lang="en-US"/>
           </a:p>
         </p:txBody>
       </p:sp>
@@ -1358,7 +1361,7 @@
           <a:p>
             <a:fld id="{5BCAD085-E8A6-8845-BD4E-CB4CCA059FC4}" type="datetimeFigureOut">
               <a:rPr lang="en-US" smtClean="0"/>
-              <a:t>1/27/13</a:t>
+              <a:t>10/26/26</a:t>
             </a:fld>
             <a:endParaRPr lang="en-US"/>
           </a:p>
@@ -1400,7 +1403,7 @@
           <a:p>
             <a:fld id="{C1FF6DA9-008F-8B48-92A6-B652298478BF}" type="slidenum">
               <a:rPr lang="en-US" smtClean="0"/>
-              <a:t>‹#›</a:t>
+              <a:t>‹Nº›</a:t>
             </a:fld>
             <a:endParaRPr lang="en-US"/>
           </a:p>
@@ -1456,10 +1459,9 @@
           </a:lstStyle>
           <a:p>
             <a:r>
-              <a:rPr lang="en-US" smtClean="0"/>
+              <a:rPr lang="en-US"/>
               <a:t>Click to edit Master title style</a:t>
             </a:r>
-            <a:endParaRPr lang="en-US"/>
           </a:p>
         </p:txBody>
       </p:sp>
@@ -1522,7 +1524,7 @@
           <a:p>
             <a:pPr lvl="0"/>
             <a:r>
-              <a:rPr lang="en-US" smtClean="0"/>
+              <a:rPr lang="en-US"/>
               <a:t>Click to edit Master text styles</a:t>
             </a:r>
           </a:p>
@@ -1578,38 +1580,37 @@
           <a:p>
             <a:pPr lvl="0"/>
             <a:r>
-              <a:rPr lang="en-US" smtClean="0"/>
+              <a:rPr lang="en-US"/>
               <a:t>Click to edit Master text styles</a:t>
             </a:r>
           </a:p>
           <a:p>
             <a:pPr lvl="1"/>
             <a:r>
-              <a:rPr lang="en-US" smtClean="0"/>
+              <a:rPr lang="en-US"/>
               <a:t>Second level</a:t>
             </a:r>
           </a:p>
           <a:p>
             <a:pPr lvl="2"/>
             <a:r>
-              <a:rPr lang="en-US" smtClean="0"/>
+              <a:rPr lang="en-US"/>
               <a:t>Third level</a:t>
             </a:r>
           </a:p>
           <a:p>
             <a:pPr lvl="3"/>
             <a:r>
-              <a:rPr lang="en-US" smtClean="0"/>
+              <a:rPr lang="en-US"/>
               <a:t>Fourth level</a:t>
             </a:r>
           </a:p>
           <a:p>
             <a:pPr lvl="4"/>
             <a:r>
-              <a:rPr lang="en-US" smtClean="0"/>
+              <a:rPr lang="en-US"/>
               <a:t>Fifth level</a:t>
             </a:r>
-            <a:endParaRPr lang="en-US"/>
           </a:p>
         </p:txBody>
       </p:sp>
@@ -1672,7 +1673,7 @@
           <a:p>
             <a:pPr lvl="0"/>
             <a:r>
-              <a:rPr lang="en-US" smtClean="0"/>
+              <a:rPr lang="en-US"/>
               <a:t>Click to edit Master text styles</a:t>
             </a:r>
           </a:p>
@@ -1728,38 +1729,37 @@
           <a:p>
             <a:pPr lvl="0"/>
             <a:r>
-              <a:rPr lang="en-US" smtClean="0"/>
+              <a:rPr lang="en-US"/>
               <a:t>Click to edit Master text styles</a:t>
             </a:r>
           </a:p>
           <a:p>
             <a:pPr lvl="1"/>
             <a:r>
-              <a:rPr lang="en-US" smtClean="0"/>
+              <a:rPr lang="en-US"/>
               <a:t>Second level</a:t>
             </a:r>
           </a:p>
           <a:p>
             <a:pPr lvl="2"/>
             <a:r>
-              <a:rPr lang="en-US" smtClean="0"/>
+              <a:rPr lang="en-US"/>
               <a:t>Third level</a:t>
             </a:r>
           </a:p>
           <a:p>
             <a:pPr lvl="3"/>
             <a:r>
-              <a:rPr lang="en-US" smtClean="0"/>
+              <a:rPr lang="en-US"/>
               <a:t>Fourth level</a:t>
             </a:r>
           </a:p>
           <a:p>
             <a:pPr lvl="4"/>
             <a:r>
-              <a:rPr lang="en-US" smtClean="0"/>
+              <a:rPr lang="en-US"/>
               <a:t>Fifth level</a:t>
             </a:r>
-            <a:endParaRPr lang="en-US"/>
           </a:p>
         </p:txBody>
       </p:sp>
@@ -1780,7 +1780,7 @@
           <a:p>
             <a:fld id="{5BCAD085-E8A6-8845-BD4E-CB4CCA059FC4}" type="datetimeFigureOut">
               <a:rPr lang="en-US" smtClean="0"/>
-              <a:t>1/27/13</a:t>
+              <a:t>10/26/26</a:t>
             </a:fld>
             <a:endParaRPr lang="en-US"/>
           </a:p>
@@ -1822,7 +1822,7 @@
           <a:p>
             <a:fld id="{C1FF6DA9-008F-8B48-92A6-B652298478BF}" type="slidenum">
               <a:rPr lang="en-US" smtClean="0"/>
-              <a:t>‹#›</a:t>
+              <a:t>‹Nº›</a:t>
             </a:fld>
             <a:endParaRPr lang="en-US"/>
           </a:p>
@@ -1874,10 +1874,9 @@
           <a:lstStyle/>
           <a:p>
             <a:r>
-              <a:rPr lang="en-US" smtClean="0"/>
+              <a:rPr lang="en-US"/>
               <a:t>Click to edit Master title style</a:t>
             </a:r>
-            <a:endParaRPr lang="en-US"/>
           </a:p>
         </p:txBody>
       </p:sp>
@@ -1898,7 +1897,7 @@
           <a:p>
             <a:fld id="{5BCAD085-E8A6-8845-BD4E-CB4CCA059FC4}" type="datetimeFigureOut">
               <a:rPr lang="en-US" smtClean="0"/>
-              <a:t>1/27/13</a:t>
+              <a:t>10/26/26</a:t>
             </a:fld>
             <a:endParaRPr lang="en-US"/>
           </a:p>
@@ -1940,7 +1939,7 @@
           <a:p>
             <a:fld id="{C1FF6DA9-008F-8B48-92A6-B652298478BF}" type="slidenum">
               <a:rPr lang="en-US" smtClean="0"/>
-              <a:t>‹#›</a:t>
+              <a:t>‹Nº›</a:t>
             </a:fld>
             <a:endParaRPr lang="en-US"/>
           </a:p>
@@ -1993,7 +1992,7 @@
           <a:p>
             <a:fld id="{5BCAD085-E8A6-8845-BD4E-CB4CCA059FC4}" type="datetimeFigureOut">
               <a:rPr lang="en-US" smtClean="0"/>
-              <a:t>1/27/13</a:t>
+              <a:t>10/26/26</a:t>
             </a:fld>
             <a:endParaRPr lang="en-US"/>
           </a:p>
@@ -2035,7 +2034,7 @@
           <a:p>
             <a:fld id="{C1FF6DA9-008F-8B48-92A6-B652298478BF}" type="slidenum">
               <a:rPr lang="en-US" smtClean="0"/>
-              <a:t>‹#›</a:t>
+              <a:t>‹Nº›</a:t>
             </a:fld>
             <a:endParaRPr lang="en-US"/>
           </a:p>
@@ -2096,10 +2095,9 @@
           </a:lstStyle>
           <a:p>
             <a:r>
-              <a:rPr lang="en-US" smtClean="0"/>
+              <a:rPr lang="en-US"/>
               <a:t>Click to edit Master title style</a:t>
             </a:r>
-            <a:endParaRPr lang="en-US"/>
           </a:p>
         </p:txBody>
       </p:sp>
@@ -2153,38 +2151,37 @@
           <a:p>
             <a:pPr lvl="0"/>
             <a:r>
-              <a:rPr lang="en-US" smtClean="0"/>
+              <a:rPr lang="en-US"/>
               <a:t>Click to edit Master text styles</a:t>
             </a:r>
           </a:p>
           <a:p>
             <a:pPr lvl="1"/>
             <a:r>
-              <a:rPr lang="en-US" smtClean="0"/>
+              <a:rPr lang="en-US"/>
               <a:t>Second level</a:t>
             </a:r>
           </a:p>
           <a:p>
             <a:pPr lvl="2"/>
             <a:r>
-              <a:rPr lang="en-US" smtClean="0"/>
+              <a:rPr lang="en-US"/>
               <a:t>Third level</a:t>
             </a:r>
           </a:p>
           <a:p>
             <a:pPr lvl="3"/>
             <a:r>
-              <a:rPr lang="en-US" smtClean="0"/>
+              <a:rPr lang="en-US"/>
               <a:t>Fourth level</a:t>
             </a:r>
           </a:p>
           <a:p>
             <a:pPr lvl="4"/>
             <a:r>
-              <a:rPr lang="en-US" smtClean="0"/>
+              <a:rPr lang="en-US"/>
               <a:t>Fifth level</a:t>
             </a:r>
-            <a:endParaRPr lang="en-US"/>
           </a:p>
         </p:txBody>
       </p:sp>
@@ -2247,7 +2244,7 @@
           <a:p>
             <a:pPr lvl="0"/>
             <a:r>
-              <a:rPr lang="en-US" smtClean="0"/>
+              <a:rPr lang="en-US"/>
               <a:t>Click to edit Master text styles</a:t>
             </a:r>
           </a:p>
@@ -2270,7 +2267,7 @@
           <a:p>
             <a:fld id="{5BCAD085-E8A6-8845-BD4E-CB4CCA059FC4}" type="datetimeFigureOut">
               <a:rPr lang="en-US" smtClean="0"/>
-              <a:t>1/27/13</a:t>
+              <a:t>10/26/26</a:t>
             </a:fld>
             <a:endParaRPr lang="en-US"/>
           </a:p>
@@ -2312,7 +2309,7 @@
           <a:p>
             <a:fld id="{C1FF6DA9-008F-8B48-92A6-B652298478BF}" type="slidenum">
               <a:rPr lang="en-US" smtClean="0"/>
-              <a:t>‹#›</a:t>
+              <a:t>‹Nº›</a:t>
             </a:fld>
             <a:endParaRPr lang="en-US"/>
           </a:p>
@@ -2373,10 +2370,9 @@
           </a:lstStyle>
           <a:p>
             <a:r>
-              <a:rPr lang="en-US" smtClean="0"/>
+              <a:rPr lang="en-US"/>
               <a:t>Click to edit Master title style</a:t>
             </a:r>
-            <a:endParaRPr lang="en-US"/>
           </a:p>
         </p:txBody>
       </p:sp>
@@ -2500,7 +2496,7 @@
           <a:p>
             <a:pPr lvl="0"/>
             <a:r>
-              <a:rPr lang="en-US" smtClean="0"/>
+              <a:rPr lang="en-US"/>
               <a:t>Click to edit Master text styles</a:t>
             </a:r>
           </a:p>
@@ -2523,7 +2519,7 @@
           <a:p>
             <a:fld id="{5BCAD085-E8A6-8845-BD4E-CB4CCA059FC4}" type="datetimeFigureOut">
               <a:rPr lang="en-US" smtClean="0"/>
-              <a:t>1/27/13</a:t>
+              <a:t>10/26/26</a:t>
             </a:fld>
             <a:endParaRPr lang="en-US"/>
           </a:p>
@@ -2565,7 +2561,7 @@
           <a:p>
             <a:fld id="{C1FF6DA9-008F-8B48-92A6-B652298478BF}" type="slidenum">
               <a:rPr lang="en-US" smtClean="0"/>
-              <a:t>‹#›</a:t>
+              <a:t>‹Nº›</a:t>
             </a:fld>
             <a:endParaRPr lang="en-US"/>
           </a:p>
@@ -2632,10 +2628,9 @@
           <a:lstStyle/>
           <a:p>
             <a:r>
-              <a:rPr lang="en-US" smtClean="0"/>
+              <a:rPr lang="en-US"/>
               <a:t>Click to edit Master title style</a:t>
             </a:r>
-            <a:endParaRPr lang="en-US"/>
           </a:p>
         </p:txBody>
       </p:sp>
@@ -2666,38 +2661,37 @@
           <a:p>
             <a:pPr lvl="0"/>
             <a:r>
-              <a:rPr lang="en-US" smtClean="0"/>
+              <a:rPr lang="en-US"/>
               <a:t>Click to edit Master text styles</a:t>
             </a:r>
           </a:p>
           <a:p>
             <a:pPr lvl="1"/>
             <a:r>
-              <a:rPr lang="en-US" smtClean="0"/>
+              <a:rPr lang="en-US"/>
               <a:t>Second level</a:t>
             </a:r>
           </a:p>
           <a:p>
             <a:pPr lvl="2"/>
             <a:r>
-              <a:rPr lang="en-US" smtClean="0"/>
+              <a:rPr lang="en-US"/>
               <a:t>Third level</a:t>
             </a:r>
           </a:p>
           <a:p>
             <a:pPr lvl="3"/>
             <a:r>
-              <a:rPr lang="en-US" smtClean="0"/>
+              <a:rPr lang="en-US"/>
               <a:t>Fourth level</a:t>
             </a:r>
           </a:p>
           <a:p>
             <a:pPr lvl="4"/>
             <a:r>
-              <a:rPr lang="en-US" smtClean="0"/>
+              <a:rPr lang="en-US"/>
               <a:t>Fifth level</a:t>
             </a:r>
-            <a:endParaRPr lang="en-US"/>
           </a:p>
         </p:txBody>
       </p:sp>
@@ -2736,7 +2730,7 @@
           <a:p>
             <a:fld id="{5BCAD085-E8A6-8845-BD4E-CB4CCA059FC4}" type="datetimeFigureOut">
               <a:rPr lang="en-US" smtClean="0"/>
-              <a:t>1/27/13</a:t>
+              <a:t>10/26/26</a:t>
             </a:fld>
             <a:endParaRPr lang="en-US"/>
           </a:p>
@@ -2814,7 +2808,7 @@
           <a:p>
             <a:fld id="{C1FF6DA9-008F-8B48-92A6-B652298478BF}" type="slidenum">
               <a:rPr lang="en-US" smtClean="0"/>
-              <a:t>‹#›</a:t>
+              <a:t>‹Nº›</a:t>
             </a:fld>
             <a:endParaRPr lang="en-US"/>
           </a:p>
@@ -3095,7 +3089,7 @@
 </file>
 
 <file path=ppt/slides/slide1.xml><?xml version="1.0" encoding="utf-8"?>
-<p:sld xmlns:a="http://schemas.openxmlformats.org/drawingml/2006/main" xmlns:p="http://schemas.openxmlformats.org/presentationml/2006/main" xmlns:r="http://schemas.openxmlformats.org/officeDocument/2006/relationships">
+<p:sld xmlns:a="http://schemas.openxmlformats.org/drawingml/2006/main" xmlns:r="http://schemas.openxmlformats.org/officeDocument/2006/relationships" xmlns:p="http://schemas.openxmlformats.org/presentationml/2006/main">
   <p:cSld>
     <p:spTree>
       <p:nvGrpSpPr>
@@ -3103,7 +3097,14 @@
         <p:cNvGrpSpPr/>
         <p:nvPr/>
       </p:nvGrpSpPr>
-      <p:grpSpPr/>
+      <p:grpSpPr>
+        <a:xfrm>
+          <a:off x="0" y="0"/>
+          <a:ext cx="0" cy="0"/>
+          <a:chOff x="0" y="0"/>
+          <a:chExt cx="0" cy="0"/>
+        </a:xfrm>
+      </p:grpSpPr>
       <p:sp>
         <p:nvSpPr>
           <p:cNvPr id="2" name="Rectangle 1"/>
@@ -3144,6 +3145,7 @@
           <a:lstStyle/>
           <a:p>
             <a:pPr algn="ctr"/>
+            <a:endParaRPr/>
           </a:p>
         </p:txBody>
       </p:sp>
@@ -3187,6 +3189,7 @@
           <a:lstStyle/>
           <a:p>
             <a:pPr algn="ctr"/>
+            <a:endParaRPr/>
           </a:p>
         </p:txBody>
       </p:sp>
@@ -3340,7 +3343,7 @@
 </file>
 
 <file path=ppt/slides/slide10.xml><?xml version="1.0" encoding="utf-8"?>
-<p:sld xmlns:a="http://schemas.openxmlformats.org/drawingml/2006/main" xmlns:p="http://schemas.openxmlformats.org/presentationml/2006/main" xmlns:r="http://schemas.openxmlformats.org/officeDocument/2006/relationships">
+<p:sld xmlns:a="http://schemas.openxmlformats.org/drawingml/2006/main" xmlns:r="http://schemas.openxmlformats.org/officeDocument/2006/relationships" xmlns:p="http://schemas.openxmlformats.org/presentationml/2006/main">
   <p:cSld>
     <p:spTree>
       <p:nvGrpSpPr>
@@ -3348,7 +3351,14 @@
         <p:cNvGrpSpPr/>
         <p:nvPr/>
       </p:nvGrpSpPr>
-      <p:grpSpPr/>
+      <p:grpSpPr>
+        <a:xfrm>
+          <a:off x="0" y="0"/>
+          <a:ext cx="0" cy="0"/>
+          <a:chOff x="0" y="0"/>
+          <a:chExt cx="0" cy="0"/>
+        </a:xfrm>
+      </p:grpSpPr>
       <p:sp>
         <p:nvSpPr>
           <p:cNvPr id="2" name="Rectangle 1"/>
@@ -3389,6 +3399,7 @@
           <a:lstStyle/>
           <a:p>
             <a:pPr algn="ctr"/>
+            <a:endParaRPr/>
           </a:p>
         </p:txBody>
       </p:sp>
@@ -3432,6 +3443,7 @@
           <a:lstStyle/>
           <a:p>
             <a:pPr algn="ctr"/>
+            <a:endParaRPr/>
           </a:p>
         </p:txBody>
       </p:sp>
@@ -3475,6 +3487,7 @@
           <a:lstStyle/>
           <a:p>
             <a:pPr algn="ctr"/>
+            <a:endParaRPr/>
           </a:p>
         </p:txBody>
       </p:sp>
@@ -3509,41 +3522,6 @@
                 <a:latin typeface="Calibri"/>
               </a:rPr>
               <a:t>Curso de Inteligencia Artificial  ·  Razonamiento lógico</a:t>
-            </a:r>
-          </a:p>
-        </p:txBody>
-      </p:sp>
-      <p:sp>
-        <p:nvSpPr>
-          <p:cNvPr id="6" name="TextBox 5"/>
-          <p:cNvSpPr txBox="1"/>
-          <p:nvPr/>
-        </p:nvSpPr>
-        <p:spPr>
-          <a:xfrm>
-            <a:off x="10378440" y="6528816"/>
-            <a:ext cx="1371600" cy="292608"/>
-          </a:xfrm>
-          <a:prstGeom prst="rect">
-            <a:avLst/>
-          </a:prstGeom>
-          <a:noFill/>
-        </p:spPr>
-        <p:txBody>
-          <a:bodyPr wrap="square" anchor="ctr">
-            <a:spAutoFit/>
-          </a:bodyPr>
-          <a:lstStyle/>
-          <a:p>
-            <a:pPr algn="r"/>
-            <a:r>
-              <a:rPr sz="1100" b="0">
-                <a:solidFill>
-                  <a:srgbClr val="FFFFFF"/>
-                </a:solidFill>
-                <a:latin typeface="Calibri"/>
-              </a:rPr>
-              <a:t>10 / 17</a:t>
             </a:r>
           </a:p>
         </p:txBody>
@@ -3623,6 +3601,7 @@
           <a:lstStyle/>
           <a:p>
             <a:pPr algn="ctr"/>
+            <a:endParaRPr/>
           </a:p>
         </p:txBody>
       </p:sp>
@@ -3705,6 +3684,7 @@
           <a:lstStyle/>
           <a:p>
             <a:pPr algn="ctr"/>
+            <a:endParaRPr/>
           </a:p>
         </p:txBody>
       </p:sp>
@@ -3736,13 +3716,49 @@
               </a:spcAft>
             </a:pPr>
             <a:r>
-              <a:rPr sz="1700" b="0">
-                <a:solidFill>
-                  <a:srgbClr val="2C3E50"/>
-                </a:solidFill>
-                <a:latin typeface="Calibri"/>
-              </a:rPr>
-              <a:t>•  Cláusula de Horn: a lo sumo un literal positivo.  (¬P ∨ ¬Q ∨ R)  ≡  (P ∧ Q → R).</a:t>
+              <a:rPr sz="1700" b="0" dirty="0">
+                <a:solidFill>
+                  <a:srgbClr val="2C3E50"/>
+                </a:solidFill>
+                <a:latin typeface="Calibri"/>
+              </a:rPr>
+              <a:t>•  </a:t>
+            </a:r>
+            <a:r>
+              <a:rPr sz="1700" b="0" dirty="0" err="1">
+                <a:solidFill>
+                  <a:srgbClr val="2C3E50"/>
+                </a:solidFill>
+                <a:latin typeface="Calibri"/>
+              </a:rPr>
+              <a:t>Cláusula</a:t>
+            </a:r>
+            <a:r>
+              <a:rPr sz="1700" b="0" dirty="0">
+                <a:solidFill>
+                  <a:srgbClr val="2C3E50"/>
+                </a:solidFill>
+                <a:latin typeface="Calibri"/>
+              </a:rPr>
+              <a:t> de Horn: a lo sumo un literal </a:t>
+            </a:r>
+            <a:r>
+              <a:rPr sz="1700" b="0" dirty="0" err="1">
+                <a:solidFill>
+                  <a:srgbClr val="2C3E50"/>
+                </a:solidFill>
+                <a:latin typeface="Calibri"/>
+              </a:rPr>
+              <a:t>positivo</a:t>
+            </a:r>
+            <a:r>
+              <a:rPr sz="1700" b="0" dirty="0">
+                <a:solidFill>
+                  <a:srgbClr val="2C3E50"/>
+                </a:solidFill>
+                <a:latin typeface="Calibri"/>
+              </a:rPr>
+              <a:t>.  (¬P ∨ ¬Q ∨ R)  ≡  (P ∧ Q → R).</a:t>
             </a:r>
           </a:p>
           <a:p>
@@ -3752,13 +3768,85 @@
               </a:spcAft>
             </a:pPr>
             <a:r>
-              <a:rPr sz="1700" b="0">
-                <a:solidFill>
-                  <a:srgbClr val="2C3E50"/>
-                </a:solidFill>
-                <a:latin typeface="Calibri"/>
-              </a:rPr>
-              <a:t>•  Definite clause: exactamente un literal positivo (una implicación con cabeza).</a:t>
+              <a:rPr sz="1700" b="0" dirty="0">
+                <a:solidFill>
+                  <a:srgbClr val="2C3E50"/>
+                </a:solidFill>
+                <a:latin typeface="Calibri"/>
+              </a:rPr>
+              <a:t>•  Definite clause: </a:t>
+            </a:r>
+            <a:r>
+              <a:rPr sz="1700" b="0" dirty="0" err="1">
+                <a:solidFill>
+                  <a:srgbClr val="2C3E50"/>
+                </a:solidFill>
+                <a:latin typeface="Calibri"/>
+              </a:rPr>
+              <a:t>exactamente</a:t>
+            </a:r>
+            <a:r>
+              <a:rPr sz="1700" b="0" dirty="0">
+                <a:solidFill>
+                  <a:srgbClr val="2C3E50"/>
+                </a:solidFill>
+                <a:latin typeface="Calibri"/>
+              </a:rPr>
+              <a:t> un literal </a:t>
+            </a:r>
+            <a:r>
+              <a:rPr sz="1700" b="0" dirty="0" err="1">
+                <a:solidFill>
+                  <a:srgbClr val="2C3E50"/>
+                </a:solidFill>
+                <a:latin typeface="Calibri"/>
+              </a:rPr>
+              <a:t>positivo</a:t>
+            </a:r>
+            <a:r>
+              <a:rPr sz="1700" b="0" dirty="0">
+                <a:solidFill>
+                  <a:srgbClr val="2C3E50"/>
+                </a:solidFill>
+                <a:latin typeface="Calibri"/>
+              </a:rPr>
+              <a:t> (</a:t>
+            </a:r>
+            <a:r>
+              <a:rPr sz="1700" b="0" dirty="0" err="1">
+                <a:solidFill>
+                  <a:srgbClr val="2C3E50"/>
+                </a:solidFill>
+                <a:latin typeface="Calibri"/>
+              </a:rPr>
+              <a:t>una</a:t>
+            </a:r>
+            <a:r>
+              <a:rPr sz="1700" b="0" dirty="0">
+                <a:solidFill>
+                  <a:srgbClr val="2C3E50"/>
+                </a:solidFill>
+                <a:latin typeface="Calibri"/>
+              </a:rPr>
+              <a:t> </a:t>
+            </a:r>
+            <a:r>
+              <a:rPr sz="1700" b="0" dirty="0" err="1">
+                <a:solidFill>
+                  <a:srgbClr val="2C3E50"/>
+                </a:solidFill>
+                <a:latin typeface="Calibri"/>
+              </a:rPr>
+              <a:t>implicación</a:t>
+            </a:r>
+            <a:r>
+              <a:rPr sz="1700" b="0" dirty="0">
+                <a:solidFill>
+                  <a:srgbClr val="2C3E50"/>
+                </a:solidFill>
+                <a:latin typeface="Calibri"/>
+              </a:rPr>
+              <a:t> con cabeza).</a:t>
             </a:r>
           </a:p>
           <a:p>
@@ -3768,13 +3856,49 @@
               </a:spcAft>
             </a:pPr>
             <a:r>
-              <a:rPr sz="1700" b="0">
-                <a:solidFill>
-                  <a:srgbClr val="2C3E50"/>
-                </a:solidFill>
-                <a:latin typeface="Calibri"/>
-              </a:rPr>
-              <a:t>•  Hecho: definite clause sin premisas, p. ej. Gato(Tom).</a:t>
+              <a:rPr sz="1700" b="0" dirty="0">
+                <a:solidFill>
+                  <a:srgbClr val="2C3E50"/>
+                </a:solidFill>
+                <a:latin typeface="Calibri"/>
+              </a:rPr>
+              <a:t>•  Hecho: definite clause sin </a:t>
+            </a:r>
+            <a:r>
+              <a:rPr sz="1700" b="0" dirty="0" err="1">
+                <a:solidFill>
+                  <a:srgbClr val="2C3E50"/>
+                </a:solidFill>
+                <a:latin typeface="Calibri"/>
+              </a:rPr>
+              <a:t>premisas</a:t>
+            </a:r>
+            <a:r>
+              <a:rPr sz="1700" b="0" dirty="0">
+                <a:solidFill>
+                  <a:srgbClr val="2C3E50"/>
+                </a:solidFill>
+                <a:latin typeface="Calibri"/>
+              </a:rPr>
+              <a:t>, p. </a:t>
+            </a:r>
+            <a:r>
+              <a:rPr sz="1700" b="0" dirty="0" err="1">
+                <a:solidFill>
+                  <a:srgbClr val="2C3E50"/>
+                </a:solidFill>
+                <a:latin typeface="Calibri"/>
+              </a:rPr>
+              <a:t>ej</a:t>
+            </a:r>
+            <a:r>
+              <a:rPr sz="1700" b="0" dirty="0">
+                <a:solidFill>
+                  <a:srgbClr val="2C3E50"/>
+                </a:solidFill>
+                <a:latin typeface="Calibri"/>
+              </a:rPr>
+              <a:t>. Gato(Tom).</a:t>
             </a:r>
           </a:p>
           <a:p>
@@ -3784,13 +3908,103 @@
               </a:spcAft>
             </a:pPr>
             <a:r>
-              <a:rPr sz="1700" b="0">
-                <a:solidFill>
-                  <a:srgbClr val="2C3E50"/>
-                </a:solidFill>
-                <a:latin typeface="Calibri"/>
-              </a:rPr>
-              <a:t>•  La resolución general es potente pero cara. En Horn, modus ponens generalizado basta.</a:t>
+              <a:rPr sz="1700" b="0" dirty="0">
+                <a:solidFill>
+                  <a:srgbClr val="2C3E50"/>
+                </a:solidFill>
+                <a:latin typeface="Calibri"/>
+              </a:rPr>
+              <a:t>•  La </a:t>
+            </a:r>
+            <a:r>
+              <a:rPr sz="1700" b="0" dirty="0" err="1">
+                <a:solidFill>
+                  <a:srgbClr val="2C3E50"/>
+                </a:solidFill>
+                <a:latin typeface="Calibri"/>
+              </a:rPr>
+              <a:t>resolución</a:t>
+            </a:r>
+            <a:r>
+              <a:rPr sz="1700" b="0" dirty="0">
+                <a:solidFill>
+                  <a:srgbClr val="2C3E50"/>
+                </a:solidFill>
+                <a:latin typeface="Calibri"/>
+              </a:rPr>
+              <a:t> general es </a:t>
+            </a:r>
+            <a:r>
+              <a:rPr sz="1700" b="0" dirty="0" err="1">
+                <a:solidFill>
+                  <a:srgbClr val="2C3E50"/>
+                </a:solidFill>
+                <a:latin typeface="Calibri"/>
+              </a:rPr>
+              <a:t>potente</a:t>
+            </a:r>
+            <a:r>
+              <a:rPr sz="1700" b="0" dirty="0">
+                <a:solidFill>
+                  <a:srgbClr val="2C3E50"/>
+                </a:solidFill>
+                <a:latin typeface="Calibri"/>
+              </a:rPr>
+              <a:t> </a:t>
+            </a:r>
+            <a:r>
+              <a:rPr sz="1700" b="0" dirty="0" err="1">
+                <a:solidFill>
+                  <a:srgbClr val="2C3E50"/>
+                </a:solidFill>
+                <a:latin typeface="Calibri"/>
+              </a:rPr>
+              <a:t>pero</a:t>
+            </a:r>
+            <a:r>
+              <a:rPr sz="1700" b="0" dirty="0">
+                <a:solidFill>
+                  <a:srgbClr val="2C3E50"/>
+                </a:solidFill>
+                <a:latin typeface="Calibri"/>
+              </a:rPr>
+              <a:t> </a:t>
+            </a:r>
+            <a:r>
+              <a:rPr sz="1700" b="0" dirty="0" err="1">
+                <a:solidFill>
+                  <a:srgbClr val="2C3E50"/>
+                </a:solidFill>
+                <a:latin typeface="Calibri"/>
+              </a:rPr>
+              <a:t>cara</a:t>
+            </a:r>
+            <a:r>
+              <a:rPr sz="1700" b="0" dirty="0">
+                <a:solidFill>
+                  <a:srgbClr val="2C3E50"/>
+                </a:solidFill>
+                <a:latin typeface="Calibri"/>
+              </a:rPr>
+              <a:t>. En Horn, modus ponens </a:t>
+            </a:r>
+            <a:r>
+              <a:rPr sz="1700" b="0" dirty="0" err="1">
+                <a:solidFill>
+                  <a:srgbClr val="2C3E50"/>
+                </a:solidFill>
+                <a:latin typeface="Calibri"/>
+              </a:rPr>
+              <a:t>generalizado</a:t>
+            </a:r>
+            <a:r>
+              <a:rPr sz="1700" b="0" dirty="0">
+                <a:solidFill>
+                  <a:srgbClr val="2C3E50"/>
+                </a:solidFill>
+                <a:latin typeface="Calibri"/>
+              </a:rPr>
+              <a:t> basta.</a:t>
             </a:r>
           </a:p>
           <a:p>
@@ -3800,13 +4014,49 @@
               </a:spcAft>
             </a:pPr>
             <a:r>
-              <a:rPr sz="1700" b="0">
-                <a:solidFill>
-                  <a:srgbClr val="2C3E50"/>
-                </a:solidFill>
-                <a:latin typeface="Calibri"/>
-              </a:rPr>
-              <a:t>•  Forward y backward chaining operan solo sobre definite clauses.</a:t>
+              <a:rPr sz="1700" b="0" dirty="0">
+                <a:solidFill>
+                  <a:srgbClr val="2C3E50"/>
+                </a:solidFill>
+                <a:latin typeface="Calibri"/>
+              </a:rPr>
+              <a:t>•  Forward y backward chaining </a:t>
+            </a:r>
+            <a:r>
+              <a:rPr sz="1700" b="0" dirty="0" err="1">
+                <a:solidFill>
+                  <a:srgbClr val="2C3E50"/>
+                </a:solidFill>
+                <a:latin typeface="Calibri"/>
+              </a:rPr>
+              <a:t>operan</a:t>
+            </a:r>
+            <a:r>
+              <a:rPr sz="1700" b="0" dirty="0">
+                <a:solidFill>
+                  <a:srgbClr val="2C3E50"/>
+                </a:solidFill>
+                <a:latin typeface="Calibri"/>
+              </a:rPr>
+              <a:t> solo </a:t>
+            </a:r>
+            <a:r>
+              <a:rPr sz="1700" b="0" dirty="0" err="1">
+                <a:solidFill>
+                  <a:srgbClr val="2C3E50"/>
+                </a:solidFill>
+                <a:latin typeface="Calibri"/>
+              </a:rPr>
+              <a:t>sobre</a:t>
+            </a:r>
+            <a:r>
+              <a:rPr sz="1700" b="0" dirty="0">
+                <a:solidFill>
+                  <a:srgbClr val="2C3E50"/>
+                </a:solidFill>
+                <a:latin typeface="Calibri"/>
+              </a:rPr>
+              <a:t> definite clauses.</a:t>
             </a:r>
           </a:p>
         </p:txBody>
@@ -3820,7 +4070,7 @@
 </file>
 
 <file path=ppt/slides/slide11.xml><?xml version="1.0" encoding="utf-8"?>
-<p:sld xmlns:a="http://schemas.openxmlformats.org/drawingml/2006/main" xmlns:p="http://schemas.openxmlformats.org/presentationml/2006/main" xmlns:r="http://schemas.openxmlformats.org/officeDocument/2006/relationships">
+<p:sld xmlns:a="http://schemas.openxmlformats.org/drawingml/2006/main" xmlns:r="http://schemas.openxmlformats.org/officeDocument/2006/relationships" xmlns:p="http://schemas.openxmlformats.org/presentationml/2006/main">
   <p:cSld>
     <p:spTree>
       <p:nvGrpSpPr>
@@ -3828,7 +4078,14 @@
         <p:cNvGrpSpPr/>
         <p:nvPr/>
       </p:nvGrpSpPr>
-      <p:grpSpPr/>
+      <p:grpSpPr>
+        <a:xfrm>
+          <a:off x="0" y="0"/>
+          <a:ext cx="0" cy="0"/>
+          <a:chOff x="0" y="0"/>
+          <a:chExt cx="0" cy="0"/>
+        </a:xfrm>
+      </p:grpSpPr>
       <p:sp>
         <p:nvSpPr>
           <p:cNvPr id="2" name="Rectangle 1"/>
@@ -3869,6 +4126,7 @@
           <a:lstStyle/>
           <a:p>
             <a:pPr algn="ctr"/>
+            <a:endParaRPr/>
           </a:p>
         </p:txBody>
       </p:sp>
@@ -3912,6 +4170,7 @@
           <a:lstStyle/>
           <a:p>
             <a:pPr algn="ctr"/>
+            <a:endParaRPr/>
           </a:p>
         </p:txBody>
       </p:sp>
@@ -3955,6 +4214,7 @@
           <a:lstStyle/>
           <a:p>
             <a:pPr algn="ctr"/>
+            <a:endParaRPr/>
           </a:p>
         </p:txBody>
       </p:sp>
@@ -3989,41 +4249,6 @@
                 <a:latin typeface="Calibri"/>
               </a:rPr>
               <a:t>Curso de Inteligencia Artificial  ·  Razonamiento lógico</a:t>
-            </a:r>
-          </a:p>
-        </p:txBody>
-      </p:sp>
-      <p:sp>
-        <p:nvSpPr>
-          <p:cNvPr id="6" name="TextBox 5"/>
-          <p:cNvSpPr txBox="1"/>
-          <p:nvPr/>
-        </p:nvSpPr>
-        <p:spPr>
-          <a:xfrm>
-            <a:off x="10378440" y="6528816"/>
-            <a:ext cx="1371600" cy="292608"/>
-          </a:xfrm>
-          <a:prstGeom prst="rect">
-            <a:avLst/>
-          </a:prstGeom>
-          <a:noFill/>
-        </p:spPr>
-        <p:txBody>
-          <a:bodyPr wrap="square" anchor="ctr">
-            <a:spAutoFit/>
-          </a:bodyPr>
-          <a:lstStyle/>
-          <a:p>
-            <a:pPr algn="r"/>
-            <a:r>
-              <a:rPr sz="1100" b="0">
-                <a:solidFill>
-                  <a:srgbClr val="FFFFFF"/>
-                </a:solidFill>
-                <a:latin typeface="Calibri"/>
-              </a:rPr>
-              <a:t>11 / 17</a:t>
             </a:r>
           </a:p>
         </p:txBody>
@@ -4103,6 +4328,7 @@
           <a:lstStyle/>
           <a:p>
             <a:pPr algn="ctr"/>
+            <a:endParaRPr/>
           </a:p>
         </p:txBody>
       </p:sp>
@@ -4185,6 +4411,7 @@
           <a:lstStyle/>
           <a:p>
             <a:pPr algn="ctr"/>
+            <a:endParaRPr/>
           </a:p>
         </p:txBody>
       </p:sp>
@@ -4330,15 +4557,12 @@
                 <a:spcPts val="1000"/>
               </a:spcAft>
             </a:pPr>
-            <a:r>
-              <a:rPr sz="1700" b="0">
-                <a:solidFill>
-                  <a:srgbClr val="2C3E50"/>
-                </a:solidFill>
-                <a:latin typeface="Calibri"/>
-              </a:rPr>
-              <a:t/>
-            </a:r>
+            <a:endParaRPr sz="1700" b="0">
+              <a:solidFill>
+                <a:srgbClr val="2C3E50"/>
+              </a:solidFill>
+              <a:latin typeface="Calibri"/>
+            </a:endParaRPr>
           </a:p>
           <a:p>
             <a:pPr>
@@ -4402,6 +4626,7 @@
           <a:lstStyle/>
           <a:p>
             <a:pPr algn="ctr"/>
+            <a:endParaRPr/>
           </a:p>
         </p:txBody>
       </p:sp>
@@ -4486,7 +4711,7 @@
 </file>
 
 <file path=ppt/slides/slide12.xml><?xml version="1.0" encoding="utf-8"?>
-<p:sld xmlns:a="http://schemas.openxmlformats.org/drawingml/2006/main" xmlns:p="http://schemas.openxmlformats.org/presentationml/2006/main" xmlns:r="http://schemas.openxmlformats.org/officeDocument/2006/relationships">
+<p:sld xmlns:a="http://schemas.openxmlformats.org/drawingml/2006/main" xmlns:r="http://schemas.openxmlformats.org/officeDocument/2006/relationships" xmlns:p="http://schemas.openxmlformats.org/presentationml/2006/main">
   <p:cSld>
     <p:spTree>
       <p:nvGrpSpPr>
@@ -4494,7 +4719,14 @@
         <p:cNvGrpSpPr/>
         <p:nvPr/>
       </p:nvGrpSpPr>
-      <p:grpSpPr/>
+      <p:grpSpPr>
+        <a:xfrm>
+          <a:off x="0" y="0"/>
+          <a:ext cx="0" cy="0"/>
+          <a:chOff x="0" y="0"/>
+          <a:chExt cx="0" cy="0"/>
+        </a:xfrm>
+      </p:grpSpPr>
       <p:sp>
         <p:nvSpPr>
           <p:cNvPr id="2" name="Rectangle 1"/>
@@ -4535,6 +4767,7 @@
           <a:lstStyle/>
           <a:p>
             <a:pPr algn="ctr"/>
+            <a:endParaRPr/>
           </a:p>
         </p:txBody>
       </p:sp>
@@ -4578,6 +4811,7 @@
           <a:lstStyle/>
           <a:p>
             <a:pPr algn="ctr"/>
+            <a:endParaRPr/>
           </a:p>
         </p:txBody>
       </p:sp>
@@ -4621,6 +4855,7 @@
           <a:lstStyle/>
           <a:p>
             <a:pPr algn="ctr"/>
+            <a:endParaRPr/>
           </a:p>
         </p:txBody>
       </p:sp>
@@ -4655,41 +4890,6 @@
                 <a:latin typeface="Calibri"/>
               </a:rPr>
               <a:t>Curso de Inteligencia Artificial  ·  Razonamiento lógico</a:t>
-            </a:r>
-          </a:p>
-        </p:txBody>
-      </p:sp>
-      <p:sp>
-        <p:nvSpPr>
-          <p:cNvPr id="6" name="TextBox 5"/>
-          <p:cNvSpPr txBox="1"/>
-          <p:nvPr/>
-        </p:nvSpPr>
-        <p:spPr>
-          <a:xfrm>
-            <a:off x="10378440" y="6528816"/>
-            <a:ext cx="1371600" cy="292608"/>
-          </a:xfrm>
-          <a:prstGeom prst="rect">
-            <a:avLst/>
-          </a:prstGeom>
-          <a:noFill/>
-        </p:spPr>
-        <p:txBody>
-          <a:bodyPr wrap="square" anchor="ctr">
-            <a:spAutoFit/>
-          </a:bodyPr>
-          <a:lstStyle/>
-          <a:p>
-            <a:pPr algn="r"/>
-            <a:r>
-              <a:rPr sz="1100" b="0">
-                <a:solidFill>
-                  <a:srgbClr val="FFFFFF"/>
-                </a:solidFill>
-                <a:latin typeface="Calibri"/>
-              </a:rPr>
-              <a:t>12 / 17</a:t>
             </a:r>
           </a:p>
         </p:txBody>
@@ -4769,6 +4969,7 @@
           <a:lstStyle/>
           <a:p>
             <a:pPr algn="ctr"/>
+            <a:endParaRPr/>
           </a:p>
         </p:txBody>
       </p:sp>
@@ -4851,6 +5052,7 @@
           <a:lstStyle/>
           <a:p>
             <a:pPr algn="ctr"/>
+            <a:endParaRPr/>
           </a:p>
         </p:txBody>
       </p:sp>
@@ -4933,6 +5135,7 @@
           <a:lstStyle/>
           <a:p>
             <a:pPr algn="ctr"/>
+            <a:endParaRPr/>
           </a:p>
         </p:txBody>
       </p:sp>
@@ -5085,6 +5288,7 @@
           <a:lstStyle/>
           <a:p>
             <a:pPr algn="ctr"/>
+            <a:endParaRPr/>
           </a:p>
         </p:txBody>
       </p:sp>
@@ -5237,6 +5441,7 @@
           <a:lstStyle/>
           <a:p>
             <a:pPr algn="ctr"/>
+            <a:endParaRPr/>
           </a:p>
         </p:txBody>
       </p:sp>
@@ -5389,6 +5594,7 @@
           <a:lstStyle/>
           <a:p>
             <a:pPr algn="ctr"/>
+            <a:endParaRPr/>
           </a:p>
         </p:txBody>
       </p:sp>
@@ -5541,6 +5747,7 @@
           <a:lstStyle/>
           <a:p>
             <a:pPr algn="ctr"/>
+            <a:endParaRPr/>
           </a:p>
         </p:txBody>
       </p:sp>
@@ -5693,6 +5900,7 @@
           <a:lstStyle/>
           <a:p>
             <a:pPr algn="ctr"/>
+            <a:endParaRPr/>
           </a:p>
         </p:txBody>
       </p:sp>
@@ -5810,7 +6018,7 @@
 </file>
 
 <file path=ppt/slides/slide13.xml><?xml version="1.0" encoding="utf-8"?>
-<p:sld xmlns:a="http://schemas.openxmlformats.org/drawingml/2006/main" xmlns:p="http://schemas.openxmlformats.org/presentationml/2006/main" xmlns:r="http://schemas.openxmlformats.org/officeDocument/2006/relationships">
+<p:sld xmlns:a="http://schemas.openxmlformats.org/drawingml/2006/main" xmlns:r="http://schemas.openxmlformats.org/officeDocument/2006/relationships" xmlns:p="http://schemas.openxmlformats.org/presentationml/2006/main">
   <p:cSld>
     <p:spTree>
       <p:nvGrpSpPr>
@@ -5818,7 +6026,14 @@
         <p:cNvGrpSpPr/>
         <p:nvPr/>
       </p:nvGrpSpPr>
-      <p:grpSpPr/>
+      <p:grpSpPr>
+        <a:xfrm>
+          <a:off x="0" y="0"/>
+          <a:ext cx="0" cy="0"/>
+          <a:chOff x="0" y="0"/>
+          <a:chExt cx="0" cy="0"/>
+        </a:xfrm>
+      </p:grpSpPr>
       <p:sp>
         <p:nvSpPr>
           <p:cNvPr id="2" name="Rectangle 1"/>
@@ -5859,6 +6074,7 @@
           <a:lstStyle/>
           <a:p>
             <a:pPr algn="ctr"/>
+            <a:endParaRPr/>
           </a:p>
         </p:txBody>
       </p:sp>
@@ -5902,6 +6118,7 @@
           <a:lstStyle/>
           <a:p>
             <a:pPr algn="ctr"/>
+            <a:endParaRPr/>
           </a:p>
         </p:txBody>
       </p:sp>
@@ -5945,6 +6162,7 @@
           <a:lstStyle/>
           <a:p>
             <a:pPr algn="ctr"/>
+            <a:endParaRPr/>
           </a:p>
         </p:txBody>
       </p:sp>
@@ -5979,41 +6197,6 @@
                 <a:latin typeface="Calibri"/>
               </a:rPr>
               <a:t>Curso de Inteligencia Artificial  ·  Razonamiento lógico</a:t>
-            </a:r>
-          </a:p>
-        </p:txBody>
-      </p:sp>
-      <p:sp>
-        <p:nvSpPr>
-          <p:cNvPr id="6" name="TextBox 5"/>
-          <p:cNvSpPr txBox="1"/>
-          <p:nvPr/>
-        </p:nvSpPr>
-        <p:spPr>
-          <a:xfrm>
-            <a:off x="10378440" y="6528816"/>
-            <a:ext cx="1371600" cy="292608"/>
-          </a:xfrm>
-          <a:prstGeom prst="rect">
-            <a:avLst/>
-          </a:prstGeom>
-          <a:noFill/>
-        </p:spPr>
-        <p:txBody>
-          <a:bodyPr wrap="square" anchor="ctr">
-            <a:spAutoFit/>
-          </a:bodyPr>
-          <a:lstStyle/>
-          <a:p>
-            <a:pPr algn="r"/>
-            <a:r>
-              <a:rPr sz="1100" b="0">
-                <a:solidFill>
-                  <a:srgbClr val="FFFFFF"/>
-                </a:solidFill>
-                <a:latin typeface="Calibri"/>
-              </a:rPr>
-              <a:t>13 / 17</a:t>
             </a:r>
           </a:p>
         </p:txBody>
@@ -6093,6 +6276,7 @@
           <a:lstStyle/>
           <a:p>
             <a:pPr algn="ctr"/>
+            <a:endParaRPr/>
           </a:p>
         </p:txBody>
       </p:sp>
@@ -6175,6 +6359,7 @@
           <a:lstStyle/>
           <a:p>
             <a:pPr algn="ctr"/>
+            <a:endParaRPr/>
           </a:p>
         </p:txBody>
       </p:sp>
@@ -6257,6 +6442,7 @@
           <a:lstStyle/>
           <a:p>
             <a:pPr algn="ctr"/>
+            <a:endParaRPr/>
           </a:p>
         </p:txBody>
       </p:sp>
@@ -6410,6 +6596,7 @@
           <a:lstStyle/>
           <a:p>
             <a:pPr algn="ctr"/>
+            <a:endParaRPr/>
           </a:p>
         </p:txBody>
       </p:sp>
@@ -6563,6 +6750,7 @@
           <a:lstStyle/>
           <a:p>
             <a:pPr algn="ctr"/>
+            <a:endParaRPr/>
           </a:p>
         </p:txBody>
       </p:sp>
@@ -6716,6 +6904,7 @@
           <a:lstStyle/>
           <a:p>
             <a:pPr algn="ctr"/>
+            <a:endParaRPr/>
           </a:p>
         </p:txBody>
       </p:sp>
@@ -6868,6 +7057,7 @@
           <a:lstStyle/>
           <a:p>
             <a:pPr algn="ctr"/>
+            <a:endParaRPr/>
           </a:p>
         </p:txBody>
       </p:sp>
@@ -7021,6 +7211,7 @@
           <a:lstStyle/>
           <a:p>
             <a:pPr algn="ctr"/>
+            <a:endParaRPr/>
           </a:p>
         </p:txBody>
       </p:sp>
@@ -7139,7 +7330,7 @@
 </file>
 
 <file path=ppt/slides/slide14.xml><?xml version="1.0" encoding="utf-8"?>
-<p:sld xmlns:a="http://schemas.openxmlformats.org/drawingml/2006/main" xmlns:p="http://schemas.openxmlformats.org/presentationml/2006/main" xmlns:r="http://schemas.openxmlformats.org/officeDocument/2006/relationships">
+<p:sld xmlns:a="http://schemas.openxmlformats.org/drawingml/2006/main" xmlns:r="http://schemas.openxmlformats.org/officeDocument/2006/relationships" xmlns:p="http://schemas.openxmlformats.org/presentationml/2006/main">
   <p:cSld>
     <p:spTree>
       <p:nvGrpSpPr>
@@ -7147,7 +7338,14 @@
         <p:cNvGrpSpPr/>
         <p:nvPr/>
       </p:nvGrpSpPr>
-      <p:grpSpPr/>
+      <p:grpSpPr>
+        <a:xfrm>
+          <a:off x="0" y="0"/>
+          <a:ext cx="0" cy="0"/>
+          <a:chOff x="0" y="0"/>
+          <a:chExt cx="0" cy="0"/>
+        </a:xfrm>
+      </p:grpSpPr>
       <p:sp>
         <p:nvSpPr>
           <p:cNvPr id="2" name="Rectangle 1"/>
@@ -7188,6 +7386,7 @@
           <a:lstStyle/>
           <a:p>
             <a:pPr algn="ctr"/>
+            <a:endParaRPr/>
           </a:p>
         </p:txBody>
       </p:sp>
@@ -7231,6 +7430,7 @@
           <a:lstStyle/>
           <a:p>
             <a:pPr algn="ctr"/>
+            <a:endParaRPr/>
           </a:p>
         </p:txBody>
       </p:sp>
@@ -7274,6 +7474,7 @@
           <a:lstStyle/>
           <a:p>
             <a:pPr algn="ctr"/>
+            <a:endParaRPr/>
           </a:p>
         </p:txBody>
       </p:sp>
@@ -7308,41 +7509,6 @@
                 <a:latin typeface="Calibri"/>
               </a:rPr>
               <a:t>Curso de Inteligencia Artificial  ·  Razonamiento lógico</a:t>
-            </a:r>
-          </a:p>
-        </p:txBody>
-      </p:sp>
-      <p:sp>
-        <p:nvSpPr>
-          <p:cNvPr id="6" name="TextBox 5"/>
-          <p:cNvSpPr txBox="1"/>
-          <p:nvPr/>
-        </p:nvSpPr>
-        <p:spPr>
-          <a:xfrm>
-            <a:off x="10378440" y="6528816"/>
-            <a:ext cx="1371600" cy="292608"/>
-          </a:xfrm>
-          <a:prstGeom prst="rect">
-            <a:avLst/>
-          </a:prstGeom>
-          <a:noFill/>
-        </p:spPr>
-        <p:txBody>
-          <a:bodyPr wrap="square" anchor="ctr">
-            <a:spAutoFit/>
-          </a:bodyPr>
-          <a:lstStyle/>
-          <a:p>
-            <a:pPr algn="r"/>
-            <a:r>
-              <a:rPr sz="1100" b="0">
-                <a:solidFill>
-                  <a:srgbClr val="FFFFFF"/>
-                </a:solidFill>
-                <a:latin typeface="Calibri"/>
-              </a:rPr>
-              <a:t>14 / 17</a:t>
             </a:r>
           </a:p>
         </p:txBody>
@@ -7422,6 +7588,7 @@
           <a:lstStyle/>
           <a:p>
             <a:pPr algn="ctr"/>
+            <a:endParaRPr/>
           </a:p>
         </p:txBody>
       </p:sp>
@@ -7504,6 +7671,7 @@
           <a:lstStyle/>
           <a:p>
             <a:pPr algn="ctr"/>
+            <a:endParaRPr/>
           </a:p>
         </p:txBody>
       </p:sp>
@@ -7724,6 +7892,7 @@
           <a:lstStyle/>
           <a:p>
             <a:pPr algn="ctr"/>
+            <a:endParaRPr/>
           </a:p>
         </p:txBody>
       </p:sp>
@@ -7909,7 +8078,7 @@
 </file>
 
 <file path=ppt/slides/slide15.xml><?xml version="1.0" encoding="utf-8"?>
-<p:sld xmlns:a="http://schemas.openxmlformats.org/drawingml/2006/main" xmlns:p="http://schemas.openxmlformats.org/presentationml/2006/main" xmlns:r="http://schemas.openxmlformats.org/officeDocument/2006/relationships">
+<p:sld xmlns:a="http://schemas.openxmlformats.org/drawingml/2006/main" xmlns:r="http://schemas.openxmlformats.org/officeDocument/2006/relationships" xmlns:p="http://schemas.openxmlformats.org/presentationml/2006/main">
   <p:cSld>
     <p:spTree>
       <p:nvGrpSpPr>
@@ -7917,7 +8086,14 @@
         <p:cNvGrpSpPr/>
         <p:nvPr/>
       </p:nvGrpSpPr>
-      <p:grpSpPr/>
+      <p:grpSpPr>
+        <a:xfrm>
+          <a:off x="0" y="0"/>
+          <a:ext cx="0" cy="0"/>
+          <a:chOff x="0" y="0"/>
+          <a:chExt cx="0" cy="0"/>
+        </a:xfrm>
+      </p:grpSpPr>
       <p:sp>
         <p:nvSpPr>
           <p:cNvPr id="2" name="Rectangle 1"/>
@@ -7958,6 +8134,7 @@
           <a:lstStyle/>
           <a:p>
             <a:pPr algn="ctr"/>
+            <a:endParaRPr/>
           </a:p>
         </p:txBody>
       </p:sp>
@@ -8001,6 +8178,7 @@
           <a:lstStyle/>
           <a:p>
             <a:pPr algn="ctr"/>
+            <a:endParaRPr/>
           </a:p>
         </p:txBody>
       </p:sp>
@@ -8044,6 +8222,7 @@
           <a:lstStyle/>
           <a:p>
             <a:pPr algn="ctr"/>
+            <a:endParaRPr/>
           </a:p>
         </p:txBody>
       </p:sp>
@@ -8078,41 +8257,6 @@
                 <a:latin typeface="Calibri"/>
               </a:rPr>
               <a:t>Curso de Inteligencia Artificial  ·  Razonamiento lógico</a:t>
-            </a:r>
-          </a:p>
-        </p:txBody>
-      </p:sp>
-      <p:sp>
-        <p:nvSpPr>
-          <p:cNvPr id="6" name="TextBox 5"/>
-          <p:cNvSpPr txBox="1"/>
-          <p:nvPr/>
-        </p:nvSpPr>
-        <p:spPr>
-          <a:xfrm>
-            <a:off x="10378440" y="6528816"/>
-            <a:ext cx="1371600" cy="292608"/>
-          </a:xfrm>
-          <a:prstGeom prst="rect">
-            <a:avLst/>
-          </a:prstGeom>
-          <a:noFill/>
-        </p:spPr>
-        <p:txBody>
-          <a:bodyPr wrap="square" anchor="ctr">
-            <a:spAutoFit/>
-          </a:bodyPr>
-          <a:lstStyle/>
-          <a:p>
-            <a:pPr algn="r"/>
-            <a:r>
-              <a:rPr sz="1100" b="0">
-                <a:solidFill>
-                  <a:srgbClr val="FFFFFF"/>
-                </a:solidFill>
-                <a:latin typeface="Calibri"/>
-              </a:rPr>
-              <a:t>15 / 17</a:t>
             </a:r>
           </a:p>
         </p:txBody>
@@ -8192,6 +8336,7 @@
           <a:lstStyle/>
           <a:p>
             <a:pPr algn="ctr"/>
+            <a:endParaRPr/>
           </a:p>
         </p:txBody>
       </p:sp>
@@ -8239,6 +8384,7 @@
           <a:lstStyle/>
           <a:p>
             <a:pPr algn="ctr"/>
+            <a:endParaRPr/>
           </a:p>
         </p:txBody>
       </p:sp>
@@ -8391,6 +8537,7 @@
           <a:lstStyle/>
           <a:p>
             <a:pPr algn="ctr"/>
+            <a:endParaRPr/>
           </a:p>
         </p:txBody>
       </p:sp>
@@ -8543,6 +8690,7 @@
           <a:lstStyle/>
           <a:p>
             <a:pPr algn="ctr"/>
+            <a:endParaRPr/>
           </a:p>
         </p:txBody>
       </p:sp>
@@ -8660,7 +8808,7 @@
 </file>
 
 <file path=ppt/slides/slide16.xml><?xml version="1.0" encoding="utf-8"?>
-<p:sld xmlns:a="http://schemas.openxmlformats.org/drawingml/2006/main" xmlns:p="http://schemas.openxmlformats.org/presentationml/2006/main" xmlns:r="http://schemas.openxmlformats.org/officeDocument/2006/relationships">
+<p:sld xmlns:a="http://schemas.openxmlformats.org/drawingml/2006/main" xmlns:r="http://schemas.openxmlformats.org/officeDocument/2006/relationships" xmlns:p="http://schemas.openxmlformats.org/presentationml/2006/main">
   <p:cSld>
     <p:spTree>
       <p:nvGrpSpPr>
@@ -8668,7 +8816,14 @@
         <p:cNvGrpSpPr/>
         <p:nvPr/>
       </p:nvGrpSpPr>
-      <p:grpSpPr/>
+      <p:grpSpPr>
+        <a:xfrm>
+          <a:off x="0" y="0"/>
+          <a:ext cx="0" cy="0"/>
+          <a:chOff x="0" y="0"/>
+          <a:chExt cx="0" cy="0"/>
+        </a:xfrm>
+      </p:grpSpPr>
       <p:sp>
         <p:nvSpPr>
           <p:cNvPr id="2" name="Rectangle 1"/>
@@ -8709,6 +8864,7 @@
           <a:lstStyle/>
           <a:p>
             <a:pPr algn="ctr"/>
+            <a:endParaRPr/>
           </a:p>
         </p:txBody>
       </p:sp>
@@ -8752,6 +8908,7 @@
           <a:lstStyle/>
           <a:p>
             <a:pPr algn="ctr"/>
+            <a:endParaRPr/>
           </a:p>
         </p:txBody>
       </p:sp>
@@ -8795,6 +8952,7 @@
           <a:lstStyle/>
           <a:p>
             <a:pPr algn="ctr"/>
+            <a:endParaRPr/>
           </a:p>
         </p:txBody>
       </p:sp>
@@ -8835,14 +8993,14 @@
       </p:sp>
       <p:sp>
         <p:nvSpPr>
-          <p:cNvPr id="6" name="TextBox 5"/>
+          <p:cNvPr id="7" name="TextBox 6"/>
           <p:cNvSpPr txBox="1"/>
           <p:nvPr/>
         </p:nvSpPr>
         <p:spPr>
           <a:xfrm>
-            <a:off x="10378440" y="6528816"/>
-            <a:ext cx="1371600" cy="292608"/>
+            <a:off x="502920" y="245882"/>
+            <a:ext cx="11155680" cy="523220"/>
           </a:xfrm>
           <a:prstGeom prst="rect">
             <a:avLst/>
@@ -8855,51 +9013,22 @@
           </a:bodyPr>
           <a:lstStyle/>
           <a:p>
-            <a:pPr algn="r"/>
-            <a:r>
-              <a:rPr sz="1100" b="0">
-                <a:solidFill>
-                  <a:srgbClr val="FFFFFF"/>
-                </a:solidFill>
-                <a:latin typeface="Calibri"/>
-              </a:rPr>
-              <a:t>16 / 17</a:t>
-            </a:r>
-          </a:p>
-        </p:txBody>
-      </p:sp>
-      <p:sp>
-        <p:nvSpPr>
-          <p:cNvPr id="7" name="TextBox 6"/>
-          <p:cNvSpPr txBox="1"/>
-          <p:nvPr/>
-        </p:nvSpPr>
-        <p:spPr>
-          <a:xfrm>
-            <a:off x="502920" y="256032"/>
-            <a:ext cx="11155680" cy="502920"/>
-          </a:xfrm>
-          <a:prstGeom prst="rect">
-            <a:avLst/>
-          </a:prstGeom>
-          <a:noFill/>
-        </p:spPr>
-        <p:txBody>
-          <a:bodyPr wrap="square" anchor="ctr">
-            <a:spAutoFit/>
-          </a:bodyPr>
-          <a:lstStyle/>
-          <a:p>
             <a:pPr algn="l"/>
             <a:r>
-              <a:rPr sz="2800" b="1">
+              <a:rPr lang="es-419" sz="2800" b="1" dirty="0">
                 <a:solidFill>
                   <a:srgbClr val="0F2C59"/>
                 </a:solidFill>
                 <a:latin typeface="Calibri"/>
               </a:rPr>
-              <a:t>Para llevar</a:t>
-            </a:r>
+              <a:t>Resumen</a:t>
+            </a:r>
+            <a:endParaRPr sz="2800" b="1" dirty="0">
+              <a:solidFill>
+                <a:srgbClr val="0F2C59"/>
+              </a:solidFill>
+              <a:latin typeface="Calibri"/>
+            </a:endParaRPr>
           </a:p>
         </p:txBody>
       </p:sp>
@@ -8943,6 +9072,7 @@
           <a:lstStyle/>
           <a:p>
             <a:pPr algn="ctr"/>
+            <a:endParaRPr/>
           </a:p>
         </p:txBody>
       </p:sp>
@@ -8990,6 +9120,7 @@
           <a:lstStyle/>
           <a:p>
             <a:pPr algn="ctr"/>
+            <a:endParaRPr/>
           </a:p>
         </p:txBody>
       </p:sp>
@@ -9092,909 +9223,6 @@
                 <a:latin typeface="Calibri"/>
               </a:rPr>
               <a:t>•  BC recorre la KB tirando de la meta (Mortal(Tom) no necesita a Felix ni a Maulla).</a:t>
-            </a:r>
-          </a:p>
-        </p:txBody>
-      </p:sp>
-    </p:spTree>
-  </p:cSld>
-  <p:clrMapOvr>
-    <a:masterClrMapping/>
-  </p:clrMapOvr>
-</p:sld>
-</file>
-
-<file path=ppt/slides/slide17.xml><?xml version="1.0" encoding="utf-8"?>
-<p:sld xmlns:a="http://schemas.openxmlformats.org/drawingml/2006/main" xmlns:p="http://schemas.openxmlformats.org/presentationml/2006/main" xmlns:r="http://schemas.openxmlformats.org/officeDocument/2006/relationships">
-  <p:cSld>
-    <p:spTree>
-      <p:nvGrpSpPr>
-        <p:cNvPr id="1" name=""/>
-        <p:cNvGrpSpPr/>
-        <p:nvPr/>
-      </p:nvGrpSpPr>
-      <p:grpSpPr/>
-      <p:sp>
-        <p:nvSpPr>
-          <p:cNvPr id="2" name="Rectangle 1"/>
-          <p:cNvSpPr/>
-          <p:nvPr/>
-        </p:nvSpPr>
-        <p:spPr>
-          <a:xfrm>
-            <a:off x="0" y="0"/>
-            <a:ext cx="12191999" cy="6858000"/>
-          </a:xfrm>
-          <a:prstGeom prst="rect">
-            <a:avLst/>
-          </a:prstGeom>
-          <a:solidFill>
-            <a:srgbClr val="FFFFFF"/>
-          </a:solidFill>
-          <a:ln>
-            <a:noFill/>
-          </a:ln>
-        </p:spPr>
-        <p:style>
-          <a:lnRef idx="1">
-            <a:schemeClr val="accent1"/>
-          </a:lnRef>
-          <a:fillRef idx="3">
-            <a:schemeClr val="accent1"/>
-          </a:fillRef>
-          <a:effectRef idx="2">
-            <a:schemeClr val="accent1"/>
-          </a:effectRef>
-          <a:fontRef idx="minor">
-            <a:schemeClr val="lt1"/>
-          </a:fontRef>
-        </p:style>
-        <p:txBody>
-          <a:bodyPr rtlCol="0" anchor="ctr"/>
-          <a:lstStyle/>
-          <a:p>
-            <a:pPr algn="ctr"/>
-          </a:p>
-        </p:txBody>
-      </p:sp>
-      <p:sp>
-        <p:nvSpPr>
-          <p:cNvPr id="3" name="Rectangle 2"/>
-          <p:cNvSpPr/>
-          <p:nvPr/>
-        </p:nvSpPr>
-        <p:spPr>
-          <a:xfrm>
-            <a:off x="0" y="0"/>
-            <a:ext cx="109728" cy="6858000"/>
-          </a:xfrm>
-          <a:prstGeom prst="rect">
-            <a:avLst/>
-          </a:prstGeom>
-          <a:solidFill>
-            <a:srgbClr val="E8B93A"/>
-          </a:solidFill>
-          <a:ln>
-            <a:noFill/>
-          </a:ln>
-        </p:spPr>
-        <p:style>
-          <a:lnRef idx="1">
-            <a:schemeClr val="accent1"/>
-          </a:lnRef>
-          <a:fillRef idx="3">
-            <a:schemeClr val="accent1"/>
-          </a:fillRef>
-          <a:effectRef idx="2">
-            <a:schemeClr val="accent1"/>
-          </a:effectRef>
-          <a:fontRef idx="minor">
-            <a:schemeClr val="lt1"/>
-          </a:fontRef>
-        </p:style>
-        <p:txBody>
-          <a:bodyPr rtlCol="0" anchor="ctr"/>
-          <a:lstStyle/>
-          <a:p>
-            <a:pPr algn="ctr"/>
-          </a:p>
-        </p:txBody>
-      </p:sp>
-      <p:sp>
-        <p:nvSpPr>
-          <p:cNvPr id="4" name="Rectangle 3"/>
-          <p:cNvSpPr/>
-          <p:nvPr/>
-        </p:nvSpPr>
-        <p:spPr>
-          <a:xfrm>
-            <a:off x="0" y="6510528"/>
-            <a:ext cx="12191999" cy="347472"/>
-          </a:xfrm>
-          <a:prstGeom prst="rect">
-            <a:avLst/>
-          </a:prstGeom>
-          <a:solidFill>
-            <a:srgbClr val="0F2C59"/>
-          </a:solidFill>
-          <a:ln>
-            <a:noFill/>
-          </a:ln>
-        </p:spPr>
-        <p:style>
-          <a:lnRef idx="1">
-            <a:schemeClr val="accent1"/>
-          </a:lnRef>
-          <a:fillRef idx="3">
-            <a:schemeClr val="accent1"/>
-          </a:fillRef>
-          <a:effectRef idx="2">
-            <a:schemeClr val="accent1"/>
-          </a:effectRef>
-          <a:fontRef idx="minor">
-            <a:schemeClr val="lt1"/>
-          </a:fontRef>
-        </p:style>
-        <p:txBody>
-          <a:bodyPr rtlCol="0" anchor="ctr"/>
-          <a:lstStyle/>
-          <a:p>
-            <a:pPr algn="ctr"/>
-          </a:p>
-        </p:txBody>
-      </p:sp>
-      <p:sp>
-        <p:nvSpPr>
-          <p:cNvPr id="5" name="TextBox 4"/>
-          <p:cNvSpPr txBox="1"/>
-          <p:nvPr/>
-        </p:nvSpPr>
-        <p:spPr>
-          <a:xfrm>
-            <a:off x="457200" y="6528816"/>
-            <a:ext cx="9144000" cy="292608"/>
-          </a:xfrm>
-          <a:prstGeom prst="rect">
-            <a:avLst/>
-          </a:prstGeom>
-          <a:noFill/>
-        </p:spPr>
-        <p:txBody>
-          <a:bodyPr wrap="square" anchor="ctr">
-            <a:spAutoFit/>
-          </a:bodyPr>
-          <a:lstStyle/>
-          <a:p>
-            <a:pPr algn="l"/>
-            <a:r>
-              <a:rPr sz="1100" b="0">
-                <a:solidFill>
-                  <a:srgbClr val="FFFFFF"/>
-                </a:solidFill>
-                <a:latin typeface="Calibri"/>
-              </a:rPr>
-              <a:t>Curso de Inteligencia Artificial  ·  Razonamiento lógico</a:t>
-            </a:r>
-          </a:p>
-        </p:txBody>
-      </p:sp>
-      <p:sp>
-        <p:nvSpPr>
-          <p:cNvPr id="6" name="TextBox 5"/>
-          <p:cNvSpPr txBox="1"/>
-          <p:nvPr/>
-        </p:nvSpPr>
-        <p:spPr>
-          <a:xfrm>
-            <a:off x="10378440" y="6528816"/>
-            <a:ext cx="1371600" cy="292608"/>
-          </a:xfrm>
-          <a:prstGeom prst="rect">
-            <a:avLst/>
-          </a:prstGeom>
-          <a:noFill/>
-        </p:spPr>
-        <p:txBody>
-          <a:bodyPr wrap="square" anchor="ctr">
-            <a:spAutoFit/>
-          </a:bodyPr>
-          <a:lstStyle/>
-          <a:p>
-            <a:pPr algn="r"/>
-            <a:r>
-              <a:rPr sz="1100" b="0">
-                <a:solidFill>
-                  <a:srgbClr val="FFFFFF"/>
-                </a:solidFill>
-                <a:latin typeface="Calibri"/>
-              </a:rPr>
-              <a:t>17 / 17</a:t>
-            </a:r>
-          </a:p>
-        </p:txBody>
-      </p:sp>
-      <p:sp>
-        <p:nvSpPr>
-          <p:cNvPr id="7" name="TextBox 6"/>
-          <p:cNvSpPr txBox="1"/>
-          <p:nvPr/>
-        </p:nvSpPr>
-        <p:spPr>
-          <a:xfrm>
-            <a:off x="502920" y="256032"/>
-            <a:ext cx="11155680" cy="502920"/>
-          </a:xfrm>
-          <a:prstGeom prst="rect">
-            <a:avLst/>
-          </a:prstGeom>
-          <a:noFill/>
-        </p:spPr>
-        <p:txBody>
-          <a:bodyPr wrap="square" anchor="ctr">
-            <a:spAutoFit/>
-          </a:bodyPr>
-          <a:lstStyle/>
-          <a:p>
-            <a:pPr algn="l"/>
-            <a:r>
-              <a:rPr sz="2800" b="1">
-                <a:solidFill>
-                  <a:srgbClr val="0F2C59"/>
-                </a:solidFill>
-                <a:latin typeface="Calibri"/>
-              </a:rPr>
-              <a:t>Para discutir</a:t>
-            </a:r>
-          </a:p>
-        </p:txBody>
-      </p:sp>
-      <p:sp>
-        <p:nvSpPr>
-          <p:cNvPr id="8" name="Rectangle 7"/>
-          <p:cNvSpPr/>
-          <p:nvPr/>
-        </p:nvSpPr>
-        <p:spPr>
-          <a:xfrm>
-            <a:off x="502920" y="804672"/>
-            <a:ext cx="1280160" cy="54864"/>
-          </a:xfrm>
-          <a:prstGeom prst="rect">
-            <a:avLst/>
-          </a:prstGeom>
-          <a:solidFill>
-            <a:srgbClr val="E8B93A"/>
-          </a:solidFill>
-          <a:ln>
-            <a:noFill/>
-          </a:ln>
-        </p:spPr>
-        <p:style>
-          <a:lnRef idx="1">
-            <a:schemeClr val="accent1"/>
-          </a:lnRef>
-          <a:fillRef idx="3">
-            <a:schemeClr val="accent1"/>
-          </a:fillRef>
-          <a:effectRef idx="2">
-            <a:schemeClr val="accent1"/>
-          </a:effectRef>
-          <a:fontRef idx="minor">
-            <a:schemeClr val="lt1"/>
-          </a:fontRef>
-        </p:style>
-        <p:txBody>
-          <a:bodyPr rtlCol="0" anchor="ctr"/>
-          <a:lstStyle/>
-          <a:p>
-            <a:pPr algn="ctr"/>
-          </a:p>
-        </p:txBody>
-      </p:sp>
-      <p:sp>
-        <p:nvSpPr>
-          <p:cNvPr id="9" name="Rounded Rectangle 8"/>
-          <p:cNvSpPr/>
-          <p:nvPr/>
-        </p:nvSpPr>
-        <p:spPr>
-          <a:xfrm>
-            <a:off x="502920" y="1417320"/>
-            <a:ext cx="5349240" cy="2148840"/>
-          </a:xfrm>
-          <a:prstGeom prst="roundRect">
-            <a:avLst>
-              <a:gd name="adj" fmla="val 8000"/>
-            </a:avLst>
-          </a:prstGeom>
-          <a:solidFill>
-            <a:srgbClr val="F6F8FB"/>
-          </a:solidFill>
-          <a:ln w="15875">
-            <a:solidFill>
-              <a:srgbClr val="D5DEE8"/>
-            </a:solidFill>
-          </a:ln>
-        </p:spPr>
-        <p:style>
-          <a:lnRef idx="1">
-            <a:schemeClr val="accent1"/>
-          </a:lnRef>
-          <a:fillRef idx="3">
-            <a:schemeClr val="accent1"/>
-          </a:fillRef>
-          <a:effectRef idx="2">
-            <a:schemeClr val="accent1"/>
-          </a:effectRef>
-          <a:fontRef idx="minor">
-            <a:schemeClr val="lt1"/>
-          </a:fontRef>
-        </p:style>
-        <p:txBody>
-          <a:bodyPr rtlCol="0" anchor="ctr"/>
-          <a:lstStyle/>
-          <a:p>
-            <a:pPr algn="ctr"/>
-          </a:p>
-        </p:txBody>
-      </p:sp>
-      <p:sp>
-        <p:nvSpPr>
-          <p:cNvPr id="10" name="TextBox 9"/>
-          <p:cNvSpPr txBox="1"/>
-          <p:nvPr/>
-        </p:nvSpPr>
-        <p:spPr>
-          <a:xfrm>
-            <a:off x="704088" y="1600200"/>
-            <a:ext cx="4946904" cy="329184"/>
-          </a:xfrm>
-          <a:prstGeom prst="rect">
-            <a:avLst/>
-          </a:prstGeom>
-          <a:noFill/>
-        </p:spPr>
-        <p:txBody>
-          <a:bodyPr wrap="square" anchor="t">
-            <a:spAutoFit/>
-          </a:bodyPr>
-          <a:lstStyle/>
-          <a:p>
-            <a:pPr algn="l"/>
-            <a:r>
-              <a:rPr sz="1600" b="1">
-                <a:solidFill>
-                  <a:srgbClr val="1B6CA8"/>
-                </a:solidFill>
-                <a:latin typeface="Calibri"/>
-              </a:rPr>
-              <a:t>01</a:t>
-            </a:r>
-          </a:p>
-        </p:txBody>
-      </p:sp>
-      <p:sp>
-        <p:nvSpPr>
-          <p:cNvPr id="11" name="TextBox 10"/>
-          <p:cNvSpPr txBox="1"/>
-          <p:nvPr/>
-        </p:nvSpPr>
-        <p:spPr>
-          <a:xfrm>
-            <a:off x="704088" y="1920240"/>
-            <a:ext cx="4946904" cy="640080"/>
-          </a:xfrm>
-          <a:prstGeom prst="rect">
-            <a:avLst/>
-          </a:prstGeom>
-          <a:noFill/>
-        </p:spPr>
-        <p:txBody>
-          <a:bodyPr wrap="square" anchor="t">
-            <a:spAutoFit/>
-          </a:bodyPr>
-          <a:lstStyle/>
-          <a:p>
-            <a:pPr algn="l"/>
-            <a:r>
-              <a:rPr sz="1800" b="1">
-                <a:solidFill>
-                  <a:srgbClr val="0F2C59"/>
-                </a:solidFill>
-                <a:latin typeface="Calibri"/>
-              </a:rPr>
-              <a:t>¿Cuándo FOL?</a:t>
-            </a:r>
-          </a:p>
-        </p:txBody>
-      </p:sp>
-      <p:sp>
-        <p:nvSpPr>
-          <p:cNvPr id="12" name="TextBox 11"/>
-          <p:cNvSpPr txBox="1"/>
-          <p:nvPr/>
-        </p:nvSpPr>
-        <p:spPr>
-          <a:xfrm>
-            <a:off x="704088" y="2560320"/>
-            <a:ext cx="4946904" cy="822960"/>
-          </a:xfrm>
-          <a:prstGeom prst="rect">
-            <a:avLst/>
-          </a:prstGeom>
-          <a:noFill/>
-        </p:spPr>
-        <p:txBody>
-          <a:bodyPr wrap="square" anchor="t">
-            <a:spAutoFit/>
-          </a:bodyPr>
-          <a:lstStyle/>
-          <a:p>
-            <a:pPr algn="l"/>
-            <a:r>
-              <a:rPr sz="1500" b="0">
-                <a:solidFill>
-                  <a:srgbClr val="2C3E50"/>
-                </a:solidFill>
-                <a:latin typeface="Calibri"/>
-              </a:rPr>
-              <a:t>¿Qué no puede decir la lógica proposicional en el Wumpus o en Romania?</a:t>
-            </a:r>
-          </a:p>
-        </p:txBody>
-      </p:sp>
-      <p:sp>
-        <p:nvSpPr>
-          <p:cNvPr id="13" name="Rounded Rectangle 12"/>
-          <p:cNvSpPr/>
-          <p:nvPr/>
-        </p:nvSpPr>
-        <p:spPr>
-          <a:xfrm>
-            <a:off x="6355080" y="1417320"/>
-            <a:ext cx="5349240" cy="2148840"/>
-          </a:xfrm>
-          <a:prstGeom prst="roundRect">
-            <a:avLst>
-              <a:gd name="adj" fmla="val 8000"/>
-            </a:avLst>
-          </a:prstGeom>
-          <a:solidFill>
-            <a:srgbClr val="F6F8FB"/>
-          </a:solidFill>
-          <a:ln w="15875">
-            <a:solidFill>
-              <a:srgbClr val="D5DEE8"/>
-            </a:solidFill>
-          </a:ln>
-        </p:spPr>
-        <p:style>
-          <a:lnRef idx="1">
-            <a:schemeClr val="accent1"/>
-          </a:lnRef>
-          <a:fillRef idx="3">
-            <a:schemeClr val="accent1"/>
-          </a:fillRef>
-          <a:effectRef idx="2">
-            <a:schemeClr val="accent1"/>
-          </a:effectRef>
-          <a:fontRef idx="minor">
-            <a:schemeClr val="lt1"/>
-          </a:fontRef>
-        </p:style>
-        <p:txBody>
-          <a:bodyPr rtlCol="0" anchor="ctr"/>
-          <a:lstStyle/>
-          <a:p>
-            <a:pPr algn="ctr"/>
-          </a:p>
-        </p:txBody>
-      </p:sp>
-      <p:sp>
-        <p:nvSpPr>
-          <p:cNvPr id="14" name="TextBox 13"/>
-          <p:cNvSpPr txBox="1"/>
-          <p:nvPr/>
-        </p:nvSpPr>
-        <p:spPr>
-          <a:xfrm>
-            <a:off x="6556248" y="1600200"/>
-            <a:ext cx="4946904" cy="329184"/>
-          </a:xfrm>
-          <a:prstGeom prst="rect">
-            <a:avLst/>
-          </a:prstGeom>
-          <a:noFill/>
-        </p:spPr>
-        <p:txBody>
-          <a:bodyPr wrap="square" anchor="t">
-            <a:spAutoFit/>
-          </a:bodyPr>
-          <a:lstStyle/>
-          <a:p>
-            <a:pPr algn="l"/>
-            <a:r>
-              <a:rPr sz="1600" b="1">
-                <a:solidFill>
-                  <a:srgbClr val="1B6CA8"/>
-                </a:solidFill>
-                <a:latin typeface="Calibri"/>
-              </a:rPr>
-              <a:t>02</a:t>
-            </a:r>
-          </a:p>
-        </p:txBody>
-      </p:sp>
-      <p:sp>
-        <p:nvSpPr>
-          <p:cNvPr id="15" name="TextBox 14"/>
-          <p:cNvSpPr txBox="1"/>
-          <p:nvPr/>
-        </p:nvSpPr>
-        <p:spPr>
-          <a:xfrm>
-            <a:off x="6556248" y="1920240"/>
-            <a:ext cx="4946904" cy="640080"/>
-          </a:xfrm>
-          <a:prstGeom prst="rect">
-            <a:avLst/>
-          </a:prstGeom>
-          <a:noFill/>
-        </p:spPr>
-        <p:txBody>
-          <a:bodyPr wrap="square" anchor="t">
-            <a:spAutoFit/>
-          </a:bodyPr>
-          <a:lstStyle/>
-          <a:p>
-            <a:pPr algn="l"/>
-            <a:r>
-              <a:rPr sz="1800" b="1">
-                <a:solidFill>
-                  <a:srgbClr val="0F2C59"/>
-                </a:solidFill>
-                <a:latin typeface="Calibri"/>
-              </a:rPr>
-              <a:t>¿Sano y completo?</a:t>
-            </a:r>
-          </a:p>
-        </p:txBody>
-      </p:sp>
-      <p:sp>
-        <p:nvSpPr>
-          <p:cNvPr id="16" name="TextBox 15"/>
-          <p:cNvSpPr txBox="1"/>
-          <p:nvPr/>
-        </p:nvSpPr>
-        <p:spPr>
-          <a:xfrm>
-            <a:off x="6556248" y="2560320"/>
-            <a:ext cx="4946904" cy="822960"/>
-          </a:xfrm>
-          <a:prstGeom prst="rect">
-            <a:avLst/>
-          </a:prstGeom>
-          <a:noFill/>
-        </p:spPr>
-        <p:txBody>
-          <a:bodyPr wrap="square" anchor="t">
-            <a:spAutoFit/>
-          </a:bodyPr>
-          <a:lstStyle/>
-          <a:p>
-            <a:pPr algn="l"/>
-            <a:r>
-              <a:rPr sz="1500" b="0">
-                <a:solidFill>
-                  <a:srgbClr val="2C3E50"/>
-                </a:solidFill>
-                <a:latin typeface="Calibri"/>
-              </a:rPr>
-              <a:t>Un algoritmo rápido que se equivoca, ¿sirve como motor de un agente?</a:t>
-            </a:r>
-          </a:p>
-        </p:txBody>
-      </p:sp>
-      <p:sp>
-        <p:nvSpPr>
-          <p:cNvPr id="17" name="Rounded Rectangle 16"/>
-          <p:cNvSpPr/>
-          <p:nvPr/>
-        </p:nvSpPr>
-        <p:spPr>
-          <a:xfrm>
-            <a:off x="502920" y="3840480"/>
-            <a:ext cx="5349240" cy="2148840"/>
-          </a:xfrm>
-          <a:prstGeom prst="roundRect">
-            <a:avLst>
-              <a:gd name="adj" fmla="val 8000"/>
-            </a:avLst>
-          </a:prstGeom>
-          <a:solidFill>
-            <a:srgbClr val="F6F8FB"/>
-          </a:solidFill>
-          <a:ln w="15875">
-            <a:solidFill>
-              <a:srgbClr val="D5DEE8"/>
-            </a:solidFill>
-          </a:ln>
-        </p:spPr>
-        <p:style>
-          <a:lnRef idx="1">
-            <a:schemeClr val="accent1"/>
-          </a:lnRef>
-          <a:fillRef idx="3">
-            <a:schemeClr val="accent1"/>
-          </a:fillRef>
-          <a:effectRef idx="2">
-            <a:schemeClr val="accent1"/>
-          </a:effectRef>
-          <a:fontRef idx="minor">
-            <a:schemeClr val="lt1"/>
-          </a:fontRef>
-        </p:style>
-        <p:txBody>
-          <a:bodyPr rtlCol="0" anchor="ctr"/>
-          <a:lstStyle/>
-          <a:p>
-            <a:pPr algn="ctr"/>
-          </a:p>
-        </p:txBody>
-      </p:sp>
-      <p:sp>
-        <p:nvSpPr>
-          <p:cNvPr id="18" name="TextBox 17"/>
-          <p:cNvSpPr txBox="1"/>
-          <p:nvPr/>
-        </p:nvSpPr>
-        <p:spPr>
-          <a:xfrm>
-            <a:off x="704088" y="4023360"/>
-            <a:ext cx="4946904" cy="329184"/>
-          </a:xfrm>
-          <a:prstGeom prst="rect">
-            <a:avLst/>
-          </a:prstGeom>
-          <a:noFill/>
-        </p:spPr>
-        <p:txBody>
-          <a:bodyPr wrap="square" anchor="t">
-            <a:spAutoFit/>
-          </a:bodyPr>
-          <a:lstStyle/>
-          <a:p>
-            <a:pPr algn="l"/>
-            <a:r>
-              <a:rPr sz="1600" b="1">
-                <a:solidFill>
-                  <a:srgbClr val="1B6CA8"/>
-                </a:solidFill>
-                <a:latin typeface="Calibri"/>
-              </a:rPr>
-              <a:t>03</a:t>
-            </a:r>
-          </a:p>
-        </p:txBody>
-      </p:sp>
-      <p:sp>
-        <p:nvSpPr>
-          <p:cNvPr id="19" name="TextBox 18"/>
-          <p:cNvSpPr txBox="1"/>
-          <p:nvPr/>
-        </p:nvSpPr>
-        <p:spPr>
-          <a:xfrm>
-            <a:off x="704088" y="4343400"/>
-            <a:ext cx="4946904" cy="640080"/>
-          </a:xfrm>
-          <a:prstGeom prst="rect">
-            <a:avLst/>
-          </a:prstGeom>
-          <a:noFill/>
-        </p:spPr>
-        <p:txBody>
-          <a:bodyPr wrap="square" anchor="t">
-            <a:spAutoFit/>
-          </a:bodyPr>
-          <a:lstStyle/>
-          <a:p>
-            <a:pPr algn="l"/>
-            <a:r>
-              <a:rPr sz="1800" b="1">
-                <a:solidFill>
-                  <a:srgbClr val="0F2C59"/>
-                </a:solidFill>
-                <a:latin typeface="Calibri"/>
-              </a:rPr>
-              <a:t>¿Datos o metas?</a:t>
-            </a:r>
-          </a:p>
-        </p:txBody>
-      </p:sp>
-      <p:sp>
-        <p:nvSpPr>
-          <p:cNvPr id="20" name="TextBox 19"/>
-          <p:cNvSpPr txBox="1"/>
-          <p:nvPr/>
-        </p:nvSpPr>
-        <p:spPr>
-          <a:xfrm>
-            <a:off x="704088" y="4983480"/>
-            <a:ext cx="4946904" cy="822960"/>
-          </a:xfrm>
-          <a:prstGeom prst="rect">
-            <a:avLst/>
-          </a:prstGeom>
-          <a:noFill/>
-        </p:spPr>
-        <p:txBody>
-          <a:bodyPr wrap="square" anchor="t">
-            <a:spAutoFit/>
-          </a:bodyPr>
-          <a:lstStyle/>
-          <a:p>
-            <a:pPr algn="l"/>
-            <a:r>
-              <a:rPr sz="1500" b="0">
-                <a:solidFill>
-                  <a:srgbClr val="2C3E50"/>
-                </a:solidFill>
-                <a:latin typeface="Calibri"/>
-              </a:rPr>
-              <a:t>En la KB de Tom y Felix, ¿cuándo preferirías FC y cuándo BC?</a:t>
-            </a:r>
-          </a:p>
-        </p:txBody>
-      </p:sp>
-      <p:sp>
-        <p:nvSpPr>
-          <p:cNvPr id="21" name="Rounded Rectangle 20"/>
-          <p:cNvSpPr/>
-          <p:nvPr/>
-        </p:nvSpPr>
-        <p:spPr>
-          <a:xfrm>
-            <a:off x="6355080" y="3840480"/>
-            <a:ext cx="5349240" cy="2148840"/>
-          </a:xfrm>
-          <a:prstGeom prst="roundRect">
-            <a:avLst>
-              <a:gd name="adj" fmla="val 8000"/>
-            </a:avLst>
-          </a:prstGeom>
-          <a:solidFill>
-            <a:srgbClr val="F6F8FB"/>
-          </a:solidFill>
-          <a:ln w="15875">
-            <a:solidFill>
-              <a:srgbClr val="D5DEE8"/>
-            </a:solidFill>
-          </a:ln>
-        </p:spPr>
-        <p:style>
-          <a:lnRef idx="1">
-            <a:schemeClr val="accent1"/>
-          </a:lnRef>
-          <a:fillRef idx="3">
-            <a:schemeClr val="accent1"/>
-          </a:fillRef>
-          <a:effectRef idx="2">
-            <a:schemeClr val="accent1"/>
-          </a:effectRef>
-          <a:fontRef idx="minor">
-            <a:schemeClr val="lt1"/>
-          </a:fontRef>
-        </p:style>
-        <p:txBody>
-          <a:bodyPr rtlCol="0" anchor="ctr"/>
-          <a:lstStyle/>
-          <a:p>
-            <a:pPr algn="ctr"/>
-          </a:p>
-        </p:txBody>
-      </p:sp>
-      <p:sp>
-        <p:nvSpPr>
-          <p:cNvPr id="22" name="TextBox 21"/>
-          <p:cNvSpPr txBox="1"/>
-          <p:nvPr/>
-        </p:nvSpPr>
-        <p:spPr>
-          <a:xfrm>
-            <a:off x="6556248" y="4023360"/>
-            <a:ext cx="4946904" cy="329184"/>
-          </a:xfrm>
-          <a:prstGeom prst="rect">
-            <a:avLst/>
-          </a:prstGeom>
-          <a:noFill/>
-        </p:spPr>
-        <p:txBody>
-          <a:bodyPr wrap="square" anchor="t">
-            <a:spAutoFit/>
-          </a:bodyPr>
-          <a:lstStyle/>
-          <a:p>
-            <a:pPr algn="l"/>
-            <a:r>
-              <a:rPr sz="1600" b="1">
-                <a:solidFill>
-                  <a:srgbClr val="1B6CA8"/>
-                </a:solidFill>
-                <a:latin typeface="Calibri"/>
-              </a:rPr>
-              <a:t>04</a:t>
-            </a:r>
-          </a:p>
-        </p:txBody>
-      </p:sp>
-      <p:sp>
-        <p:nvSpPr>
-          <p:cNvPr id="23" name="TextBox 22"/>
-          <p:cNvSpPr txBox="1"/>
-          <p:nvPr/>
-        </p:nvSpPr>
-        <p:spPr>
-          <a:xfrm>
-            <a:off x="6556248" y="4343400"/>
-            <a:ext cx="4946904" cy="640080"/>
-          </a:xfrm>
-          <a:prstGeom prst="rect">
-            <a:avLst/>
-          </a:prstGeom>
-          <a:noFill/>
-        </p:spPr>
-        <p:txBody>
-          <a:bodyPr wrap="square" anchor="t">
-            <a:spAutoFit/>
-          </a:bodyPr>
-          <a:lstStyle/>
-          <a:p>
-            <a:pPr algn="l"/>
-            <a:r>
-              <a:rPr sz="1800" b="1">
-                <a:solidFill>
-                  <a:srgbClr val="0F2C59"/>
-                </a:solidFill>
-                <a:latin typeface="Calibri"/>
-              </a:rPr>
-              <a:t>¿Y Prolog?</a:t>
-            </a:r>
-          </a:p>
-        </p:txBody>
-      </p:sp>
-      <p:sp>
-        <p:nvSpPr>
-          <p:cNvPr id="24" name="TextBox 23"/>
-          <p:cNvSpPr txBox="1"/>
-          <p:nvPr/>
-        </p:nvSpPr>
-        <p:spPr>
-          <a:xfrm>
-            <a:off x="6556248" y="4983480"/>
-            <a:ext cx="4946904" cy="822960"/>
-          </a:xfrm>
-          <a:prstGeom prst="rect">
-            <a:avLst/>
-          </a:prstGeom>
-          <a:noFill/>
-        </p:spPr>
-        <p:txBody>
-          <a:bodyPr wrap="square" anchor="t">
-            <a:spAutoFit/>
-          </a:bodyPr>
-          <a:lstStyle/>
-          <a:p>
-            <a:pPr algn="l"/>
-            <a:r>
-              <a:rPr sz="1500" b="0">
-                <a:solidFill>
-                  <a:srgbClr val="2C3E50"/>
-                </a:solidFill>
-                <a:latin typeface="Calibri"/>
-              </a:rPr>
-              <a:t>Backward chaining + unificación + profundidad: ¿qué falla si hay ciclos?</a:t>
             </a:r>
           </a:p>
         </p:txBody>
@@ -10008,7 +9236,7 @@
 </file>
 
 <file path=ppt/slides/slide2.xml><?xml version="1.0" encoding="utf-8"?>
-<p:sld xmlns:a="http://schemas.openxmlformats.org/drawingml/2006/main" xmlns:p="http://schemas.openxmlformats.org/presentationml/2006/main" xmlns:r="http://schemas.openxmlformats.org/officeDocument/2006/relationships">
+<p:sld xmlns:a="http://schemas.openxmlformats.org/drawingml/2006/main" xmlns:r="http://schemas.openxmlformats.org/officeDocument/2006/relationships" xmlns:p="http://schemas.openxmlformats.org/presentationml/2006/main">
   <p:cSld>
     <p:spTree>
       <p:nvGrpSpPr>
@@ -10016,7 +9244,14 @@
         <p:cNvGrpSpPr/>
         <p:nvPr/>
       </p:nvGrpSpPr>
-      <p:grpSpPr/>
+      <p:grpSpPr>
+        <a:xfrm>
+          <a:off x="0" y="0"/>
+          <a:ext cx="0" cy="0"/>
+          <a:chOff x="0" y="0"/>
+          <a:chExt cx="0" cy="0"/>
+        </a:xfrm>
+      </p:grpSpPr>
       <p:sp>
         <p:nvSpPr>
           <p:cNvPr id="2" name="Rectangle 1"/>
@@ -10057,6 +9292,7 @@
           <a:lstStyle/>
           <a:p>
             <a:pPr algn="ctr"/>
+            <a:endParaRPr/>
           </a:p>
         </p:txBody>
       </p:sp>
@@ -10100,6 +9336,7 @@
           <a:lstStyle/>
           <a:p>
             <a:pPr algn="ctr"/>
+            <a:endParaRPr/>
           </a:p>
         </p:txBody>
       </p:sp>
@@ -10143,6 +9380,7 @@
           <a:lstStyle/>
           <a:p>
             <a:pPr algn="ctr"/>
+            <a:endParaRPr/>
           </a:p>
         </p:txBody>
       </p:sp>
@@ -10177,41 +9415,6 @@
                 <a:latin typeface="Calibri"/>
               </a:rPr>
               <a:t>Curso de Inteligencia Artificial  ·  Razonamiento lógico</a:t>
-            </a:r>
-          </a:p>
-        </p:txBody>
-      </p:sp>
-      <p:sp>
-        <p:nvSpPr>
-          <p:cNvPr id="6" name="TextBox 5"/>
-          <p:cNvSpPr txBox="1"/>
-          <p:nvPr/>
-        </p:nvSpPr>
-        <p:spPr>
-          <a:xfrm>
-            <a:off x="10378440" y="6528816"/>
-            <a:ext cx="1371600" cy="292608"/>
-          </a:xfrm>
-          <a:prstGeom prst="rect">
-            <a:avLst/>
-          </a:prstGeom>
-          <a:noFill/>
-        </p:spPr>
-        <p:txBody>
-          <a:bodyPr wrap="square" anchor="ctr">
-            <a:spAutoFit/>
-          </a:bodyPr>
-          <a:lstStyle/>
-          <a:p>
-            <a:pPr algn="r"/>
-            <a:r>
-              <a:rPr sz="1100" b="0">
-                <a:solidFill>
-                  <a:srgbClr val="FFFFFF"/>
-                </a:solidFill>
-                <a:latin typeface="Calibri"/>
-              </a:rPr>
-              <a:t>2 / 17</a:t>
             </a:r>
           </a:p>
         </p:txBody>
@@ -10291,6 +9494,7 @@
           <a:lstStyle/>
           <a:p>
             <a:pPr algn="ctr"/>
+            <a:endParaRPr/>
           </a:p>
         </p:txBody>
       </p:sp>
@@ -10338,6 +9542,7 @@
           <a:lstStyle/>
           <a:p>
             <a:pPr algn="ctr"/>
+            <a:endParaRPr/>
           </a:p>
         </p:txBody>
       </p:sp>
@@ -10490,6 +9695,7 @@
           <a:lstStyle/>
           <a:p>
             <a:pPr algn="ctr"/>
+            <a:endParaRPr/>
           </a:p>
         </p:txBody>
       </p:sp>
@@ -10642,6 +9848,7 @@
           <a:lstStyle/>
           <a:p>
             <a:pPr algn="ctr"/>
+            <a:endParaRPr/>
           </a:p>
         </p:txBody>
       </p:sp>
@@ -10794,6 +10001,7 @@
           <a:lstStyle/>
           <a:p>
             <a:pPr algn="ctr"/>
+            <a:endParaRPr/>
           </a:p>
         </p:txBody>
       </p:sp>
@@ -10911,7 +10119,7 @@
 </file>
 
 <file path=ppt/slides/slide3.xml><?xml version="1.0" encoding="utf-8"?>
-<p:sld xmlns:a="http://schemas.openxmlformats.org/drawingml/2006/main" xmlns:p="http://schemas.openxmlformats.org/presentationml/2006/main" xmlns:r="http://schemas.openxmlformats.org/officeDocument/2006/relationships">
+<p:sld xmlns:a="http://schemas.openxmlformats.org/drawingml/2006/main" xmlns:r="http://schemas.openxmlformats.org/officeDocument/2006/relationships" xmlns:p="http://schemas.openxmlformats.org/presentationml/2006/main">
   <p:cSld>
     <p:spTree>
       <p:nvGrpSpPr>
@@ -10919,7 +10127,14 @@
         <p:cNvGrpSpPr/>
         <p:nvPr/>
       </p:nvGrpSpPr>
-      <p:grpSpPr/>
+      <p:grpSpPr>
+        <a:xfrm>
+          <a:off x="0" y="0"/>
+          <a:ext cx="0" cy="0"/>
+          <a:chOff x="0" y="0"/>
+          <a:chExt cx="0" cy="0"/>
+        </a:xfrm>
+      </p:grpSpPr>
       <p:sp>
         <p:nvSpPr>
           <p:cNvPr id="2" name="Rectangle 1"/>
@@ -10960,6 +10175,7 @@
           <a:lstStyle/>
           <a:p>
             <a:pPr algn="ctr"/>
+            <a:endParaRPr/>
           </a:p>
         </p:txBody>
       </p:sp>
@@ -11003,6 +10219,7 @@
           <a:lstStyle/>
           <a:p>
             <a:pPr algn="ctr"/>
+            <a:endParaRPr/>
           </a:p>
         </p:txBody>
       </p:sp>
@@ -11046,6 +10263,7 @@
           <a:lstStyle/>
           <a:p>
             <a:pPr algn="ctr"/>
+            <a:endParaRPr/>
           </a:p>
         </p:txBody>
       </p:sp>
@@ -11080,41 +10298,6 @@
                 <a:latin typeface="Calibri"/>
               </a:rPr>
               <a:t>Curso de Inteligencia Artificial  ·  Razonamiento lógico</a:t>
-            </a:r>
-          </a:p>
-        </p:txBody>
-      </p:sp>
-      <p:sp>
-        <p:nvSpPr>
-          <p:cNvPr id="6" name="TextBox 5"/>
-          <p:cNvSpPr txBox="1"/>
-          <p:nvPr/>
-        </p:nvSpPr>
-        <p:spPr>
-          <a:xfrm>
-            <a:off x="10378440" y="6528816"/>
-            <a:ext cx="1371600" cy="292608"/>
-          </a:xfrm>
-          <a:prstGeom prst="rect">
-            <a:avLst/>
-          </a:prstGeom>
-          <a:noFill/>
-        </p:spPr>
-        <p:txBody>
-          <a:bodyPr wrap="square" anchor="ctr">
-            <a:spAutoFit/>
-          </a:bodyPr>
-          <a:lstStyle/>
-          <a:p>
-            <a:pPr algn="r"/>
-            <a:r>
-              <a:rPr sz="1100" b="0">
-                <a:solidFill>
-                  <a:srgbClr val="FFFFFF"/>
-                </a:solidFill>
-                <a:latin typeface="Calibri"/>
-              </a:rPr>
-              <a:t>3 / 17</a:t>
             </a:r>
           </a:p>
         </p:txBody>
@@ -11194,6 +10377,7 @@
           <a:lstStyle/>
           <a:p>
             <a:pPr algn="ctr"/>
+            <a:endParaRPr/>
           </a:p>
         </p:txBody>
       </p:sp>
@@ -11276,6 +10460,7 @@
           <a:lstStyle/>
           <a:p>
             <a:pPr algn="ctr"/>
+            <a:endParaRPr/>
           </a:p>
         </p:txBody>
       </p:sp>
@@ -11288,7 +10473,7 @@
         <p:spPr>
           <a:xfrm>
             <a:off x="822960" y="1783080"/>
-            <a:ext cx="10515600" cy="4023360"/>
+            <a:ext cx="10515600" cy="2195473"/>
           </a:xfrm>
           <a:prstGeom prst="rect">
             <a:avLst/>
@@ -11307,13 +10492,85 @@
               </a:spcAft>
             </a:pPr>
             <a:r>
-              <a:rPr sz="1800" b="0">
-                <a:solidFill>
-                  <a:srgbClr val="2C3E50"/>
-                </a:solidFill>
-                <a:latin typeface="Calibri"/>
-              </a:rPr>
-              <a:t>•  Una base de conocimiento (KB) es un conjunto de oraciones en un lenguaje formal.</a:t>
+              <a:rPr sz="1800" b="0" dirty="0">
+                <a:solidFill>
+                  <a:srgbClr val="2C3E50"/>
+                </a:solidFill>
+                <a:latin typeface="Calibri"/>
+              </a:rPr>
+              <a:t>•  Una base de </a:t>
+            </a:r>
+            <a:r>
+              <a:rPr sz="1800" b="0" dirty="0" err="1">
+                <a:solidFill>
+                  <a:srgbClr val="2C3E50"/>
+                </a:solidFill>
+                <a:latin typeface="Calibri"/>
+              </a:rPr>
+              <a:t>conocimiento</a:t>
+            </a:r>
+            <a:r>
+              <a:rPr sz="1800" b="0" dirty="0">
+                <a:solidFill>
+                  <a:srgbClr val="2C3E50"/>
+                </a:solidFill>
+                <a:latin typeface="Calibri"/>
+              </a:rPr>
+              <a:t> (KB) es un conjunto de </a:t>
+            </a:r>
+            <a:r>
+              <a:rPr sz="1800" b="0" dirty="0" err="1">
+                <a:solidFill>
+                  <a:srgbClr val="2C3E50"/>
+                </a:solidFill>
+                <a:latin typeface="Calibri"/>
+              </a:rPr>
+              <a:t>oraciones</a:t>
+            </a:r>
+            <a:r>
+              <a:rPr sz="1800" b="0" dirty="0">
+                <a:solidFill>
+                  <a:srgbClr val="2C3E50"/>
+                </a:solidFill>
+                <a:latin typeface="Calibri"/>
+              </a:rPr>
+              <a:t> </a:t>
+            </a:r>
+            <a:r>
+              <a:rPr sz="1800" b="0" dirty="0" err="1">
+                <a:solidFill>
+                  <a:srgbClr val="2C3E50"/>
+                </a:solidFill>
+                <a:latin typeface="Calibri"/>
+              </a:rPr>
+              <a:t>en</a:t>
+            </a:r>
+            <a:r>
+              <a:rPr sz="1800" b="0" dirty="0">
+                <a:solidFill>
+                  <a:srgbClr val="2C3E50"/>
+                </a:solidFill>
+                <a:latin typeface="Calibri"/>
+              </a:rPr>
+              <a:t> un </a:t>
+            </a:r>
+            <a:r>
+              <a:rPr sz="1800" b="0" dirty="0" err="1">
+                <a:solidFill>
+                  <a:srgbClr val="2C3E50"/>
+                </a:solidFill>
+                <a:latin typeface="Calibri"/>
+              </a:rPr>
+              <a:t>lenguaje</a:t>
+            </a:r>
+            <a:r>
+              <a:rPr sz="1800" b="0" dirty="0">
+                <a:solidFill>
+                  <a:srgbClr val="2C3E50"/>
+                </a:solidFill>
+                <a:latin typeface="Calibri"/>
+              </a:rPr>
+              <a:t> formal.</a:t>
             </a:r>
           </a:p>
           <a:p>
@@ -11323,13 +10580,211 @@
               </a:spcAft>
             </a:pPr>
             <a:r>
-              <a:rPr sz="1800" b="0">
-                <a:solidFill>
-                  <a:srgbClr val="2C3E50"/>
-                </a:solidFill>
-                <a:latin typeface="Calibri"/>
-              </a:rPr>
-              <a:t>•  El agente percibe, añade hechos a la KB e infiere nuevas oraciones (qué hacer, qué es verdad).</a:t>
+              <a:rPr sz="1800" b="0" dirty="0">
+                <a:solidFill>
+                  <a:srgbClr val="2C3E50"/>
+                </a:solidFill>
+                <a:latin typeface="Calibri"/>
+              </a:rPr>
+              <a:t>•  El </a:t>
+            </a:r>
+            <a:r>
+              <a:rPr sz="1800" b="0" dirty="0" err="1">
+                <a:solidFill>
+                  <a:srgbClr val="2C3E50"/>
+                </a:solidFill>
+                <a:latin typeface="Calibri"/>
+              </a:rPr>
+              <a:t>agente</a:t>
+            </a:r>
+            <a:r>
+              <a:rPr sz="1800" b="0" dirty="0">
+                <a:solidFill>
+                  <a:srgbClr val="2C3E50"/>
+                </a:solidFill>
+                <a:latin typeface="Calibri"/>
+              </a:rPr>
+              <a:t> </a:t>
+            </a:r>
+            <a:r>
+              <a:rPr sz="1800" b="0" dirty="0" err="1">
+                <a:solidFill>
+                  <a:srgbClr val="2C3E50"/>
+                </a:solidFill>
+                <a:latin typeface="Calibri"/>
+              </a:rPr>
+              <a:t>percibe</a:t>
+            </a:r>
+            <a:r>
+              <a:rPr sz="1800" b="0" dirty="0">
+                <a:solidFill>
+                  <a:srgbClr val="2C3E50"/>
+                </a:solidFill>
+                <a:latin typeface="Calibri"/>
+              </a:rPr>
+              <a:t>, </a:t>
+            </a:r>
+            <a:r>
+              <a:rPr sz="1800" b="0" dirty="0" err="1">
+                <a:solidFill>
+                  <a:srgbClr val="2C3E50"/>
+                </a:solidFill>
+                <a:latin typeface="Calibri"/>
+              </a:rPr>
+              <a:t>añade</a:t>
+            </a:r>
+            <a:r>
+              <a:rPr sz="1800" b="0" dirty="0">
+                <a:solidFill>
+                  <a:srgbClr val="2C3E50"/>
+                </a:solidFill>
+                <a:latin typeface="Calibri"/>
+              </a:rPr>
+              <a:t> </a:t>
+            </a:r>
+            <a:r>
+              <a:rPr sz="1800" b="0" dirty="0" err="1">
+                <a:solidFill>
+                  <a:srgbClr val="2C3E50"/>
+                </a:solidFill>
+                <a:latin typeface="Calibri"/>
+              </a:rPr>
+              <a:t>hechos</a:t>
+            </a:r>
+            <a:r>
+              <a:rPr sz="1800" b="0" dirty="0">
+                <a:solidFill>
+                  <a:srgbClr val="2C3E50"/>
+                </a:solidFill>
+                <a:latin typeface="Calibri"/>
+              </a:rPr>
+              <a:t> a la KB e </a:t>
+            </a:r>
+            <a:r>
+              <a:rPr sz="1800" b="0" dirty="0" err="1">
+                <a:solidFill>
+                  <a:srgbClr val="2C3E50"/>
+                </a:solidFill>
+                <a:latin typeface="Calibri"/>
+              </a:rPr>
+              <a:t>infiere</a:t>
+            </a:r>
+            <a:r>
+              <a:rPr sz="1800" b="0" dirty="0">
+                <a:solidFill>
+                  <a:srgbClr val="2C3E50"/>
+                </a:solidFill>
+                <a:latin typeface="Calibri"/>
+              </a:rPr>
+              <a:t> </a:t>
+            </a:r>
+            <a:r>
+              <a:rPr sz="1800" b="0" dirty="0" err="1">
+                <a:solidFill>
+                  <a:srgbClr val="2C3E50"/>
+                </a:solidFill>
+                <a:latin typeface="Calibri"/>
+              </a:rPr>
+              <a:t>nuevas</a:t>
+            </a:r>
+            <a:r>
+              <a:rPr sz="1800" b="0" dirty="0">
+                <a:solidFill>
+                  <a:srgbClr val="2C3E50"/>
+                </a:solidFill>
+                <a:latin typeface="Calibri"/>
+              </a:rPr>
+              <a:t> </a:t>
+            </a:r>
+            <a:r>
+              <a:rPr sz="1800" b="0" dirty="0" err="1">
+                <a:solidFill>
+                  <a:srgbClr val="2C3E50"/>
+                </a:solidFill>
+                <a:latin typeface="Calibri"/>
+              </a:rPr>
+              <a:t>oraciones</a:t>
+            </a:r>
+            <a:r>
+              <a:rPr sz="1800" b="0" dirty="0">
+                <a:solidFill>
+                  <a:srgbClr val="2C3E50"/>
+                </a:solidFill>
+                <a:latin typeface="Calibri"/>
+              </a:rPr>
+              <a:t> (</a:t>
+            </a:r>
+            <a:r>
+              <a:rPr sz="1800" b="0" dirty="0" err="1">
+                <a:solidFill>
+                  <a:srgbClr val="2C3E50"/>
+                </a:solidFill>
+                <a:latin typeface="Calibri"/>
+              </a:rPr>
+              <a:t>qué</a:t>
+            </a:r>
+            <a:r>
+              <a:rPr sz="1800" b="0" dirty="0">
+                <a:solidFill>
+                  <a:srgbClr val="2C3E50"/>
+                </a:solidFill>
+                <a:latin typeface="Calibri"/>
+              </a:rPr>
+              <a:t> </a:t>
+            </a:r>
+            <a:r>
+              <a:rPr sz="1800" b="0" dirty="0" err="1">
+                <a:solidFill>
+                  <a:srgbClr val="2C3E50"/>
+                </a:solidFill>
+                <a:latin typeface="Calibri"/>
+              </a:rPr>
+              <a:t>hacer</a:t>
+            </a:r>
+            <a:r>
+              <a:rPr sz="1800" b="0" dirty="0">
+                <a:solidFill>
+                  <a:srgbClr val="2C3E50"/>
+                </a:solidFill>
+                <a:latin typeface="Calibri"/>
+              </a:rPr>
+              <a:t>, </a:t>
+            </a:r>
+            <a:r>
+              <a:rPr sz="1800" b="0" dirty="0" err="1">
+                <a:solidFill>
+                  <a:srgbClr val="2C3E50"/>
+                </a:solidFill>
+                <a:latin typeface="Calibri"/>
+              </a:rPr>
+              <a:t>qué</a:t>
+            </a:r>
+            <a:r>
+              <a:rPr sz="1800" b="0" dirty="0">
+                <a:solidFill>
+                  <a:srgbClr val="2C3E50"/>
+                </a:solidFill>
+                <a:latin typeface="Calibri"/>
+              </a:rPr>
+              <a:t> es </a:t>
+            </a:r>
+            <a:r>
+              <a:rPr sz="1800" b="0" dirty="0" err="1">
+                <a:solidFill>
+                  <a:srgbClr val="2C3E50"/>
+                </a:solidFill>
+                <a:latin typeface="Calibri"/>
+              </a:rPr>
+              <a:t>verdad</a:t>
+            </a:r>
+            <a:r>
+              <a:rPr sz="1800" b="0" dirty="0">
+                <a:solidFill>
+                  <a:srgbClr val="2C3E50"/>
+                </a:solidFill>
+                <a:latin typeface="Calibri"/>
+              </a:rPr>
+              <a:t>).</a:t>
             </a:r>
           </a:p>
           <a:p>
@@ -11339,13 +10794,175 @@
               </a:spcAft>
             </a:pPr>
             <a:r>
-              <a:rPr sz="1800" b="0">
-                <a:solidFill>
-                  <a:srgbClr val="2C3E50"/>
-                </a:solidFill>
-                <a:latin typeface="Calibri"/>
-              </a:rPr>
-              <a:t>•  Entailment: KB ⊨ α significa que α es verdadera en todos los modelos donde KB es verdadera.</a:t>
+              <a:rPr sz="1800" b="0" dirty="0">
+                <a:solidFill>
+                  <a:srgbClr val="2C3E50"/>
+                </a:solidFill>
+                <a:latin typeface="Calibri"/>
+              </a:rPr>
+              <a:t>•  Entailment: KB ⊨ α </a:t>
+            </a:r>
+            <a:r>
+              <a:rPr sz="1800" b="0" dirty="0" err="1">
+                <a:solidFill>
+                  <a:srgbClr val="2C3E50"/>
+                </a:solidFill>
+                <a:latin typeface="Calibri"/>
+              </a:rPr>
+              <a:t>significa</a:t>
+            </a:r>
+            <a:r>
+              <a:rPr sz="1800" b="0" dirty="0">
+                <a:solidFill>
+                  <a:srgbClr val="2C3E50"/>
+                </a:solidFill>
+                <a:latin typeface="Calibri"/>
+              </a:rPr>
+              <a:t> </a:t>
+            </a:r>
+            <a:r>
+              <a:rPr sz="1800" b="0" dirty="0" err="1">
+                <a:solidFill>
+                  <a:srgbClr val="2C3E50"/>
+                </a:solidFill>
+                <a:latin typeface="Calibri"/>
+              </a:rPr>
+              <a:t>que</a:t>
+            </a:r>
+            <a:r>
+              <a:rPr sz="1800" b="0" dirty="0">
+                <a:solidFill>
+                  <a:srgbClr val="2C3E50"/>
+                </a:solidFill>
+                <a:latin typeface="Calibri"/>
+              </a:rPr>
+              <a:t> α es </a:t>
+            </a:r>
+            <a:r>
+              <a:rPr sz="1800" b="0" dirty="0" err="1">
+                <a:solidFill>
+                  <a:srgbClr val="2C3E50"/>
+                </a:solidFill>
+                <a:latin typeface="Calibri"/>
+              </a:rPr>
+              <a:t>verdadera</a:t>
+            </a:r>
+            <a:r>
+              <a:rPr sz="1800" b="0" dirty="0">
+                <a:solidFill>
+                  <a:srgbClr val="2C3E50"/>
+                </a:solidFill>
+                <a:latin typeface="Calibri"/>
+              </a:rPr>
+              <a:t> </a:t>
+            </a:r>
+            <a:r>
+              <a:rPr sz="1800" b="0" dirty="0" err="1">
+                <a:solidFill>
+                  <a:srgbClr val="2C3E50"/>
+                </a:solidFill>
+                <a:latin typeface="Calibri"/>
+              </a:rPr>
+              <a:t>en</a:t>
+            </a:r>
+            <a:r>
+              <a:rPr sz="1800" b="0" dirty="0">
+                <a:solidFill>
+                  <a:srgbClr val="2C3E50"/>
+                </a:solidFill>
+                <a:latin typeface="Calibri"/>
+              </a:rPr>
+              <a:t> </a:t>
+            </a:r>
+            <a:r>
+              <a:rPr sz="1800" b="0" dirty="0" err="1">
+                <a:solidFill>
+                  <a:srgbClr val="2C3E50"/>
+                </a:solidFill>
+                <a:latin typeface="Calibri"/>
+              </a:rPr>
+              <a:t>todos</a:t>
+            </a:r>
+            <a:r>
+              <a:rPr sz="1800" b="0" dirty="0">
+                <a:solidFill>
+                  <a:srgbClr val="2C3E50"/>
+                </a:solidFill>
+                <a:latin typeface="Calibri"/>
+              </a:rPr>
+              <a:t> </a:t>
+            </a:r>
+            <a:r>
+              <a:rPr sz="1800" b="0" dirty="0" err="1">
+                <a:solidFill>
+                  <a:srgbClr val="2C3E50"/>
+                </a:solidFill>
+                <a:latin typeface="Calibri"/>
+              </a:rPr>
+              <a:t>los</a:t>
+            </a:r>
+            <a:r>
+              <a:rPr sz="1800" b="0" dirty="0">
+                <a:solidFill>
+                  <a:srgbClr val="2C3E50"/>
+                </a:solidFill>
+                <a:latin typeface="Calibri"/>
+              </a:rPr>
+              <a:t> </a:t>
+            </a:r>
+            <a:r>
+              <a:rPr sz="1800" b="0" dirty="0" err="1">
+                <a:solidFill>
+                  <a:srgbClr val="2C3E50"/>
+                </a:solidFill>
+                <a:latin typeface="Calibri"/>
+              </a:rPr>
+              <a:t>modelos</a:t>
+            </a:r>
+            <a:r>
+              <a:rPr sz="1800" b="0" dirty="0">
+                <a:solidFill>
+                  <a:srgbClr val="2C3E50"/>
+                </a:solidFill>
+                <a:latin typeface="Calibri"/>
+              </a:rPr>
+              <a:t> </a:t>
+            </a:r>
+            <a:r>
+              <a:rPr sz="1800" b="0" dirty="0" err="1">
+                <a:solidFill>
+                  <a:srgbClr val="2C3E50"/>
+                </a:solidFill>
+                <a:latin typeface="Calibri"/>
+              </a:rPr>
+              <a:t>donde</a:t>
+            </a:r>
+            <a:r>
+              <a:rPr sz="1800" b="0" dirty="0">
+                <a:solidFill>
+                  <a:srgbClr val="2C3E50"/>
+                </a:solidFill>
+                <a:latin typeface="Calibri"/>
+              </a:rPr>
+              <a:t> KB es </a:t>
+            </a:r>
+            <a:r>
+              <a:rPr sz="1800" b="0" dirty="0" err="1">
+                <a:solidFill>
+                  <a:srgbClr val="2C3E50"/>
+                </a:solidFill>
+                <a:latin typeface="Calibri"/>
+              </a:rPr>
+              <a:t>verdadera</a:t>
+            </a:r>
+            <a:r>
+              <a:rPr sz="1800" b="0" dirty="0">
+                <a:solidFill>
+                  <a:srgbClr val="2C3E50"/>
+                </a:solidFill>
+                <a:latin typeface="Calibri"/>
+              </a:rPr>
+              <a:t>.</a:t>
             </a:r>
           </a:p>
           <a:p>
@@ -11355,13 +10972,238 @@
               </a:spcAft>
             </a:pPr>
             <a:r>
-              <a:rPr sz="1800" b="0">
-                <a:solidFill>
-                  <a:srgbClr val="2C3E50"/>
-                </a:solidFill>
-                <a:latin typeface="Calibri"/>
-              </a:rPr>
-              <a:t>•  Inferencia: un algoritmo que deriva α. Es sano si solo deriva consecuencias; completo si deriva todas.</a:t>
+              <a:rPr sz="1800" b="0" dirty="0">
+                <a:solidFill>
+                  <a:srgbClr val="2C3E50"/>
+                </a:solidFill>
+                <a:latin typeface="Calibri"/>
+              </a:rPr>
+              <a:t>•  </a:t>
+            </a:r>
+            <a:r>
+              <a:rPr sz="1800" b="0" dirty="0" err="1">
+                <a:solidFill>
+                  <a:srgbClr val="2C3E50"/>
+                </a:solidFill>
+                <a:latin typeface="Calibri"/>
+              </a:rPr>
+              <a:t>Inferencia</a:t>
+            </a:r>
+            <a:r>
+              <a:rPr sz="1800" b="0" dirty="0">
+                <a:solidFill>
+                  <a:srgbClr val="2C3E50"/>
+                </a:solidFill>
+                <a:latin typeface="Calibri"/>
+              </a:rPr>
+              <a:t>: un </a:t>
+            </a:r>
+            <a:r>
+              <a:rPr sz="1800" b="0" dirty="0" err="1">
+                <a:solidFill>
+                  <a:srgbClr val="2C3E50"/>
+                </a:solidFill>
+                <a:latin typeface="Calibri"/>
+              </a:rPr>
+              <a:t>algoritmo</a:t>
+            </a:r>
+            <a:r>
+              <a:rPr sz="1800" b="0" dirty="0">
+                <a:solidFill>
+                  <a:srgbClr val="2C3E50"/>
+                </a:solidFill>
+                <a:latin typeface="Calibri"/>
+              </a:rPr>
+              <a:t> </a:t>
+            </a:r>
+            <a:r>
+              <a:rPr sz="1800" b="0" dirty="0" err="1">
+                <a:solidFill>
+                  <a:srgbClr val="2C3E50"/>
+                </a:solidFill>
+                <a:latin typeface="Calibri"/>
+              </a:rPr>
+              <a:t>que</a:t>
+            </a:r>
+            <a:r>
+              <a:rPr sz="1800" b="0" dirty="0">
+                <a:solidFill>
+                  <a:srgbClr val="2C3E50"/>
+                </a:solidFill>
+                <a:latin typeface="Calibri"/>
+              </a:rPr>
+              <a:t> </a:t>
+            </a:r>
+            <a:r>
+              <a:rPr sz="1800" b="0" dirty="0" err="1">
+                <a:solidFill>
+                  <a:srgbClr val="2C3E50"/>
+                </a:solidFill>
+                <a:latin typeface="Calibri"/>
+              </a:rPr>
+              <a:t>deriva</a:t>
+            </a:r>
+            <a:r>
+              <a:rPr sz="1800" b="0" dirty="0">
+                <a:solidFill>
+                  <a:srgbClr val="2C3E50"/>
+                </a:solidFill>
+                <a:latin typeface="Calibri"/>
+              </a:rPr>
+              <a:t> α. Es </a:t>
+            </a:r>
+            <a:r>
+              <a:rPr sz="1800" b="0" dirty="0" err="1">
+                <a:solidFill>
+                  <a:srgbClr val="2C3E50"/>
+                </a:solidFill>
+                <a:latin typeface="Calibri"/>
+              </a:rPr>
+              <a:t>sa</a:t>
+            </a:r>
+            <a:r>
+              <a:rPr lang="es-419" sz="1800" b="0" dirty="0">
+                <a:solidFill>
+                  <a:srgbClr val="2C3E50"/>
+                </a:solidFill>
+                <a:latin typeface="Calibri"/>
+              </a:rPr>
+              <a:t>no</a:t>
+            </a:r>
+            <a:r>
+              <a:rPr sz="1800" b="0" dirty="0">
+                <a:solidFill>
+                  <a:srgbClr val="2C3E50"/>
+                </a:solidFill>
+                <a:latin typeface="Calibri"/>
+              </a:rPr>
+              <a:t> </a:t>
+            </a:r>
+            <a:r>
+              <a:rPr sz="1800" b="0" dirty="0" err="1">
+                <a:solidFill>
+                  <a:srgbClr val="2C3E50"/>
+                </a:solidFill>
+                <a:latin typeface="Calibri"/>
+              </a:rPr>
+              <a:t>si</a:t>
+            </a:r>
+            <a:r>
+              <a:rPr sz="1800" b="0" dirty="0">
+                <a:solidFill>
+                  <a:srgbClr val="2C3E50"/>
+                </a:solidFill>
+                <a:latin typeface="Calibri"/>
+              </a:rPr>
+              <a:t> solo </a:t>
+            </a:r>
+            <a:r>
+              <a:rPr sz="1800" b="0" dirty="0" err="1">
+                <a:solidFill>
+                  <a:srgbClr val="2C3E50"/>
+                </a:solidFill>
+                <a:latin typeface="Calibri"/>
+              </a:rPr>
+              <a:t>deriva</a:t>
+            </a:r>
+            <a:r>
+              <a:rPr sz="1800" b="0" dirty="0">
+                <a:solidFill>
+                  <a:srgbClr val="2C3E50"/>
+                </a:solidFill>
+                <a:latin typeface="Calibri"/>
+              </a:rPr>
+              <a:t> </a:t>
+            </a:r>
+            <a:r>
+              <a:rPr sz="1800" b="0" dirty="0" err="1">
+                <a:solidFill>
+                  <a:srgbClr val="2C3E50"/>
+                </a:solidFill>
+                <a:latin typeface="Calibri"/>
+              </a:rPr>
+              <a:t>consecuencias</a:t>
+            </a:r>
+            <a:r>
+              <a:rPr sz="1800" b="0" dirty="0">
+                <a:solidFill>
+                  <a:srgbClr val="2C3E50"/>
+                </a:solidFill>
+                <a:latin typeface="Calibri"/>
+              </a:rPr>
+              <a:t>; </a:t>
+            </a:r>
+            <a:r>
+              <a:rPr sz="1800" b="0" dirty="0" err="1">
+                <a:solidFill>
+                  <a:srgbClr val="2C3E50"/>
+                </a:solidFill>
+                <a:latin typeface="Calibri"/>
+              </a:rPr>
+              <a:t>completo</a:t>
+            </a:r>
+            <a:r>
+              <a:rPr sz="1800" b="0" dirty="0">
+                <a:solidFill>
+                  <a:srgbClr val="2C3E50"/>
+                </a:solidFill>
+                <a:latin typeface="Calibri"/>
+              </a:rPr>
+              <a:t> </a:t>
+            </a:r>
+            <a:r>
+              <a:rPr sz="1800" b="0" dirty="0" err="1">
+                <a:solidFill>
+                  <a:srgbClr val="2C3E50"/>
+                </a:solidFill>
+                <a:latin typeface="Calibri"/>
+              </a:rPr>
+              <a:t>si</a:t>
+            </a:r>
+            <a:r>
+              <a:rPr sz="1800" b="0" dirty="0">
+                <a:solidFill>
+                  <a:srgbClr val="2C3E50"/>
+                </a:solidFill>
+                <a:latin typeface="Calibri"/>
+              </a:rPr>
+              <a:t> </a:t>
+            </a:r>
+            <a:r>
+              <a:rPr sz="1800" b="0" dirty="0" err="1">
+                <a:solidFill>
+                  <a:srgbClr val="2C3E50"/>
+                </a:solidFill>
+                <a:latin typeface="Calibri"/>
+              </a:rPr>
+              <a:t>deriva</a:t>
+            </a:r>
+            <a:r>
+              <a:rPr sz="1800" b="0" dirty="0">
+                <a:solidFill>
+                  <a:srgbClr val="2C3E50"/>
+                </a:solidFill>
+                <a:latin typeface="Calibri"/>
+              </a:rPr>
+              <a:t> </a:t>
+            </a:r>
+            <a:r>
+              <a:rPr sz="1800" b="0" dirty="0" err="1">
+                <a:solidFill>
+                  <a:srgbClr val="2C3E50"/>
+                </a:solidFill>
+                <a:latin typeface="Calibri"/>
+              </a:rPr>
+              <a:t>todas</a:t>
+            </a:r>
+            <a:r>
+              <a:rPr sz="1800" b="0" dirty="0">
+                <a:solidFill>
+                  <a:srgbClr val="2C3E50"/>
+                </a:solidFill>
+                <a:latin typeface="Calibri"/>
+              </a:rPr>
+              <a:t>.</a:t>
             </a:r>
           </a:p>
           <a:p>
@@ -11371,13 +11213,139 @@
               </a:spcAft>
             </a:pPr>
             <a:r>
-              <a:rPr sz="1800" b="0">
-                <a:solidFill>
-                  <a:srgbClr val="2C3E50"/>
-                </a:solidFill>
-                <a:latin typeface="Calibri"/>
-              </a:rPr>
-              <a:t>•  La lógica de predicados (FOL) es el lenguaje estándar de AIMA para objetos, relaciones y cuantificadores.</a:t>
+              <a:rPr sz="1800" b="0" dirty="0">
+                <a:solidFill>
+                  <a:srgbClr val="2C3E50"/>
+                </a:solidFill>
+                <a:latin typeface="Calibri"/>
+              </a:rPr>
+              <a:t>•  La </a:t>
+            </a:r>
+            <a:r>
+              <a:rPr sz="1800" b="0" dirty="0" err="1">
+                <a:solidFill>
+                  <a:srgbClr val="2C3E50"/>
+                </a:solidFill>
+                <a:latin typeface="Calibri"/>
+              </a:rPr>
+              <a:t>lógica</a:t>
+            </a:r>
+            <a:r>
+              <a:rPr sz="1800" b="0" dirty="0">
+                <a:solidFill>
+                  <a:srgbClr val="2C3E50"/>
+                </a:solidFill>
+                <a:latin typeface="Calibri"/>
+              </a:rPr>
+              <a:t> de </a:t>
+            </a:r>
+            <a:r>
+              <a:rPr sz="1800" b="0" dirty="0" err="1">
+                <a:solidFill>
+                  <a:srgbClr val="2C3E50"/>
+                </a:solidFill>
+                <a:latin typeface="Calibri"/>
+              </a:rPr>
+              <a:t>predicados</a:t>
+            </a:r>
+            <a:r>
+              <a:rPr sz="1800" b="0" dirty="0">
+                <a:solidFill>
+                  <a:srgbClr val="2C3E50"/>
+                </a:solidFill>
+                <a:latin typeface="Calibri"/>
+              </a:rPr>
+              <a:t> (FOL) es el </a:t>
+            </a:r>
+            <a:r>
+              <a:rPr sz="1800" b="0" dirty="0" err="1">
+                <a:solidFill>
+                  <a:srgbClr val="2C3E50"/>
+                </a:solidFill>
+                <a:latin typeface="Calibri"/>
+              </a:rPr>
+              <a:t>lenguaje</a:t>
+            </a:r>
+            <a:r>
+              <a:rPr sz="1800" b="0" dirty="0">
+                <a:solidFill>
+                  <a:srgbClr val="2C3E50"/>
+                </a:solidFill>
+                <a:latin typeface="Calibri"/>
+              </a:rPr>
+              <a:t> </a:t>
+            </a:r>
+            <a:r>
+              <a:rPr sz="1800" b="0" dirty="0" err="1">
+                <a:solidFill>
+                  <a:srgbClr val="2C3E50"/>
+                </a:solidFill>
+                <a:latin typeface="Calibri"/>
+              </a:rPr>
+              <a:t>estándar</a:t>
+            </a:r>
+            <a:r>
+              <a:rPr sz="1800" b="0" dirty="0">
+                <a:solidFill>
+                  <a:srgbClr val="2C3E50"/>
+                </a:solidFill>
+                <a:latin typeface="Calibri"/>
+              </a:rPr>
+              <a:t> de AIMA para </a:t>
+            </a:r>
+            <a:r>
+              <a:rPr sz="1800" b="0" dirty="0" err="1">
+                <a:solidFill>
+                  <a:srgbClr val="2C3E50"/>
+                </a:solidFill>
+                <a:latin typeface="Calibri"/>
+              </a:rPr>
+              <a:t>objetos</a:t>
+            </a:r>
+            <a:r>
+              <a:rPr sz="1800" b="0" dirty="0">
+                <a:solidFill>
+                  <a:srgbClr val="2C3E50"/>
+                </a:solidFill>
+                <a:latin typeface="Calibri"/>
+              </a:rPr>
+              <a:t>, </a:t>
+            </a:r>
+            <a:r>
+              <a:rPr sz="1800" b="0" dirty="0" err="1">
+                <a:solidFill>
+                  <a:srgbClr val="2C3E50"/>
+                </a:solidFill>
+                <a:latin typeface="Calibri"/>
+              </a:rPr>
+              <a:t>relaciones</a:t>
+            </a:r>
+            <a:r>
+              <a:rPr sz="1800" b="0" dirty="0">
+                <a:solidFill>
+                  <a:srgbClr val="2C3E50"/>
+                </a:solidFill>
+                <a:latin typeface="Calibri"/>
+              </a:rPr>
+              <a:t> y </a:t>
+            </a:r>
+            <a:r>
+              <a:rPr sz="1800" b="0" dirty="0" err="1">
+                <a:solidFill>
+                  <a:srgbClr val="2C3E50"/>
+                </a:solidFill>
+                <a:latin typeface="Calibri"/>
+              </a:rPr>
+              <a:t>cuantificadores</a:t>
+            </a:r>
+            <a:r>
+              <a:rPr sz="1800" b="0" dirty="0">
+                <a:solidFill>
+                  <a:srgbClr val="2C3E50"/>
+                </a:solidFill>
+                <a:latin typeface="Calibri"/>
+              </a:rPr>
+              <a:t>.</a:t>
             </a:r>
           </a:p>
         </p:txBody>
@@ -11391,7 +11359,7 @@
 </file>
 
 <file path=ppt/slides/slide4.xml><?xml version="1.0" encoding="utf-8"?>
-<p:sld xmlns:a="http://schemas.openxmlformats.org/drawingml/2006/main" xmlns:p="http://schemas.openxmlformats.org/presentationml/2006/main" xmlns:r="http://schemas.openxmlformats.org/officeDocument/2006/relationships">
+<p:sld xmlns:a="http://schemas.openxmlformats.org/drawingml/2006/main" xmlns:r="http://schemas.openxmlformats.org/officeDocument/2006/relationships" xmlns:p="http://schemas.openxmlformats.org/presentationml/2006/main">
   <p:cSld>
     <p:spTree>
       <p:nvGrpSpPr>
@@ -11399,7 +11367,14 @@
         <p:cNvGrpSpPr/>
         <p:nvPr/>
       </p:nvGrpSpPr>
-      <p:grpSpPr/>
+      <p:grpSpPr>
+        <a:xfrm>
+          <a:off x="0" y="0"/>
+          <a:ext cx="0" cy="0"/>
+          <a:chOff x="0" y="0"/>
+          <a:chExt cx="0" cy="0"/>
+        </a:xfrm>
+      </p:grpSpPr>
       <p:sp>
         <p:nvSpPr>
           <p:cNvPr id="2" name="Rectangle 1"/>
@@ -11440,6 +11415,7 @@
           <a:lstStyle/>
           <a:p>
             <a:pPr algn="ctr"/>
+            <a:endParaRPr/>
           </a:p>
         </p:txBody>
       </p:sp>
@@ -11483,6 +11459,7 @@
           <a:lstStyle/>
           <a:p>
             <a:pPr algn="ctr"/>
+            <a:endParaRPr/>
           </a:p>
         </p:txBody>
       </p:sp>
@@ -11526,6 +11503,7 @@
           <a:lstStyle/>
           <a:p>
             <a:pPr algn="ctr"/>
+            <a:endParaRPr/>
           </a:p>
         </p:txBody>
       </p:sp>
@@ -11560,41 +11538,6 @@
                 <a:latin typeface="Calibri"/>
               </a:rPr>
               <a:t>Curso de Inteligencia Artificial  ·  Razonamiento lógico</a:t>
-            </a:r>
-          </a:p>
-        </p:txBody>
-      </p:sp>
-      <p:sp>
-        <p:nvSpPr>
-          <p:cNvPr id="6" name="TextBox 5"/>
-          <p:cNvSpPr txBox="1"/>
-          <p:nvPr/>
-        </p:nvSpPr>
-        <p:spPr>
-          <a:xfrm>
-            <a:off x="10378440" y="6528816"/>
-            <a:ext cx="1371600" cy="292608"/>
-          </a:xfrm>
-          <a:prstGeom prst="rect">
-            <a:avLst/>
-          </a:prstGeom>
-          <a:noFill/>
-        </p:spPr>
-        <p:txBody>
-          <a:bodyPr wrap="square" anchor="ctr">
-            <a:spAutoFit/>
-          </a:bodyPr>
-          <a:lstStyle/>
-          <a:p>
-            <a:pPr algn="r"/>
-            <a:r>
-              <a:rPr sz="1100" b="0">
-                <a:solidFill>
-                  <a:srgbClr val="FFFFFF"/>
-                </a:solidFill>
-                <a:latin typeface="Calibri"/>
-              </a:rPr>
-              <a:t>4 / 17</a:t>
             </a:r>
           </a:p>
         </p:txBody>
@@ -11674,6 +11617,7 @@
           <a:lstStyle/>
           <a:p>
             <a:pPr algn="ctr"/>
+            <a:endParaRPr/>
           </a:p>
         </p:txBody>
       </p:sp>
@@ -11721,6 +11665,7 @@
           <a:lstStyle/>
           <a:p>
             <a:pPr algn="ctr"/>
+            <a:endParaRPr/>
           </a:p>
         </p:txBody>
       </p:sp>
@@ -11906,6 +11851,7 @@
           <a:lstStyle/>
           <a:p>
             <a:pPr algn="ctr"/>
+            <a:endParaRPr/>
           </a:p>
         </p:txBody>
       </p:sp>
@@ -12056,7 +12002,7 @@
 </file>
 
 <file path=ppt/slides/slide5.xml><?xml version="1.0" encoding="utf-8"?>
-<p:sld xmlns:a="http://schemas.openxmlformats.org/drawingml/2006/main" xmlns:p="http://schemas.openxmlformats.org/presentationml/2006/main" xmlns:r="http://schemas.openxmlformats.org/officeDocument/2006/relationships">
+<p:sld xmlns:a="http://schemas.openxmlformats.org/drawingml/2006/main" xmlns:r="http://schemas.openxmlformats.org/officeDocument/2006/relationships" xmlns:p="http://schemas.openxmlformats.org/presentationml/2006/main">
   <p:cSld>
     <p:spTree>
       <p:nvGrpSpPr>
@@ -12064,7 +12010,14 @@
         <p:cNvGrpSpPr/>
         <p:nvPr/>
       </p:nvGrpSpPr>
-      <p:grpSpPr/>
+      <p:grpSpPr>
+        <a:xfrm>
+          <a:off x="0" y="0"/>
+          <a:ext cx="0" cy="0"/>
+          <a:chOff x="0" y="0"/>
+          <a:chExt cx="0" cy="0"/>
+        </a:xfrm>
+      </p:grpSpPr>
       <p:sp>
         <p:nvSpPr>
           <p:cNvPr id="2" name="Rectangle 1"/>
@@ -12105,6 +12058,7 @@
           <a:lstStyle/>
           <a:p>
             <a:pPr algn="ctr"/>
+            <a:endParaRPr/>
           </a:p>
         </p:txBody>
       </p:sp>
@@ -12148,6 +12102,7 @@
           <a:lstStyle/>
           <a:p>
             <a:pPr algn="ctr"/>
+            <a:endParaRPr/>
           </a:p>
         </p:txBody>
       </p:sp>
@@ -12191,6 +12146,7 @@
           <a:lstStyle/>
           <a:p>
             <a:pPr algn="ctr"/>
+            <a:endParaRPr/>
           </a:p>
         </p:txBody>
       </p:sp>
@@ -12225,41 +12181,6 @@
                 <a:latin typeface="Calibri"/>
               </a:rPr>
               <a:t>Curso de Inteligencia Artificial  ·  Razonamiento lógico</a:t>
-            </a:r>
-          </a:p>
-        </p:txBody>
-      </p:sp>
-      <p:sp>
-        <p:nvSpPr>
-          <p:cNvPr id="6" name="TextBox 5"/>
-          <p:cNvSpPr txBox="1"/>
-          <p:nvPr/>
-        </p:nvSpPr>
-        <p:spPr>
-          <a:xfrm>
-            <a:off x="10378440" y="6528816"/>
-            <a:ext cx="1371600" cy="292608"/>
-          </a:xfrm>
-          <a:prstGeom prst="rect">
-            <a:avLst/>
-          </a:prstGeom>
-          <a:noFill/>
-        </p:spPr>
-        <p:txBody>
-          <a:bodyPr wrap="square" anchor="ctr">
-            <a:spAutoFit/>
-          </a:bodyPr>
-          <a:lstStyle/>
-          <a:p>
-            <a:pPr algn="r"/>
-            <a:r>
-              <a:rPr sz="1100" b="0">
-                <a:solidFill>
-                  <a:srgbClr val="FFFFFF"/>
-                </a:solidFill>
-                <a:latin typeface="Calibri"/>
-              </a:rPr>
-              <a:t>5 / 17</a:t>
             </a:r>
           </a:p>
         </p:txBody>
@@ -12339,6 +12260,7 @@
           <a:lstStyle/>
           <a:p>
             <a:pPr algn="ctr"/>
+            <a:endParaRPr/>
           </a:p>
         </p:txBody>
       </p:sp>
@@ -12421,6 +12343,7 @@
           <a:lstStyle/>
           <a:p>
             <a:pPr algn="ctr"/>
+            <a:endParaRPr/>
           </a:p>
         </p:txBody>
       </p:sp>
@@ -12538,6 +12461,7 @@
           <a:lstStyle/>
           <a:p>
             <a:pPr algn="ctr"/>
+            <a:endParaRPr/>
           </a:p>
         </p:txBody>
       </p:sp>
@@ -12655,6 +12579,7 @@
           <a:lstStyle/>
           <a:p>
             <a:pPr algn="ctr"/>
+            <a:endParaRPr/>
           </a:p>
         </p:txBody>
       </p:sp>
@@ -12772,6 +12697,7 @@
           <a:lstStyle/>
           <a:p>
             <a:pPr algn="ctr"/>
+            <a:endParaRPr/>
           </a:p>
         </p:txBody>
       </p:sp>
@@ -12889,6 +12815,7 @@
           <a:lstStyle/>
           <a:p>
             <a:pPr algn="ctr"/>
+            <a:endParaRPr/>
           </a:p>
         </p:txBody>
       </p:sp>
@@ -12971,7 +12898,7 @@
 </file>
 
 <file path=ppt/slides/slide6.xml><?xml version="1.0" encoding="utf-8"?>
-<p:sld xmlns:a="http://schemas.openxmlformats.org/drawingml/2006/main" xmlns:p="http://schemas.openxmlformats.org/presentationml/2006/main" xmlns:r="http://schemas.openxmlformats.org/officeDocument/2006/relationships">
+<p:sld xmlns:a="http://schemas.openxmlformats.org/drawingml/2006/main" xmlns:r="http://schemas.openxmlformats.org/officeDocument/2006/relationships" xmlns:p="http://schemas.openxmlformats.org/presentationml/2006/main">
   <p:cSld>
     <p:spTree>
       <p:nvGrpSpPr>
@@ -12979,7 +12906,14 @@
         <p:cNvGrpSpPr/>
         <p:nvPr/>
       </p:nvGrpSpPr>
-      <p:grpSpPr/>
+      <p:grpSpPr>
+        <a:xfrm>
+          <a:off x="0" y="0"/>
+          <a:ext cx="0" cy="0"/>
+          <a:chOff x="0" y="0"/>
+          <a:chExt cx="0" cy="0"/>
+        </a:xfrm>
+      </p:grpSpPr>
       <p:sp>
         <p:nvSpPr>
           <p:cNvPr id="2" name="Rectangle 1"/>
@@ -13020,6 +12954,7 @@
           <a:lstStyle/>
           <a:p>
             <a:pPr algn="ctr"/>
+            <a:endParaRPr/>
           </a:p>
         </p:txBody>
       </p:sp>
@@ -13063,6 +12998,7 @@
           <a:lstStyle/>
           <a:p>
             <a:pPr algn="ctr"/>
+            <a:endParaRPr/>
           </a:p>
         </p:txBody>
       </p:sp>
@@ -13106,6 +13042,7 @@
           <a:lstStyle/>
           <a:p>
             <a:pPr algn="ctr"/>
+            <a:endParaRPr/>
           </a:p>
         </p:txBody>
       </p:sp>
@@ -13140,41 +13077,6 @@
                 <a:latin typeface="Calibri"/>
               </a:rPr>
               <a:t>Curso de Inteligencia Artificial  ·  Razonamiento lógico</a:t>
-            </a:r>
-          </a:p>
-        </p:txBody>
-      </p:sp>
-      <p:sp>
-        <p:nvSpPr>
-          <p:cNvPr id="6" name="TextBox 5"/>
-          <p:cNvSpPr txBox="1"/>
-          <p:nvPr/>
-        </p:nvSpPr>
-        <p:spPr>
-          <a:xfrm>
-            <a:off x="10378440" y="6528816"/>
-            <a:ext cx="1371600" cy="292608"/>
-          </a:xfrm>
-          <a:prstGeom prst="rect">
-            <a:avLst/>
-          </a:prstGeom>
-          <a:noFill/>
-        </p:spPr>
-        <p:txBody>
-          <a:bodyPr wrap="square" anchor="ctr">
-            <a:spAutoFit/>
-          </a:bodyPr>
-          <a:lstStyle/>
-          <a:p>
-            <a:pPr algn="r"/>
-            <a:r>
-              <a:rPr sz="1100" b="0">
-                <a:solidFill>
-                  <a:srgbClr val="FFFFFF"/>
-                </a:solidFill>
-                <a:latin typeface="Calibri"/>
-              </a:rPr>
-              <a:t>6 / 17</a:t>
             </a:r>
           </a:p>
         </p:txBody>
@@ -13254,6 +13156,7 @@
           <a:lstStyle/>
           <a:p>
             <a:pPr algn="ctr"/>
+            <a:endParaRPr/>
           </a:p>
         </p:txBody>
       </p:sp>
@@ -13336,6 +13239,7 @@
           <a:lstStyle/>
           <a:p>
             <a:pPr algn="ctr"/>
+            <a:endParaRPr/>
           </a:p>
         </p:txBody>
       </p:sp>
@@ -13348,7 +13252,7 @@
         <p:spPr>
           <a:xfrm>
             <a:off x="822960" y="1691640"/>
-            <a:ext cx="10515600" cy="4114800"/>
+            <a:ext cx="10515600" cy="3978012"/>
           </a:xfrm>
           <a:prstGeom prst="rect">
             <a:avLst/>
@@ -13367,7 +13271,7 @@
               </a:spcAft>
             </a:pPr>
             <a:r>
-              <a:rPr sz="1700" b="0">
+              <a:rPr sz="1700" b="0" dirty="0">
                 <a:solidFill>
                   <a:srgbClr val="2C3E50"/>
                 </a:solidFill>
@@ -13383,7 +13287,7 @@
               </a:spcAft>
             </a:pPr>
             <a:r>
-              <a:rPr sz="1700" b="0">
+              <a:rPr sz="1700" b="0" dirty="0">
                 <a:solidFill>
                   <a:srgbClr val="2C3E50"/>
                 </a:solidFill>
@@ -13399,7 +13303,7 @@
               </a:spcAft>
             </a:pPr>
             <a:r>
-              <a:rPr sz="1700" b="0">
+              <a:rPr sz="1700" b="0" dirty="0">
                 <a:solidFill>
                   <a:srgbClr val="2C3E50"/>
                 </a:solidFill>
@@ -13415,14 +13319,19 @@
               </a:spcAft>
             </a:pPr>
             <a:r>
-              <a:rPr sz="1700" b="0">
-                <a:solidFill>
-                  <a:srgbClr val="2C3E50"/>
-                </a:solidFill>
-                <a:latin typeface="Calibri"/>
-              </a:rPr>
-              <a:t>American(West)     Missile(M1)     Owns(Nono, M1)</a:t>
-            </a:r>
+              <a:rPr lang="es-MX" sz="1700" dirty="0">
+                <a:solidFill>
+                  <a:srgbClr val="2C3E50"/>
+                </a:solidFill>
+              </a:rPr>
+              <a:t>∀x  Missile(x) ∧ Owns(Nono, x)  →  Sells(West, x, Nono)</a:t>
+            </a:r>
+            <a:endParaRPr lang="es-419" sz="1700" b="0" dirty="0">
+              <a:solidFill>
+                <a:srgbClr val="2C3E50"/>
+              </a:solidFill>
+              <a:latin typeface="Calibri"/>
+            </a:endParaRPr>
           </a:p>
           <a:p>
             <a:pPr>
@@ -13431,14 +13340,20 @@
               </a:spcAft>
             </a:pPr>
             <a:r>
-              <a:rPr sz="1700" b="0">
-                <a:solidFill>
-                  <a:srgbClr val="2C3E50"/>
-                </a:solidFill>
-                <a:latin typeface="Calibri"/>
-              </a:rPr>
-              <a:t>∀x  Missile(x) ∧ Owns(Nono, x)  →  Sells(West, x, Nono)</a:t>
-            </a:r>
+              <a:rPr sz="1700" b="0" dirty="0">
+                <a:solidFill>
+                  <a:srgbClr val="2C3E50"/>
+                </a:solidFill>
+                <a:latin typeface="Calibri"/>
+              </a:rPr>
+              <a:t>American(West)</a:t>
+            </a:r>
+            <a:endParaRPr lang="es-419" sz="1700" b="0" dirty="0">
+              <a:solidFill>
+                <a:srgbClr val="2C3E50"/>
+              </a:solidFill>
+              <a:latin typeface="Calibri"/>
+            </a:endParaRPr>
           </a:p>
           <a:p>
             <a:pPr>
@@ -13447,14 +13362,20 @@
               </a:spcAft>
             </a:pPr>
             <a:r>
-              <a:rPr sz="1700" b="0">
-                <a:solidFill>
-                  <a:srgbClr val="2C3E50"/>
-                </a:solidFill>
-                <a:latin typeface="Calibri"/>
-              </a:rPr>
-              <a:t>Enemy(Nono, America)</a:t>
-            </a:r>
+              <a:rPr sz="1700" b="0" dirty="0">
+                <a:solidFill>
+                  <a:srgbClr val="2C3E50"/>
+                </a:solidFill>
+                <a:latin typeface="Calibri"/>
+              </a:rPr>
+              <a:t>Missile(M1)</a:t>
+            </a:r>
+            <a:endParaRPr lang="es-419" sz="1700" b="0" dirty="0">
+              <a:solidFill>
+                <a:srgbClr val="2C3E50"/>
+              </a:solidFill>
+              <a:latin typeface="Calibri"/>
+            </a:endParaRPr>
           </a:p>
           <a:p>
             <a:pPr>
@@ -13463,13 +13384,73 @@
               </a:spcAft>
             </a:pPr>
             <a:r>
-              <a:rPr sz="1700" b="0">
-                <a:solidFill>
-                  <a:srgbClr val="2C3E50"/>
-                </a:solidFill>
-                <a:latin typeface="Calibri"/>
-              </a:rPr>
-              <a:t>Pregunta:  Criminal(West)  ?</a:t>
+              <a:rPr sz="1700" b="0" dirty="0">
+                <a:solidFill>
+                  <a:srgbClr val="2C3E50"/>
+                </a:solidFill>
+                <a:latin typeface="Calibri"/>
+              </a:rPr>
+              <a:t>Owns(Nono, M1)</a:t>
+            </a:r>
+          </a:p>
+          <a:p>
+            <a:pPr>
+              <a:spcAft>
+                <a:spcPts val="1100"/>
+              </a:spcAft>
+            </a:pPr>
+            <a:r>
+              <a:rPr sz="1700" b="0" dirty="0">
+                <a:solidFill>
+                  <a:srgbClr val="2C3E50"/>
+                </a:solidFill>
+                <a:latin typeface="Calibri"/>
+              </a:rPr>
+              <a:t>Enemy(Nono, America)</a:t>
+            </a:r>
+            <a:endParaRPr lang="es-419" sz="1700" b="0" dirty="0">
+              <a:solidFill>
+                <a:srgbClr val="2C3E50"/>
+              </a:solidFill>
+              <a:latin typeface="Calibri"/>
+            </a:endParaRPr>
+          </a:p>
+          <a:p>
+            <a:pPr>
+              <a:spcAft>
+                <a:spcPts val="1100"/>
+              </a:spcAft>
+            </a:pPr>
+            <a:endParaRPr sz="1700" b="0" dirty="0">
+              <a:solidFill>
+                <a:srgbClr val="2C3E50"/>
+              </a:solidFill>
+              <a:latin typeface="Calibri"/>
+            </a:endParaRPr>
+          </a:p>
+          <a:p>
+            <a:pPr>
+              <a:spcAft>
+                <a:spcPts val="1100"/>
+              </a:spcAft>
+            </a:pPr>
+            <a:r>
+              <a:rPr sz="1700" b="0" dirty="0" err="1">
+                <a:solidFill>
+                  <a:srgbClr val="2C3E50"/>
+                </a:solidFill>
+                <a:latin typeface="Calibri"/>
+              </a:rPr>
+              <a:t>Pregunta</a:t>
+            </a:r>
+            <a:r>
+              <a:rPr sz="1700" b="0" dirty="0">
+                <a:solidFill>
+                  <a:srgbClr val="2C3E50"/>
+                </a:solidFill>
+                <a:latin typeface="Calibri"/>
+              </a:rPr>
+              <a:t>:  Criminal(West)  ?</a:t>
             </a:r>
           </a:p>
         </p:txBody>
@@ -13483,7 +13464,7 @@
 </file>
 
 <file path=ppt/slides/slide7.xml><?xml version="1.0" encoding="utf-8"?>
-<p:sld xmlns:a="http://schemas.openxmlformats.org/drawingml/2006/main" xmlns:p="http://schemas.openxmlformats.org/presentationml/2006/main" xmlns:r="http://schemas.openxmlformats.org/officeDocument/2006/relationships">
+<p:sld xmlns:a="http://schemas.openxmlformats.org/drawingml/2006/main" xmlns:r="http://schemas.openxmlformats.org/officeDocument/2006/relationships" xmlns:p="http://schemas.openxmlformats.org/presentationml/2006/main">
   <p:cSld>
     <p:spTree>
       <p:nvGrpSpPr>
@@ -13491,7 +13472,14 @@
         <p:cNvGrpSpPr/>
         <p:nvPr/>
       </p:nvGrpSpPr>
-      <p:grpSpPr/>
+      <p:grpSpPr>
+        <a:xfrm>
+          <a:off x="0" y="0"/>
+          <a:ext cx="0" cy="0"/>
+          <a:chOff x="0" y="0"/>
+          <a:chExt cx="0" cy="0"/>
+        </a:xfrm>
+      </p:grpSpPr>
       <p:sp>
         <p:nvSpPr>
           <p:cNvPr id="2" name="Rectangle 1"/>
@@ -13532,6 +13520,7 @@
           <a:lstStyle/>
           <a:p>
             <a:pPr algn="ctr"/>
+            <a:endParaRPr/>
           </a:p>
         </p:txBody>
       </p:sp>
@@ -13575,6 +13564,7 @@
           <a:lstStyle/>
           <a:p>
             <a:pPr algn="ctr"/>
+            <a:endParaRPr/>
           </a:p>
         </p:txBody>
       </p:sp>
@@ -13618,6 +13608,7 @@
           <a:lstStyle/>
           <a:p>
             <a:pPr algn="ctr"/>
+            <a:endParaRPr/>
           </a:p>
         </p:txBody>
       </p:sp>
@@ -13652,41 +13643,6 @@
                 <a:latin typeface="Calibri"/>
               </a:rPr>
               <a:t>Curso de Inteligencia Artificial  ·  Razonamiento lógico</a:t>
-            </a:r>
-          </a:p>
-        </p:txBody>
-      </p:sp>
-      <p:sp>
-        <p:nvSpPr>
-          <p:cNvPr id="6" name="TextBox 5"/>
-          <p:cNvSpPr txBox="1"/>
-          <p:nvPr/>
-        </p:nvSpPr>
-        <p:spPr>
-          <a:xfrm>
-            <a:off x="10378440" y="6528816"/>
-            <a:ext cx="1371600" cy="292608"/>
-          </a:xfrm>
-          <a:prstGeom prst="rect">
-            <a:avLst/>
-          </a:prstGeom>
-          <a:noFill/>
-        </p:spPr>
-        <p:txBody>
-          <a:bodyPr wrap="square" anchor="ctr">
-            <a:spAutoFit/>
-          </a:bodyPr>
-          <a:lstStyle/>
-          <a:p>
-            <a:pPr algn="r"/>
-            <a:r>
-              <a:rPr sz="1100" b="0">
-                <a:solidFill>
-                  <a:srgbClr val="FFFFFF"/>
-                </a:solidFill>
-                <a:latin typeface="Calibri"/>
-              </a:rPr>
-              <a:t>7 / 17</a:t>
             </a:r>
           </a:p>
         </p:txBody>
@@ -13766,6 +13722,7 @@
           <a:lstStyle/>
           <a:p>
             <a:pPr algn="ctr"/>
+            <a:endParaRPr/>
           </a:p>
         </p:txBody>
       </p:sp>
@@ -13848,6 +13805,7 @@
           <a:lstStyle/>
           <a:p>
             <a:pPr algn="ctr"/>
+            <a:endParaRPr/>
           </a:p>
         </p:txBody>
       </p:sp>
@@ -13895,7 +13853,7 @@
         <p:spPr>
           <a:xfrm>
             <a:off x="777240" y="2194560"/>
-            <a:ext cx="4846320" cy="3566160"/>
+            <a:ext cx="4846320" cy="984885"/>
           </a:xfrm>
           <a:prstGeom prst="rect">
             <a:avLst/>
@@ -13914,13 +13872,85 @@
               </a:spcAft>
             </a:pPr>
             <a:r>
-              <a:rPr sz="1600" b="0">
-                <a:solidFill>
-                  <a:srgbClr val="2C3E50"/>
-                </a:solidFill>
-                <a:latin typeface="Calibri"/>
-              </a:rPr>
-              <a:t>•  UNIFY(p, q) = θ  si pθ = qθ.</a:t>
+              <a:rPr sz="1600" b="0" dirty="0">
+                <a:solidFill>
+                  <a:srgbClr val="2C3E50"/>
+                </a:solidFill>
+                <a:latin typeface="Calibri"/>
+              </a:rPr>
+              <a:t>•  UNIFY(p, q) = </a:t>
+            </a:r>
+            <a:r>
+              <a:rPr sz="1600" b="0" dirty="0" err="1">
+                <a:solidFill>
+                  <a:srgbClr val="2C3E50"/>
+                </a:solidFill>
+                <a:latin typeface="Calibri"/>
+              </a:rPr>
+              <a:t>θ</a:t>
+            </a:r>
+            <a:r>
+              <a:rPr sz="1600" b="0" dirty="0">
+                <a:solidFill>
+                  <a:srgbClr val="2C3E50"/>
+                </a:solidFill>
+                <a:latin typeface="Calibri"/>
+              </a:rPr>
+              <a:t>  </a:t>
+            </a:r>
+            <a:r>
+              <a:rPr sz="1600" b="0" dirty="0" err="1">
+                <a:solidFill>
+                  <a:srgbClr val="2C3E50"/>
+                </a:solidFill>
+                <a:latin typeface="Calibri"/>
+              </a:rPr>
+              <a:t>si</a:t>
+            </a:r>
+            <a:r>
+              <a:rPr sz="1600" b="0" dirty="0">
+                <a:solidFill>
+                  <a:srgbClr val="2C3E50"/>
+                </a:solidFill>
+                <a:latin typeface="Calibri"/>
+              </a:rPr>
+              <a:t> </a:t>
+            </a:r>
+            <a:r>
+              <a:rPr sz="1600" b="0" dirty="0" err="1">
+                <a:solidFill>
+                  <a:srgbClr val="2C3E50"/>
+                </a:solidFill>
+                <a:latin typeface="Calibri"/>
+              </a:rPr>
+              <a:t>pθ</a:t>
+            </a:r>
+            <a:r>
+              <a:rPr sz="1600" b="0" dirty="0">
+                <a:solidFill>
+                  <a:srgbClr val="2C3E50"/>
+                </a:solidFill>
+                <a:latin typeface="Calibri"/>
+              </a:rPr>
+              <a:t> = </a:t>
+            </a:r>
+            <a:r>
+              <a:rPr sz="1600" b="0" dirty="0" err="1">
+                <a:solidFill>
+                  <a:srgbClr val="2C3E50"/>
+                </a:solidFill>
+                <a:latin typeface="Calibri"/>
+              </a:rPr>
+              <a:t>qθ</a:t>
+            </a:r>
+            <a:r>
+              <a:rPr sz="1600" b="0" dirty="0">
+                <a:solidFill>
+                  <a:srgbClr val="2C3E50"/>
+                </a:solidFill>
+                <a:latin typeface="Calibri"/>
+              </a:rPr>
+              <a:t>.</a:t>
             </a:r>
           </a:p>
           <a:p>
@@ -13930,45 +13960,56 @@
               </a:spcAft>
             </a:pPr>
             <a:r>
-              <a:rPr sz="1600" b="0">
-                <a:solidFill>
-                  <a:srgbClr val="2C3E50"/>
-                </a:solidFill>
-                <a:latin typeface="Calibri"/>
-              </a:rPr>
-              <a:t>•  Knows(John, x) y Knows(John, Jane) se unifican con {x / Jane}.</a:t>
-            </a:r>
-          </a:p>
-          <a:p>
-            <a:pPr>
-              <a:spcAft>
-                <a:spcPts val="1200"/>
-              </a:spcAft>
-            </a:pPr>
-            <a:r>
-              <a:rPr sz="1600" b="0">
-                <a:solidFill>
-                  <a:srgbClr val="2C3E50"/>
-                </a:solidFill>
-                <a:latin typeface="Calibri"/>
-              </a:rPr>
-              <a:t>•  El MGU (unificador más general) evita comprometer variables de más.</a:t>
-            </a:r>
-          </a:p>
-          <a:p>
-            <a:pPr>
-              <a:spcAft>
-                <a:spcPts val="1200"/>
-              </a:spcAft>
-            </a:pPr>
-            <a:r>
-              <a:rPr sz="1600" b="0">
-                <a:solidFill>
-                  <a:srgbClr val="2C3E50"/>
-                </a:solidFill>
-                <a:latin typeface="Calibri"/>
-              </a:rPr>
-              <a:t>•  Occur check: no unificar x con FatherOf(x).</a:t>
+              <a:rPr sz="1600" b="0" dirty="0">
+                <a:solidFill>
+                  <a:srgbClr val="2C3E50"/>
+                </a:solidFill>
+                <a:latin typeface="Calibri"/>
+              </a:rPr>
+              <a:t>•  Knows(John, x) y Knows(John, Jane) se </a:t>
+            </a:r>
+            <a:r>
+              <a:rPr sz="1600" b="0" dirty="0" err="1">
+                <a:solidFill>
+                  <a:srgbClr val="2C3E50"/>
+                </a:solidFill>
+                <a:latin typeface="Calibri"/>
+              </a:rPr>
+              <a:t>unifican</a:t>
+            </a:r>
+            <a:r>
+              <a:rPr sz="1600" b="0" dirty="0">
+                <a:solidFill>
+                  <a:srgbClr val="2C3E50"/>
+                </a:solidFill>
+                <a:latin typeface="Calibri"/>
+              </a:rPr>
+              <a:t> con </a:t>
+            </a:r>
+            <a:r>
+              <a:rPr lang="el-GR" sz="1600" dirty="0">
+                <a:solidFill>
+                  <a:srgbClr val="2C3E50"/>
+                </a:solidFill>
+              </a:rPr>
+              <a:t>θ </a:t>
+            </a:r>
+            <a:r>
+              <a:rPr lang="es-419" sz="1600" dirty="0">
+                <a:solidFill>
+                  <a:srgbClr val="2C3E50"/>
+                </a:solidFill>
+              </a:rPr>
+              <a:t>=</a:t>
+            </a:r>
+            <a:r>
+              <a:rPr sz="1600" b="0" dirty="0">
+                <a:solidFill>
+                  <a:srgbClr val="2C3E50"/>
+                </a:solidFill>
+                <a:latin typeface="Calibri"/>
+              </a:rPr>
+              <a:t>{x / Jane}.</a:t>
             </a:r>
           </a:p>
         </p:txBody>
@@ -14017,6 +14058,7 @@
           <a:lstStyle/>
           <a:p>
             <a:pPr algn="ctr"/>
+            <a:endParaRPr/>
           </a:p>
         </p:txBody>
       </p:sp>
@@ -14064,7 +14106,7 @@
         <p:spPr>
           <a:xfrm>
             <a:off x="6629400" y="2194560"/>
-            <a:ext cx="4846320" cy="3566160"/>
+            <a:ext cx="4846320" cy="2431435"/>
           </a:xfrm>
           <a:prstGeom prst="rect">
             <a:avLst/>
@@ -14083,14 +14125,110 @@
               </a:spcAft>
             </a:pPr>
             <a:r>
-              <a:rPr sz="1600" b="0">
-                <a:solidFill>
-                  <a:srgbClr val="2C3E50"/>
-                </a:solidFill>
-                <a:latin typeface="Calibri"/>
-              </a:rPr>
-              <a:t>•  Modus ponens generalizado: de p1…pn y (p1 ∧ … ∧ pn → q) inferir qθ.</a:t>
-            </a:r>
+              <a:rPr sz="1600" b="0" dirty="0">
+                <a:solidFill>
+                  <a:srgbClr val="2C3E50"/>
+                </a:solidFill>
+                <a:latin typeface="Calibri"/>
+              </a:rPr>
+              <a:t>•  Modus ponens </a:t>
+            </a:r>
+            <a:r>
+              <a:rPr sz="1600" b="0" dirty="0" err="1">
+                <a:solidFill>
+                  <a:srgbClr val="2C3E50"/>
+                </a:solidFill>
+                <a:latin typeface="Calibri"/>
+              </a:rPr>
+              <a:t>generalizado</a:t>
+            </a:r>
+            <a:r>
+              <a:rPr sz="1600" b="0" dirty="0">
+                <a:solidFill>
+                  <a:srgbClr val="2C3E50"/>
+                </a:solidFill>
+                <a:latin typeface="Calibri"/>
+              </a:rPr>
+              <a:t>: de p1…</a:t>
+            </a:r>
+            <a:r>
+              <a:rPr sz="1600" b="0" dirty="0" err="1">
+                <a:solidFill>
+                  <a:srgbClr val="2C3E50"/>
+                </a:solidFill>
+                <a:latin typeface="Calibri"/>
+              </a:rPr>
+              <a:t>pn</a:t>
+            </a:r>
+            <a:r>
+              <a:rPr sz="1600" b="0" dirty="0">
+                <a:solidFill>
+                  <a:srgbClr val="2C3E50"/>
+                </a:solidFill>
+                <a:latin typeface="Calibri"/>
+              </a:rPr>
+              <a:t> y (p1 ∧ … ∧ </a:t>
+            </a:r>
+            <a:r>
+              <a:rPr sz="1600" b="0" dirty="0" err="1">
+                <a:solidFill>
+                  <a:srgbClr val="2C3E50"/>
+                </a:solidFill>
+                <a:latin typeface="Calibri"/>
+              </a:rPr>
+              <a:t>pn</a:t>
+            </a:r>
+            <a:r>
+              <a:rPr sz="1600" b="0" dirty="0">
+                <a:solidFill>
+                  <a:srgbClr val="2C3E50"/>
+                </a:solidFill>
+                <a:latin typeface="Calibri"/>
+              </a:rPr>
+              <a:t> → q) </a:t>
+            </a:r>
+            <a:r>
+              <a:rPr sz="1600" b="0" dirty="0" err="1">
+                <a:solidFill>
+                  <a:srgbClr val="2C3E50"/>
+                </a:solidFill>
+                <a:latin typeface="Calibri"/>
+              </a:rPr>
+              <a:t>inferir</a:t>
+            </a:r>
+            <a:r>
+              <a:rPr sz="1600" b="0" dirty="0">
+                <a:solidFill>
+                  <a:srgbClr val="2C3E50"/>
+                </a:solidFill>
+                <a:latin typeface="Calibri"/>
+              </a:rPr>
+              <a:t> </a:t>
+            </a:r>
+            <a:r>
+              <a:rPr sz="1600" b="0" dirty="0" err="1">
+                <a:solidFill>
+                  <a:srgbClr val="2C3E50"/>
+                </a:solidFill>
+                <a:latin typeface="Calibri"/>
+              </a:rPr>
+              <a:t>qθ</a:t>
+            </a:r>
+            <a:r>
+              <a:rPr sz="1600" b="0" dirty="0">
+                <a:solidFill>
+                  <a:srgbClr val="2C3E50"/>
+                </a:solidFill>
+                <a:latin typeface="Calibri"/>
+              </a:rPr>
+              <a:t>.</a:t>
+            </a:r>
+            <a:endParaRPr lang="es-419" sz="1600" b="0" dirty="0">
+              <a:solidFill>
+                <a:srgbClr val="2C3E50"/>
+              </a:solidFill>
+              <a:latin typeface="Calibri"/>
+            </a:endParaRPr>
           </a:p>
           <a:p>
             <a:pPr>
@@ -14098,15 +14236,12 @@
                 <a:spcPts val="1200"/>
               </a:spcAft>
             </a:pPr>
-            <a:r>
-              <a:rPr sz="1600" b="0">
-                <a:solidFill>
-                  <a:srgbClr val="2C3E50"/>
-                </a:solidFill>
-                <a:latin typeface="Calibri"/>
-              </a:rPr>
-              <a:t>•  Resolución FOL: complementar literales que unifican.</a:t>
-            </a:r>
+            <a:endParaRPr sz="1600" b="0" dirty="0">
+              <a:solidFill>
+                <a:srgbClr val="2C3E50"/>
+              </a:solidFill>
+              <a:latin typeface="Calibri"/>
+            </a:endParaRPr>
           </a:p>
           <a:p>
             <a:pPr>
@@ -14115,13 +14250,228 @@
               </a:spcAft>
             </a:pPr>
             <a:r>
-              <a:rPr sz="1600" b="0">
-                <a:solidFill>
-                  <a:srgbClr val="2C3E50"/>
-                </a:solidFill>
-                <a:latin typeface="Calibri"/>
-              </a:rPr>
-              <a:t>•  Forward y backward chaining instancian reglas al unificar con hechos o metas.</a:t>
+              <a:rPr sz="1600" b="0" dirty="0">
+                <a:solidFill>
+                  <a:srgbClr val="2C3E50"/>
+                </a:solidFill>
+                <a:latin typeface="Calibri"/>
+              </a:rPr>
+              <a:t>•  </a:t>
+            </a:r>
+            <a:r>
+              <a:rPr sz="1600" b="0" dirty="0" err="1">
+                <a:solidFill>
+                  <a:srgbClr val="2C3E50"/>
+                </a:solidFill>
+                <a:latin typeface="Calibri"/>
+              </a:rPr>
+              <a:t>Resolución</a:t>
+            </a:r>
+            <a:r>
+              <a:rPr sz="1600" b="0" dirty="0">
+                <a:solidFill>
+                  <a:srgbClr val="2C3E50"/>
+                </a:solidFill>
+                <a:latin typeface="Calibri"/>
+              </a:rPr>
+              <a:t> FOL: </a:t>
+            </a:r>
+            <a:r>
+              <a:rPr sz="1600" b="0" dirty="0" err="1">
+                <a:solidFill>
+                  <a:srgbClr val="2C3E50"/>
+                </a:solidFill>
+                <a:latin typeface="Calibri"/>
+              </a:rPr>
+              <a:t>complementar</a:t>
+            </a:r>
+            <a:r>
+              <a:rPr sz="1600" b="0" dirty="0">
+                <a:solidFill>
+                  <a:srgbClr val="2C3E50"/>
+                </a:solidFill>
+                <a:latin typeface="Calibri"/>
+              </a:rPr>
+              <a:t> </a:t>
+            </a:r>
+            <a:r>
+              <a:rPr sz="1600" b="0" dirty="0" err="1">
+                <a:solidFill>
+                  <a:srgbClr val="2C3E50"/>
+                </a:solidFill>
+                <a:latin typeface="Calibri"/>
+              </a:rPr>
+              <a:t>literales</a:t>
+            </a:r>
+            <a:r>
+              <a:rPr sz="1600" b="0" dirty="0">
+                <a:solidFill>
+                  <a:srgbClr val="2C3E50"/>
+                </a:solidFill>
+                <a:latin typeface="Calibri"/>
+              </a:rPr>
+              <a:t> </a:t>
+            </a:r>
+            <a:r>
+              <a:rPr sz="1600" b="0" dirty="0" err="1">
+                <a:solidFill>
+                  <a:srgbClr val="2C3E50"/>
+                </a:solidFill>
+                <a:latin typeface="Calibri"/>
+              </a:rPr>
+              <a:t>que</a:t>
+            </a:r>
+            <a:r>
+              <a:rPr sz="1600" b="0" dirty="0">
+                <a:solidFill>
+                  <a:srgbClr val="2C3E50"/>
+                </a:solidFill>
+                <a:latin typeface="Calibri"/>
+              </a:rPr>
+              <a:t> </a:t>
+            </a:r>
+            <a:r>
+              <a:rPr sz="1600" b="0" dirty="0" err="1">
+                <a:solidFill>
+                  <a:srgbClr val="2C3E50"/>
+                </a:solidFill>
+                <a:latin typeface="Calibri"/>
+              </a:rPr>
+              <a:t>unifican</a:t>
+            </a:r>
+            <a:r>
+              <a:rPr sz="1600" b="0" dirty="0">
+                <a:solidFill>
+                  <a:srgbClr val="2C3E50"/>
+                </a:solidFill>
+                <a:latin typeface="Calibri"/>
+              </a:rPr>
+              <a:t>.</a:t>
+            </a:r>
+            <a:endParaRPr lang="es-419" sz="1600" b="0" dirty="0">
+              <a:solidFill>
+                <a:srgbClr val="2C3E50"/>
+              </a:solidFill>
+              <a:latin typeface="Calibri"/>
+            </a:endParaRPr>
+          </a:p>
+          <a:p>
+            <a:pPr>
+              <a:spcAft>
+                <a:spcPts val="1200"/>
+              </a:spcAft>
+            </a:pPr>
+            <a:endParaRPr sz="1600" b="0" dirty="0">
+              <a:solidFill>
+                <a:srgbClr val="2C3E50"/>
+              </a:solidFill>
+              <a:latin typeface="Calibri"/>
+            </a:endParaRPr>
+          </a:p>
+          <a:p>
+            <a:pPr>
+              <a:spcAft>
+                <a:spcPts val="1200"/>
+              </a:spcAft>
+            </a:pPr>
+            <a:r>
+              <a:rPr sz="1600" b="0" dirty="0">
+                <a:solidFill>
+                  <a:srgbClr val="2C3E50"/>
+                </a:solidFill>
+                <a:latin typeface="Calibri"/>
+              </a:rPr>
+              <a:t>•  Forward y backward chaining </a:t>
+            </a:r>
+            <a:r>
+              <a:rPr sz="1600" b="0" dirty="0" err="1">
+                <a:solidFill>
+                  <a:srgbClr val="2C3E50"/>
+                </a:solidFill>
+                <a:latin typeface="Calibri"/>
+              </a:rPr>
+              <a:t>instancian</a:t>
+            </a:r>
+            <a:r>
+              <a:rPr sz="1600" b="0" dirty="0">
+                <a:solidFill>
+                  <a:srgbClr val="2C3E50"/>
+                </a:solidFill>
+                <a:latin typeface="Calibri"/>
+              </a:rPr>
+              <a:t> </a:t>
+            </a:r>
+            <a:r>
+              <a:rPr sz="1600" b="0" dirty="0" err="1">
+                <a:solidFill>
+                  <a:srgbClr val="2C3E50"/>
+                </a:solidFill>
+                <a:latin typeface="Calibri"/>
+              </a:rPr>
+              <a:t>reglas</a:t>
+            </a:r>
+            <a:r>
+              <a:rPr sz="1600" b="0" dirty="0">
+                <a:solidFill>
+                  <a:srgbClr val="2C3E50"/>
+                </a:solidFill>
+                <a:latin typeface="Calibri"/>
+              </a:rPr>
+              <a:t> al </a:t>
+            </a:r>
+            <a:r>
+              <a:rPr sz="1600" b="0" dirty="0" err="1">
+                <a:solidFill>
+                  <a:srgbClr val="2C3E50"/>
+                </a:solidFill>
+                <a:latin typeface="Calibri"/>
+              </a:rPr>
+              <a:t>unificar</a:t>
+            </a:r>
+            <a:r>
+              <a:rPr sz="1600" b="0" dirty="0">
+                <a:solidFill>
+                  <a:srgbClr val="2C3E50"/>
+                </a:solidFill>
+                <a:latin typeface="Calibri"/>
+              </a:rPr>
+              <a:t> con </a:t>
+            </a:r>
+            <a:r>
+              <a:rPr sz="1600" b="0" dirty="0" err="1">
+                <a:solidFill>
+                  <a:srgbClr val="2C3E50"/>
+                </a:solidFill>
+                <a:latin typeface="Calibri"/>
+              </a:rPr>
+              <a:t>hechos</a:t>
+            </a:r>
+            <a:r>
+              <a:rPr sz="1600" b="0" dirty="0">
+                <a:solidFill>
+                  <a:srgbClr val="2C3E50"/>
+                </a:solidFill>
+                <a:latin typeface="Calibri"/>
+              </a:rPr>
+              <a:t> o </a:t>
+            </a:r>
+            <a:r>
+              <a:rPr sz="1600" b="0" dirty="0" err="1">
+                <a:solidFill>
+                  <a:srgbClr val="2C3E50"/>
+                </a:solidFill>
+                <a:latin typeface="Calibri"/>
+              </a:rPr>
+              <a:t>metas</a:t>
+            </a:r>
+            <a:r>
+              <a:rPr sz="1600" b="0" dirty="0">
+                <a:solidFill>
+                  <a:srgbClr val="2C3E50"/>
+                </a:solidFill>
+                <a:latin typeface="Calibri"/>
+              </a:rPr>
+              <a:t>.</a:t>
             </a:r>
           </a:p>
         </p:txBody>
@@ -14135,7 +14485,7 @@
 </file>
 
 <file path=ppt/slides/slide8.xml><?xml version="1.0" encoding="utf-8"?>
-<p:sld xmlns:a="http://schemas.openxmlformats.org/drawingml/2006/main" xmlns:p="http://schemas.openxmlformats.org/presentationml/2006/main" xmlns:r="http://schemas.openxmlformats.org/officeDocument/2006/relationships">
+<p:sld xmlns:a="http://schemas.openxmlformats.org/drawingml/2006/main" xmlns:r="http://schemas.openxmlformats.org/officeDocument/2006/relationships" xmlns:p="http://schemas.openxmlformats.org/presentationml/2006/main">
   <p:cSld>
     <p:spTree>
       <p:nvGrpSpPr>
@@ -14143,7 +14493,14 @@
         <p:cNvGrpSpPr/>
         <p:nvPr/>
       </p:nvGrpSpPr>
-      <p:grpSpPr/>
+      <p:grpSpPr>
+        <a:xfrm>
+          <a:off x="0" y="0"/>
+          <a:ext cx="0" cy="0"/>
+          <a:chOff x="0" y="0"/>
+          <a:chExt cx="0" cy="0"/>
+        </a:xfrm>
+      </p:grpSpPr>
       <p:sp>
         <p:nvSpPr>
           <p:cNvPr id="2" name="Rectangle 1"/>
@@ -14184,6 +14541,7 @@
           <a:lstStyle/>
           <a:p>
             <a:pPr algn="ctr"/>
+            <a:endParaRPr/>
           </a:p>
         </p:txBody>
       </p:sp>
@@ -14227,6 +14585,7 @@
           <a:lstStyle/>
           <a:p>
             <a:pPr algn="ctr"/>
+            <a:endParaRPr/>
           </a:p>
         </p:txBody>
       </p:sp>
@@ -14270,6 +14629,7 @@
           <a:lstStyle/>
           <a:p>
             <a:pPr algn="ctr"/>
+            <a:endParaRPr/>
           </a:p>
         </p:txBody>
       </p:sp>
@@ -14304,41 +14664,6 @@
                 <a:latin typeface="Calibri"/>
               </a:rPr>
               <a:t>Curso de Inteligencia Artificial  ·  Razonamiento lógico</a:t>
-            </a:r>
-          </a:p>
-        </p:txBody>
-      </p:sp>
-      <p:sp>
-        <p:nvSpPr>
-          <p:cNvPr id="6" name="TextBox 5"/>
-          <p:cNvSpPr txBox="1"/>
-          <p:nvPr/>
-        </p:nvSpPr>
-        <p:spPr>
-          <a:xfrm>
-            <a:off x="10378440" y="6528816"/>
-            <a:ext cx="1371600" cy="292608"/>
-          </a:xfrm>
-          <a:prstGeom prst="rect">
-            <a:avLst/>
-          </a:prstGeom>
-          <a:noFill/>
-        </p:spPr>
-        <p:txBody>
-          <a:bodyPr wrap="square" anchor="ctr">
-            <a:spAutoFit/>
-          </a:bodyPr>
-          <a:lstStyle/>
-          <a:p>
-            <a:pPr algn="r"/>
-            <a:r>
-              <a:rPr sz="1100" b="0">
-                <a:solidFill>
-                  <a:srgbClr val="FFFFFF"/>
-                </a:solidFill>
-                <a:latin typeface="Calibri"/>
-              </a:rPr>
-              <a:t>8 / 17</a:t>
             </a:r>
           </a:p>
         </p:txBody>
@@ -14418,6 +14743,7 @@
           <a:lstStyle/>
           <a:p>
             <a:pPr algn="ctr"/>
+            <a:endParaRPr/>
           </a:p>
         </p:txBody>
       </p:sp>
@@ -14500,6 +14826,7 @@
           <a:lstStyle/>
           <a:p>
             <a:pPr algn="ctr"/>
+            <a:endParaRPr/>
           </a:p>
         </p:txBody>
       </p:sp>
@@ -14512,7 +14839,7 @@
         <p:spPr>
           <a:xfrm>
             <a:off x="822960" y="1691640"/>
-            <a:ext cx="10515600" cy="4160520"/>
+            <a:ext cx="10515600" cy="3570208"/>
           </a:xfrm>
           <a:prstGeom prst="rect">
             <a:avLst/>
@@ -14531,13 +14858,121 @@
               </a:spcAft>
             </a:pPr>
             <a:r>
-              <a:rPr sz="1700" b="0">
-                <a:solidFill>
-                  <a:srgbClr val="2C3E50"/>
-                </a:solidFill>
-                <a:latin typeface="Calibri"/>
-              </a:rPr>
-              <a:t>•  Poner KB y ¬α en forma normal conjuntiva (CNF): conjunción de cláusulas (disyunciones de literales).</a:t>
+              <a:rPr sz="2800" b="0" dirty="0">
+                <a:solidFill>
+                  <a:srgbClr val="2C3E50"/>
+                </a:solidFill>
+                <a:latin typeface="Calibri"/>
+              </a:rPr>
+              <a:t>•  Poner KB y ¬α </a:t>
+            </a:r>
+            <a:r>
+              <a:rPr sz="2800" b="0" dirty="0" err="1">
+                <a:solidFill>
+                  <a:srgbClr val="2C3E50"/>
+                </a:solidFill>
+                <a:latin typeface="Calibri"/>
+              </a:rPr>
+              <a:t>en</a:t>
+            </a:r>
+            <a:r>
+              <a:rPr sz="2800" b="0" dirty="0">
+                <a:solidFill>
+                  <a:srgbClr val="2C3E50"/>
+                </a:solidFill>
+                <a:latin typeface="Calibri"/>
+              </a:rPr>
+              <a:t> forma normal </a:t>
+            </a:r>
+            <a:r>
+              <a:rPr sz="2800" b="0" dirty="0" err="1">
+                <a:solidFill>
+                  <a:srgbClr val="2C3E50"/>
+                </a:solidFill>
+                <a:latin typeface="Calibri"/>
+              </a:rPr>
+              <a:t>conjuntiva</a:t>
+            </a:r>
+            <a:r>
+              <a:rPr sz="2800" b="0" dirty="0">
+                <a:solidFill>
+                  <a:srgbClr val="2C3E50"/>
+                </a:solidFill>
+                <a:latin typeface="Calibri"/>
+              </a:rPr>
+              <a:t> (CNF): </a:t>
+            </a:r>
+            <a:r>
+              <a:rPr sz="2800" b="0" dirty="0" err="1">
+                <a:solidFill>
+                  <a:srgbClr val="2C3E50"/>
+                </a:solidFill>
+                <a:latin typeface="Calibri"/>
+              </a:rPr>
+              <a:t>conjunción</a:t>
+            </a:r>
+            <a:r>
+              <a:rPr sz="2800" b="0" dirty="0">
+                <a:solidFill>
+                  <a:srgbClr val="2C3E50"/>
+                </a:solidFill>
+                <a:latin typeface="Calibri"/>
+              </a:rPr>
+              <a:t> de </a:t>
+            </a:r>
+            <a:r>
+              <a:rPr sz="2800" b="0" dirty="0" err="1">
+                <a:solidFill>
+                  <a:srgbClr val="2C3E50"/>
+                </a:solidFill>
+                <a:latin typeface="Calibri"/>
+              </a:rPr>
+              <a:t>cláusulas</a:t>
+            </a:r>
+            <a:r>
+              <a:rPr sz="2800" b="0" dirty="0">
+                <a:solidFill>
+                  <a:srgbClr val="2C3E50"/>
+                </a:solidFill>
+                <a:latin typeface="Calibri"/>
+              </a:rPr>
+              <a:t> (</a:t>
+            </a:r>
+            <a:r>
+              <a:rPr sz="2800" b="0" dirty="0" err="1">
+                <a:solidFill>
+                  <a:srgbClr val="2C3E50"/>
+                </a:solidFill>
+                <a:latin typeface="Calibri"/>
+              </a:rPr>
+              <a:t>disyunciones</a:t>
+            </a:r>
+            <a:r>
+              <a:rPr sz="2800" b="0" dirty="0">
+                <a:solidFill>
+                  <a:srgbClr val="2C3E50"/>
+                </a:solidFill>
+                <a:latin typeface="Calibri"/>
+              </a:rPr>
+              <a:t> de </a:t>
+            </a:r>
+            <a:r>
+              <a:rPr sz="2800" b="0" dirty="0" err="1">
+                <a:solidFill>
+                  <a:srgbClr val="2C3E50"/>
+                </a:solidFill>
+                <a:latin typeface="Calibri"/>
+              </a:rPr>
+              <a:t>literales</a:t>
+            </a:r>
+            <a:r>
+              <a:rPr sz="2800" b="0" dirty="0">
+                <a:solidFill>
+                  <a:srgbClr val="2C3E50"/>
+                </a:solidFill>
+                <a:latin typeface="Calibri"/>
+              </a:rPr>
+              <a:t>).</a:t>
             </a:r>
           </a:p>
           <a:p>
@@ -14547,13 +14982,67 @@
               </a:spcAft>
             </a:pPr>
             <a:r>
-              <a:rPr sz="1700" b="0">
-                <a:solidFill>
-                  <a:srgbClr val="2C3E50"/>
-                </a:solidFill>
-                <a:latin typeface="Calibri"/>
-              </a:rPr>
-              <a:t>•  Regla proposicional: de (P ∨ A) y (¬P ∨ B) inferir (A ∨ B). El literal P se «cancela».</a:t>
+              <a:rPr sz="2800" b="0" dirty="0">
+                <a:solidFill>
+                  <a:srgbClr val="2C3E50"/>
+                </a:solidFill>
+                <a:latin typeface="Calibri"/>
+              </a:rPr>
+              <a:t>•  Regla </a:t>
+            </a:r>
+            <a:r>
+              <a:rPr sz="2800" b="0" dirty="0" err="1">
+                <a:solidFill>
+                  <a:srgbClr val="2C3E50"/>
+                </a:solidFill>
+                <a:latin typeface="Calibri"/>
+              </a:rPr>
+              <a:t>proposicional</a:t>
+            </a:r>
+            <a:r>
+              <a:rPr sz="2800" b="0" dirty="0">
+                <a:solidFill>
+                  <a:srgbClr val="2C3E50"/>
+                </a:solidFill>
+                <a:latin typeface="Calibri"/>
+              </a:rPr>
+              <a:t>: de (P ∨ A) y (¬P ∨ B) </a:t>
+            </a:r>
+            <a:r>
+              <a:rPr sz="2800" b="0" dirty="0" err="1">
+                <a:solidFill>
+                  <a:srgbClr val="2C3E50"/>
+                </a:solidFill>
+                <a:latin typeface="Calibri"/>
+              </a:rPr>
+              <a:t>inferir</a:t>
+            </a:r>
+            <a:r>
+              <a:rPr sz="2800" b="0" dirty="0">
+                <a:solidFill>
+                  <a:srgbClr val="2C3E50"/>
+                </a:solidFill>
+                <a:latin typeface="Calibri"/>
+              </a:rPr>
+              <a:t> (A ∨ B). El literal P se «</a:t>
+            </a:r>
+            <a:r>
+              <a:rPr sz="2800" b="0" dirty="0" err="1">
+                <a:solidFill>
+                  <a:srgbClr val="2C3E50"/>
+                </a:solidFill>
+                <a:latin typeface="Calibri"/>
+              </a:rPr>
+              <a:t>cancela</a:t>
+            </a:r>
+            <a:r>
+              <a:rPr sz="2800" b="0" dirty="0">
+                <a:solidFill>
+                  <a:srgbClr val="2C3E50"/>
+                </a:solidFill>
+                <a:latin typeface="Calibri"/>
+              </a:rPr>
+              <a:t>».</a:t>
             </a:r>
           </a:p>
           <a:p>
@@ -14563,13 +15052,85 @@
               </a:spcAft>
             </a:pPr>
             <a:r>
-              <a:rPr sz="1700" b="0">
-                <a:solidFill>
-                  <a:srgbClr val="2C3E50"/>
-                </a:solidFill>
-                <a:latin typeface="Calibri"/>
-              </a:rPr>
-              <a:t>•  En FOL: de (L ∨ A) y (¬M ∨ B), si UNIFY(L, M) = θ, inferir (A ∨ B)θ.</a:t>
+              <a:rPr sz="2800" b="0" dirty="0">
+                <a:solidFill>
+                  <a:srgbClr val="2C3E50"/>
+                </a:solidFill>
+                <a:latin typeface="Calibri"/>
+              </a:rPr>
+              <a:t>•  En FOL: de (L ∨ A) y (¬M ∨ B), </a:t>
+            </a:r>
+            <a:r>
+              <a:rPr sz="2800" b="0" dirty="0" err="1">
+                <a:solidFill>
+                  <a:srgbClr val="2C3E50"/>
+                </a:solidFill>
+                <a:latin typeface="Calibri"/>
+              </a:rPr>
+              <a:t>si</a:t>
+            </a:r>
+            <a:r>
+              <a:rPr sz="2800" b="0" dirty="0">
+                <a:solidFill>
+                  <a:srgbClr val="2C3E50"/>
+                </a:solidFill>
+                <a:latin typeface="Calibri"/>
+              </a:rPr>
+              <a:t> UNIFY(L, M) = </a:t>
+            </a:r>
+            <a:r>
+              <a:rPr sz="2800" b="0" dirty="0" err="1">
+                <a:solidFill>
+                  <a:srgbClr val="2C3E50"/>
+                </a:solidFill>
+                <a:latin typeface="Calibri"/>
+              </a:rPr>
+              <a:t>θ</a:t>
+            </a:r>
+            <a:r>
+              <a:rPr sz="2800" b="0" dirty="0">
+                <a:solidFill>
+                  <a:srgbClr val="2C3E50"/>
+                </a:solidFill>
+                <a:latin typeface="Calibri"/>
+              </a:rPr>
+              <a:t>, </a:t>
+            </a:r>
+            <a:r>
+              <a:rPr sz="2800" b="0" dirty="0" err="1">
+                <a:solidFill>
+                  <a:srgbClr val="2C3E50"/>
+                </a:solidFill>
+                <a:latin typeface="Calibri"/>
+              </a:rPr>
+              <a:t>inferir</a:t>
+            </a:r>
+            <a:r>
+              <a:rPr sz="2800" b="0" dirty="0">
+                <a:solidFill>
+                  <a:srgbClr val="2C3E50"/>
+                </a:solidFill>
+                <a:latin typeface="Calibri"/>
+              </a:rPr>
+              <a:t> (A ∨ B)</a:t>
+            </a:r>
+            <a:r>
+              <a:rPr sz="2800" b="0" dirty="0" err="1">
+                <a:solidFill>
+                  <a:srgbClr val="2C3E50"/>
+                </a:solidFill>
+                <a:latin typeface="Calibri"/>
+              </a:rPr>
+              <a:t>θ</a:t>
+            </a:r>
+            <a:r>
+              <a:rPr sz="2800" b="0" dirty="0">
+                <a:solidFill>
+                  <a:srgbClr val="2C3E50"/>
+                </a:solidFill>
+                <a:latin typeface="Calibri"/>
+              </a:rPr>
+              <a:t>.</a:t>
             </a:r>
           </a:p>
           <a:p>
@@ -14579,29 +15140,103 @@
               </a:spcAft>
             </a:pPr>
             <a:r>
-              <a:rPr sz="1700" b="0">
-                <a:solidFill>
-                  <a:srgbClr val="2C3E50"/>
-                </a:solidFill>
-                <a:latin typeface="Calibri"/>
-              </a:rPr>
-              <a:t>•  La cláusula vacía □ significa contradicción: KB ∪ {¬α} es insatisfacible, luego KB ⊨ α.</a:t>
-            </a:r>
-          </a:p>
-          <a:p>
-            <a:pPr>
-              <a:spcAft>
-                <a:spcPts val="1200"/>
-              </a:spcAft>
-            </a:pPr>
-            <a:r>
-              <a:rPr sz="1700" b="0">
-                <a:solidFill>
-                  <a:srgbClr val="2C3E50"/>
-                </a:solidFill>
-                <a:latin typeface="Calibri"/>
-              </a:rPr>
-              <a:t>•  La resolución es refutation-complete: si α se sigue, se puede derivar □ (con factoring).</a:t>
+              <a:rPr sz="2800" b="0" dirty="0">
+                <a:solidFill>
+                  <a:srgbClr val="2C3E50"/>
+                </a:solidFill>
+                <a:latin typeface="Calibri"/>
+              </a:rPr>
+              <a:t>•  La </a:t>
+            </a:r>
+            <a:r>
+              <a:rPr sz="2800" b="0" dirty="0" err="1">
+                <a:solidFill>
+                  <a:srgbClr val="2C3E50"/>
+                </a:solidFill>
+                <a:latin typeface="Calibri"/>
+              </a:rPr>
+              <a:t>cláusula</a:t>
+            </a:r>
+            <a:r>
+              <a:rPr sz="2800" b="0" dirty="0">
+                <a:solidFill>
+                  <a:srgbClr val="2C3E50"/>
+                </a:solidFill>
+                <a:latin typeface="Calibri"/>
+              </a:rPr>
+              <a:t> </a:t>
+            </a:r>
+            <a:r>
+              <a:rPr sz="2800" b="0" dirty="0" err="1">
+                <a:solidFill>
+                  <a:srgbClr val="2C3E50"/>
+                </a:solidFill>
+                <a:latin typeface="Calibri"/>
+              </a:rPr>
+              <a:t>vacía</a:t>
+            </a:r>
+            <a:r>
+              <a:rPr sz="2800" b="0" dirty="0">
+                <a:solidFill>
+                  <a:srgbClr val="2C3E50"/>
+                </a:solidFill>
+                <a:latin typeface="Calibri"/>
+              </a:rPr>
+              <a:t> □ </a:t>
+            </a:r>
+            <a:r>
+              <a:rPr sz="2800" b="0" dirty="0" err="1">
+                <a:solidFill>
+                  <a:srgbClr val="2C3E50"/>
+                </a:solidFill>
+                <a:latin typeface="Calibri"/>
+              </a:rPr>
+              <a:t>significa</a:t>
+            </a:r>
+            <a:r>
+              <a:rPr sz="2800" b="0" dirty="0">
+                <a:solidFill>
+                  <a:srgbClr val="2C3E50"/>
+                </a:solidFill>
+                <a:latin typeface="Calibri"/>
+              </a:rPr>
+              <a:t> </a:t>
+            </a:r>
+            <a:r>
+              <a:rPr sz="2800" b="0" dirty="0" err="1">
+                <a:solidFill>
+                  <a:srgbClr val="2C3E50"/>
+                </a:solidFill>
+                <a:latin typeface="Calibri"/>
+              </a:rPr>
+              <a:t>contradicción</a:t>
+            </a:r>
+            <a:r>
+              <a:rPr sz="2800" b="0" dirty="0">
+                <a:solidFill>
+                  <a:srgbClr val="2C3E50"/>
+                </a:solidFill>
+                <a:latin typeface="Calibri"/>
+              </a:rPr>
+              <a:t>: KB ∪ {¬α} es </a:t>
+            </a:r>
+            <a:r>
+              <a:rPr sz="2800" b="0" dirty="0" err="1">
+                <a:solidFill>
+                  <a:srgbClr val="2C3E50"/>
+                </a:solidFill>
+                <a:latin typeface="Calibri"/>
+              </a:rPr>
+              <a:t>insatisfacible</a:t>
+            </a:r>
+            <a:r>
+              <a:rPr sz="2800" b="0" dirty="0">
+                <a:solidFill>
+                  <a:srgbClr val="2C3E50"/>
+                </a:solidFill>
+                <a:latin typeface="Calibri"/>
+              </a:rPr>
+              <a:t>, luego KB ⊨ α.</a:t>
             </a:r>
           </a:p>
         </p:txBody>
@@ -14615,7 +15250,7 @@
 </file>
 
 <file path=ppt/slides/slide9.xml><?xml version="1.0" encoding="utf-8"?>
-<p:sld xmlns:a="http://schemas.openxmlformats.org/drawingml/2006/main" xmlns:p="http://schemas.openxmlformats.org/presentationml/2006/main" xmlns:r="http://schemas.openxmlformats.org/officeDocument/2006/relationships">
+<p:sld xmlns:a="http://schemas.openxmlformats.org/drawingml/2006/main" xmlns:r="http://schemas.openxmlformats.org/officeDocument/2006/relationships" xmlns:p="http://schemas.openxmlformats.org/presentationml/2006/main">
   <p:cSld>
     <p:spTree>
       <p:nvGrpSpPr>
@@ -14623,7 +15258,14 @@
         <p:cNvGrpSpPr/>
         <p:nvPr/>
       </p:nvGrpSpPr>
-      <p:grpSpPr/>
+      <p:grpSpPr>
+        <a:xfrm>
+          <a:off x="0" y="0"/>
+          <a:ext cx="0" cy="0"/>
+          <a:chOff x="0" y="0"/>
+          <a:chExt cx="0" cy="0"/>
+        </a:xfrm>
+      </p:grpSpPr>
       <p:sp>
         <p:nvSpPr>
           <p:cNvPr id="2" name="Rectangle 1"/>
@@ -14664,6 +15306,7 @@
           <a:lstStyle/>
           <a:p>
             <a:pPr algn="ctr"/>
+            <a:endParaRPr/>
           </a:p>
         </p:txBody>
       </p:sp>
@@ -14707,6 +15350,7 @@
           <a:lstStyle/>
           <a:p>
             <a:pPr algn="ctr"/>
+            <a:endParaRPr/>
           </a:p>
         </p:txBody>
       </p:sp>
@@ -14750,6 +15394,7 @@
           <a:lstStyle/>
           <a:p>
             <a:pPr algn="ctr"/>
+            <a:endParaRPr/>
           </a:p>
         </p:txBody>
       </p:sp>
@@ -14784,41 +15429,6 @@
                 <a:latin typeface="Calibri"/>
               </a:rPr>
               <a:t>Curso de Inteligencia Artificial  ·  Razonamiento lógico</a:t>
-            </a:r>
-          </a:p>
-        </p:txBody>
-      </p:sp>
-      <p:sp>
-        <p:nvSpPr>
-          <p:cNvPr id="6" name="TextBox 5"/>
-          <p:cNvSpPr txBox="1"/>
-          <p:nvPr/>
-        </p:nvSpPr>
-        <p:spPr>
-          <a:xfrm>
-            <a:off x="10378440" y="6528816"/>
-            <a:ext cx="1371600" cy="292608"/>
-          </a:xfrm>
-          <a:prstGeom prst="rect">
-            <a:avLst/>
-          </a:prstGeom>
-          <a:noFill/>
-        </p:spPr>
-        <p:txBody>
-          <a:bodyPr wrap="square" anchor="ctr">
-            <a:spAutoFit/>
-          </a:bodyPr>
-          <a:lstStyle/>
-          <a:p>
-            <a:pPr algn="r"/>
-            <a:r>
-              <a:rPr sz="1100" b="0">
-                <a:solidFill>
-                  <a:srgbClr val="FFFFFF"/>
-                </a:solidFill>
-                <a:latin typeface="Calibri"/>
-              </a:rPr>
-              <a:t>9 / 17</a:t>
             </a:r>
           </a:p>
         </p:txBody>
@@ -14898,6 +15508,7 @@
           <a:lstStyle/>
           <a:p>
             <a:pPr algn="ctr"/>
+            <a:endParaRPr/>
           </a:p>
         </p:txBody>
       </p:sp>
@@ -14938,14 +15549,14 @@
       </p:sp>
       <p:sp>
         <p:nvSpPr>
-          <p:cNvPr id="10" name="Rounded Rectangle 9"/>
+          <p:cNvPr id="13" name="Rounded Rectangle 12"/>
           <p:cNvSpPr/>
           <p:nvPr/>
         </p:nvSpPr>
         <p:spPr>
           <a:xfrm>
-            <a:off x="502920" y="1417320"/>
-            <a:ext cx="5669280" cy="4617720"/>
+            <a:off x="957431" y="1581912"/>
+            <a:ext cx="5257800" cy="4617720"/>
           </a:xfrm>
           <a:prstGeom prst="roundRect">
             <a:avLst>
@@ -14980,19 +15591,20 @@
           <a:lstStyle/>
           <a:p>
             <a:pPr algn="ctr"/>
-          </a:p>
-        </p:txBody>
-      </p:sp>
-      <p:sp>
-        <p:nvSpPr>
-          <p:cNvPr id="11" name="TextBox 10"/>
+            <a:endParaRPr/>
+          </a:p>
+        </p:txBody>
+      </p:sp>
+      <p:sp>
+        <p:nvSpPr>
+          <p:cNvPr id="14" name="TextBox 13"/>
           <p:cNvSpPr txBox="1"/>
           <p:nvPr/>
         </p:nvSpPr>
         <p:spPr>
           <a:xfrm>
-            <a:off x="777240" y="1645920"/>
-            <a:ext cx="5120640" cy="365760"/>
+            <a:off x="1231751" y="1810512"/>
+            <a:ext cx="4754880" cy="365760"/>
           </a:xfrm>
           <a:prstGeom prst="rect">
             <a:avLst/>
@@ -15007,27 +15619,42 @@
           <a:p>
             <a:pPr algn="l"/>
             <a:r>
-              <a:rPr sz="1800" b="1">
+              <a:rPr sz="1800" b="1" dirty="0">
                 <a:solidFill>
                   <a:srgbClr val="0F2C59"/>
                 </a:solidFill>
                 <a:latin typeface="Calibri"/>
               </a:rPr>
-              <a:t>Pasos</a:t>
-            </a:r>
-          </a:p>
-        </p:txBody>
-      </p:sp>
-      <p:sp>
-        <p:nvSpPr>
-          <p:cNvPr id="12" name="TextBox 11"/>
+              <a:t>Ejemplo </a:t>
+            </a:r>
+            <a:r>
+              <a:rPr sz="1800" b="1" dirty="0" err="1">
+                <a:solidFill>
+                  <a:srgbClr val="0F2C59"/>
+                </a:solidFill>
+                <a:latin typeface="Calibri"/>
+              </a:rPr>
+              <a:t>mínimo</a:t>
+            </a:r>
+            <a:endParaRPr sz="1800" b="1" dirty="0">
+              <a:solidFill>
+                <a:srgbClr val="0F2C59"/>
+              </a:solidFill>
+              <a:latin typeface="Calibri"/>
+            </a:endParaRPr>
+          </a:p>
+        </p:txBody>
+      </p:sp>
+      <p:sp>
+        <p:nvSpPr>
+          <p:cNvPr id="15" name="TextBox 14"/>
           <p:cNvSpPr txBox="1"/>
           <p:nvPr/>
         </p:nvSpPr>
         <p:spPr>
           <a:xfrm>
-            <a:off x="777240" y="2103120"/>
-            <a:ext cx="5120640" cy="3657600"/>
+            <a:off x="1231751" y="2267712"/>
+            <a:ext cx="4754880" cy="3657600"/>
           </a:xfrm>
           <a:prstGeom prst="rect">
             <a:avLst/>
@@ -15046,13 +15673,13 @@
               </a:spcAft>
             </a:pPr>
             <a:r>
-              <a:rPr sz="1500" b="0">
-                <a:solidFill>
-                  <a:srgbClr val="2C3E50"/>
-                </a:solidFill>
-                <a:latin typeface="Calibri"/>
-              </a:rPr>
-              <a:t>•  Eliminar →, ↔; mover ¬ hacia adentro.</a:t>
+              <a:rPr sz="1500" b="0" dirty="0">
+                <a:solidFill>
+                  <a:srgbClr val="2C3E50"/>
+                </a:solidFill>
+                <a:latin typeface="Calibri"/>
+              </a:rPr>
+              <a:t>•  KB:  P  →  Q     y     P</a:t>
             </a:r>
           </a:p>
           <a:p>
@@ -15062,13 +15689,31 @@
               </a:spcAft>
             </a:pPr>
             <a:r>
-              <a:rPr sz="1500" b="0">
-                <a:solidFill>
-                  <a:srgbClr val="2C3E50"/>
-                </a:solidFill>
-                <a:latin typeface="Calibri"/>
-              </a:rPr>
-              <a:t>•  Estandarizar variables; Skolemizar ∃.</a:t>
+              <a:rPr sz="1500" b="0" dirty="0">
+                <a:solidFill>
+                  <a:srgbClr val="2C3E50"/>
+                </a:solidFill>
+                <a:latin typeface="Calibri"/>
+              </a:rPr>
+              <a:t>•  Query: Q.  </a:t>
+            </a:r>
+            <a:r>
+              <a:rPr sz="1500" b="0" dirty="0" err="1">
+                <a:solidFill>
+                  <a:srgbClr val="2C3E50"/>
+                </a:solidFill>
+                <a:latin typeface="Calibri"/>
+              </a:rPr>
+              <a:t>Añadir</a:t>
+            </a:r>
+            <a:r>
+              <a:rPr sz="1500" b="0" dirty="0">
+                <a:solidFill>
+                  <a:srgbClr val="2C3E50"/>
+                </a:solidFill>
+                <a:latin typeface="Calibri"/>
+              </a:rPr>
+              <a:t> ¬Q.</a:t>
             </a:r>
           </a:p>
           <a:p>
@@ -15078,13 +15723,13 @@
               </a:spcAft>
             </a:pPr>
             <a:r>
-              <a:rPr sz="1500" b="0">
-                <a:solidFill>
-                  <a:srgbClr val="2C3E50"/>
-                </a:solidFill>
-                <a:latin typeface="Calibri"/>
-              </a:rPr>
-              <a:t>•  Sacar ∀; distribuir ∨ sobre ∧.</a:t>
+              <a:rPr sz="1500" b="0" dirty="0">
+                <a:solidFill>
+                  <a:srgbClr val="2C3E50"/>
+                </a:solidFill>
+                <a:latin typeface="Calibri"/>
+              </a:rPr>
+              <a:t>•  CNF:  (¬P ∨ Q),  P,  ¬Q</a:t>
             </a:r>
           </a:p>
           <a:p>
@@ -15094,13 +15739,13 @@
               </a:spcAft>
             </a:pPr>
             <a:r>
-              <a:rPr sz="1500" b="0">
-                <a:solidFill>
-                  <a:srgbClr val="2C3E50"/>
-                </a:solidFill>
-                <a:latin typeface="Calibri"/>
-              </a:rPr>
-              <a:t>•  Repetir: elegir dos cláusulas, resolver, añadir el resolvente.</a:t>
+              <a:rPr sz="1500" b="0" dirty="0">
+                <a:solidFill>
+                  <a:srgbClr val="2C3E50"/>
+                </a:solidFill>
+                <a:latin typeface="Calibri"/>
+              </a:rPr>
+              <a:t>•  Resolver P con (¬P ∨ Q) → Q</a:t>
             </a:r>
           </a:p>
           <a:p>
@@ -15110,120 +15755,15 @@
               </a:spcAft>
             </a:pPr>
             <a:r>
-              <a:rPr sz="1500" b="0">
-                <a:solidFill>
-                  <a:srgbClr val="2C3E50"/>
-                </a:solidFill>
-                <a:latin typeface="Calibri"/>
-              </a:rPr>
-              <a:t>•  Parar si aparece □ (éxito) o no hay resolventes nuevos (falla).</a:t>
-            </a:r>
-          </a:p>
-        </p:txBody>
-      </p:sp>
-      <p:sp>
-        <p:nvSpPr>
-          <p:cNvPr id="13" name="Rounded Rectangle 12"/>
-          <p:cNvSpPr/>
-          <p:nvPr/>
-        </p:nvSpPr>
-        <p:spPr>
-          <a:xfrm>
-            <a:off x="6400800" y="1417320"/>
-            <a:ext cx="5257800" cy="4617720"/>
-          </a:xfrm>
-          <a:prstGeom prst="roundRect">
-            <a:avLst>
-              <a:gd name="adj" fmla="val 8000"/>
-            </a:avLst>
-          </a:prstGeom>
-          <a:solidFill>
-            <a:srgbClr val="F6F8FB"/>
-          </a:solidFill>
-          <a:ln w="15875">
-            <a:solidFill>
-              <a:srgbClr val="D5DEE8"/>
-            </a:solidFill>
-          </a:ln>
-        </p:spPr>
-        <p:style>
-          <a:lnRef idx="1">
-            <a:schemeClr val="accent1"/>
-          </a:lnRef>
-          <a:fillRef idx="3">
-            <a:schemeClr val="accent1"/>
-          </a:fillRef>
-          <a:effectRef idx="2">
-            <a:schemeClr val="accent1"/>
-          </a:effectRef>
-          <a:fontRef idx="minor">
-            <a:schemeClr val="lt1"/>
-          </a:fontRef>
-        </p:style>
-        <p:txBody>
-          <a:bodyPr rtlCol="0" anchor="ctr"/>
-          <a:lstStyle/>
-          <a:p>
-            <a:pPr algn="ctr"/>
-          </a:p>
-        </p:txBody>
-      </p:sp>
-      <p:sp>
-        <p:nvSpPr>
-          <p:cNvPr id="14" name="TextBox 13"/>
-          <p:cNvSpPr txBox="1"/>
-          <p:nvPr/>
-        </p:nvSpPr>
-        <p:spPr>
-          <a:xfrm>
-            <a:off x="6675120" y="1645920"/>
-            <a:ext cx="4754880" cy="365760"/>
-          </a:xfrm>
-          <a:prstGeom prst="rect">
-            <a:avLst/>
-          </a:prstGeom>
-          <a:noFill/>
-        </p:spPr>
-        <p:txBody>
-          <a:bodyPr wrap="square" anchor="t">
-            <a:spAutoFit/>
-          </a:bodyPr>
-          <a:lstStyle/>
-          <a:p>
-            <a:pPr algn="l"/>
-            <a:r>
-              <a:rPr sz="1800" b="1">
-                <a:solidFill>
-                  <a:srgbClr val="0F2C59"/>
-                </a:solidFill>
-                <a:latin typeface="Calibri"/>
-              </a:rPr>
-              <a:t>Ejemplo mínimo</a:t>
-            </a:r>
-          </a:p>
-        </p:txBody>
-      </p:sp>
-      <p:sp>
-        <p:nvSpPr>
-          <p:cNvPr id="15" name="TextBox 14"/>
-          <p:cNvSpPr txBox="1"/>
-          <p:nvPr/>
-        </p:nvSpPr>
-        <p:spPr>
-          <a:xfrm>
-            <a:off x="6675120" y="2103120"/>
-            <a:ext cx="4754880" cy="3657600"/>
-          </a:xfrm>
-          <a:prstGeom prst="rect">
-            <a:avLst/>
-          </a:prstGeom>
-          <a:noFill/>
-        </p:spPr>
-        <p:txBody>
-          <a:bodyPr wrap="square" anchor="t">
-            <a:spAutoFit/>
-          </a:bodyPr>
-          <a:lstStyle/>
+              <a:rPr sz="1500" b="0" dirty="0">
+                <a:solidFill>
+                  <a:srgbClr val="2C3E50"/>
+                </a:solidFill>
+                <a:latin typeface="Calibri"/>
+              </a:rPr>
+              <a:t>•  Resolver Q con ¬Q →  □</a:t>
+            </a:r>
+          </a:p>
           <a:p>
             <a:pPr>
               <a:spcAft>
@@ -15231,87 +15771,7 @@
               </a:spcAft>
             </a:pPr>
             <a:r>
-              <a:rPr sz="1500" b="0">
-                <a:solidFill>
-                  <a:srgbClr val="2C3E50"/>
-                </a:solidFill>
-                <a:latin typeface="Calibri"/>
-              </a:rPr>
-              <a:t>•  KB:  P  →  Q     y     P</a:t>
-            </a:r>
-          </a:p>
-          <a:p>
-            <a:pPr>
-              <a:spcAft>
-                <a:spcPts val="1000"/>
-              </a:spcAft>
-            </a:pPr>
-            <a:r>
-              <a:rPr sz="1500" b="0">
-                <a:solidFill>
-                  <a:srgbClr val="2C3E50"/>
-                </a:solidFill>
-                <a:latin typeface="Calibri"/>
-              </a:rPr>
-              <a:t>•  Query: Q.  Añadir ¬Q.</a:t>
-            </a:r>
-          </a:p>
-          <a:p>
-            <a:pPr>
-              <a:spcAft>
-                <a:spcPts val="1000"/>
-              </a:spcAft>
-            </a:pPr>
-            <a:r>
-              <a:rPr sz="1500" b="0">
-                <a:solidFill>
-                  <a:srgbClr val="2C3E50"/>
-                </a:solidFill>
-                <a:latin typeface="Calibri"/>
-              </a:rPr>
-              <a:t>•  CNF:  (¬P ∨ Q),  P,  ¬Q</a:t>
-            </a:r>
-          </a:p>
-          <a:p>
-            <a:pPr>
-              <a:spcAft>
-                <a:spcPts val="1000"/>
-              </a:spcAft>
-            </a:pPr>
-            <a:r>
-              <a:rPr sz="1500" b="0">
-                <a:solidFill>
-                  <a:srgbClr val="2C3E50"/>
-                </a:solidFill>
-                <a:latin typeface="Calibri"/>
-              </a:rPr>
-              <a:t>•  Resolver P con (¬P ∨ Q) → Q</a:t>
-            </a:r>
-          </a:p>
-          <a:p>
-            <a:pPr>
-              <a:spcAft>
-                <a:spcPts val="1000"/>
-              </a:spcAft>
-            </a:pPr>
-            <a:r>
-              <a:rPr sz="1500" b="0">
-                <a:solidFill>
-                  <a:srgbClr val="2C3E50"/>
-                </a:solidFill>
-                <a:latin typeface="Calibri"/>
-              </a:rPr>
-              <a:t>•  Resolver Q con ¬Q →  □</a:t>
-            </a:r>
-          </a:p>
-          <a:p>
-            <a:pPr>
-              <a:spcAft>
-                <a:spcPts val="1000"/>
-              </a:spcAft>
-            </a:pPr>
-            <a:r>
-              <a:rPr sz="1500" b="0">
+              <a:rPr sz="1500" b="0" dirty="0">
                 <a:solidFill>
                   <a:srgbClr val="2C3E50"/>
                 </a:solidFill>
